--- a/lendet/2026-2027/mobile/lectures/ushtrimet-05-hyrja-lejet-rideshare-2026.pptx
+++ b/lendet/2026-2027/mobile/lectures/ushtrimet-05-hyrja-lejet-rideshare-2026.pptx
@@ -2,22 +2,23 @@
 <file path=ppt/presentation.xml><?xml version="1.0" encoding="utf-8"?>
 <p:presentation xmlns:p="http://schemas.openxmlformats.org/presentationml/2006/main">
   <p:sldMasterIdLst>
-    <p:sldMasterId xmlns:r="http://schemas.openxmlformats.org/officeDocument/2006/relationships" id="2147483648" r:id="Ra266b02255194aea"/>
+    <p:sldMasterId xmlns:r="http://schemas.openxmlformats.org/officeDocument/2006/relationships" id="2147483648" r:id="Red7867abea7a4f98"/>
   </p:sldMasterIdLst>
   <p:sldIdLst>
-    <p:sldId xmlns:r="http://schemas.openxmlformats.org/officeDocument/2006/relationships" id="256" r:id="R1b20da40edea44ab"/>
-    <p:sldId xmlns:r="http://schemas.openxmlformats.org/officeDocument/2006/relationships" id="257" r:id="R4c090a247779474d"/>
-    <p:sldId xmlns:r="http://schemas.openxmlformats.org/officeDocument/2006/relationships" id="258" r:id="R3bd8a4cb691341a6"/>
-    <p:sldId xmlns:r="http://schemas.openxmlformats.org/officeDocument/2006/relationships" id="259" r:id="R60119af0b896410c"/>
-    <p:sldId xmlns:r="http://schemas.openxmlformats.org/officeDocument/2006/relationships" id="260" r:id="R09aa9093f8c24298"/>
-    <p:sldId xmlns:r="http://schemas.openxmlformats.org/officeDocument/2006/relationships" id="261" r:id="Rfefb05a32f694ba4"/>
-    <p:sldId xmlns:r="http://schemas.openxmlformats.org/officeDocument/2006/relationships" id="262" r:id="R97791090a1404f78"/>
-    <p:sldId xmlns:r="http://schemas.openxmlformats.org/officeDocument/2006/relationships" id="263" r:id="Rd8a03ff7ba794e61"/>
-    <p:sldId xmlns:r="http://schemas.openxmlformats.org/officeDocument/2006/relationships" id="264" r:id="R7eca6836da344194"/>
-    <p:sldId xmlns:r="http://schemas.openxmlformats.org/officeDocument/2006/relationships" id="265" r:id="R3cc5edc04346428e"/>
-    <p:sldId xmlns:r="http://schemas.openxmlformats.org/officeDocument/2006/relationships" id="266" r:id="R87c343f8efc44c4f"/>
-    <p:sldId xmlns:r="http://schemas.openxmlformats.org/officeDocument/2006/relationships" id="267" r:id="R76dca971aa514146"/>
-    <p:sldId xmlns:r="http://schemas.openxmlformats.org/officeDocument/2006/relationships" id="268" r:id="R49e0b4f8e9164cfc"/>
+    <p:sldId xmlns:r="http://schemas.openxmlformats.org/officeDocument/2006/relationships" id="256" r:id="R4293f53bdb6447aa"/>
+    <p:sldId xmlns:r="http://schemas.openxmlformats.org/officeDocument/2006/relationships" id="257" r:id="R5cd12bb736fd4047"/>
+    <p:sldId xmlns:r="http://schemas.openxmlformats.org/officeDocument/2006/relationships" id="258" r:id="Ra6f4419e78e542c4"/>
+    <p:sldId xmlns:r="http://schemas.openxmlformats.org/officeDocument/2006/relationships" id="259" r:id="Rabda7ad0400e406f"/>
+    <p:sldId xmlns:r="http://schemas.openxmlformats.org/officeDocument/2006/relationships" id="260" r:id="R6dcd18c1422b4f19"/>
+    <p:sldId xmlns:r="http://schemas.openxmlformats.org/officeDocument/2006/relationships" id="261" r:id="R6e7d700748da430b"/>
+    <p:sldId xmlns:r="http://schemas.openxmlformats.org/officeDocument/2006/relationships" id="262" r:id="R2f2e465519754186"/>
+    <p:sldId xmlns:r="http://schemas.openxmlformats.org/officeDocument/2006/relationships" id="263" r:id="Rf19d4347e2364e24"/>
+    <p:sldId xmlns:r="http://schemas.openxmlformats.org/officeDocument/2006/relationships" id="264" r:id="R3c701d0f98084ea7"/>
+    <p:sldId xmlns:r="http://schemas.openxmlformats.org/officeDocument/2006/relationships" id="265" r:id="Rd6b1c34967b846ae"/>
+    <p:sldId xmlns:r="http://schemas.openxmlformats.org/officeDocument/2006/relationships" id="266" r:id="R540b434b1131462c"/>
+    <p:sldId xmlns:r="http://schemas.openxmlformats.org/officeDocument/2006/relationships" id="267" r:id="Rcfa27e2fb450401b"/>
+    <p:sldId xmlns:r="http://schemas.openxmlformats.org/officeDocument/2006/relationships" id="268" r:id="R8e1a87d0a61341cd"/>
+    <p:sldId xmlns:r="http://schemas.openxmlformats.org/officeDocument/2006/relationships" id="269" r:id="R0e4183fdee364b93"/>
   </p:sldIdLst>
   <p:sldSz cx="12192000" cy="6858000"/>
   <p:notesSz cx="6858000" cy="9144000"/>
@@ -41,7 +42,7 @@
           <p:cNvPr id="3" name="Title">
             <a:extLst xmlns:a="http://schemas.openxmlformats.org/drawingml/2006/main">
               <a:ext uri="{FF2B5EF4-FFF2-40B4-BE49-F238E27FC236}">
-                <a16:creationId xmlns:a16="http://schemas.microsoft.com/office/drawing/2014/main" id="{33D90FD7-9BFF-4D66-B76D-1DA67F3062A5}"/>
+                <a16:creationId xmlns:a16="http://schemas.microsoft.com/office/drawing/2014/main" id="{4B268428-4A84-4F77-A129-CF4061E50683}"/>
               </a:ext>
             </a:extLst>
           </p:cNvPr>
@@ -198,7 +199,7 @@
           <p:cNvPr id="2" name="Subtitle">
             <a:extLst xmlns:a="http://schemas.openxmlformats.org/drawingml/2006/main">
               <a:ext uri="{FF2B5EF4-FFF2-40B4-BE49-F238E27FC236}">
-                <a16:creationId xmlns:a16="http://schemas.microsoft.com/office/drawing/2014/main" id="{86F3A1D3-8310-4029-9ACA-24D596D4C2F3}"/>
+                <a16:creationId xmlns:a16="http://schemas.microsoft.com/office/drawing/2014/main" id="{E1B20DD8-C5C1-4EE0-B230-3CD6437901DB}"/>
               </a:ext>
             </a:extLst>
           </p:cNvPr>
@@ -372,7 +373,7 @@
           <p:cNvPr id="2" name="Section title">
             <a:extLst xmlns:a="http://schemas.openxmlformats.org/drawingml/2006/main">
               <a:ext uri="{FF2B5EF4-FFF2-40B4-BE49-F238E27FC236}">
-                <a16:creationId xmlns:a16="http://schemas.microsoft.com/office/drawing/2014/main" id="{DCD5709F-B9DE-4AAE-AAE6-8D865CBCBE00}"/>
+                <a16:creationId xmlns:a16="http://schemas.microsoft.com/office/drawing/2014/main" id="{19BF7EB9-CB17-44E5-AD00-2DA977AB0CA0}"/>
               </a:ext>
             </a:extLst>
           </p:cNvPr>
@@ -546,7 +547,7 @@
           <p:cNvPr id="3" name="Title">
             <a:extLst xmlns:a="http://schemas.openxmlformats.org/drawingml/2006/main">
               <a:ext uri="{FF2B5EF4-FFF2-40B4-BE49-F238E27FC236}">
-                <a16:creationId xmlns:a16="http://schemas.microsoft.com/office/drawing/2014/main" id="{D5C39CE8-95B5-430F-B67B-1DC0F51C4FDA}"/>
+                <a16:creationId xmlns:a16="http://schemas.microsoft.com/office/drawing/2014/main" id="{F748F749-C1FC-4234-923E-16D44E8B749D}"/>
               </a:ext>
             </a:extLst>
           </p:cNvPr>
@@ -703,7 +704,7 @@
           <p:cNvPr id="2" name="Body">
             <a:extLst xmlns:a="http://schemas.openxmlformats.org/drawingml/2006/main">
               <a:ext uri="{FF2B5EF4-FFF2-40B4-BE49-F238E27FC236}">
-                <a16:creationId xmlns:a16="http://schemas.microsoft.com/office/drawing/2014/main" id="{7B431F51-050E-4221-ACE0-E03B728BA1D3}"/>
+                <a16:creationId xmlns:a16="http://schemas.microsoft.com/office/drawing/2014/main" id="{A046B0A6-6098-43AB-B355-F4FC53EE264B}"/>
               </a:ext>
             </a:extLst>
           </p:cNvPr>
@@ -877,7 +878,7 @@
           <p:cNvPr id="4" name="Title">
             <a:extLst xmlns:a="http://schemas.openxmlformats.org/drawingml/2006/main">
               <a:ext uri="{FF2B5EF4-FFF2-40B4-BE49-F238E27FC236}">
-                <a16:creationId xmlns:a16="http://schemas.microsoft.com/office/drawing/2014/main" id="{A89576B1-21F1-4952-B8CF-130666D1354B}"/>
+                <a16:creationId xmlns:a16="http://schemas.microsoft.com/office/drawing/2014/main" id="{A52A2020-CB2C-4889-B0AF-70C40907D9DD}"/>
               </a:ext>
             </a:extLst>
           </p:cNvPr>
@@ -1034,7 +1035,7 @@
           <p:cNvPr id="2" name="Left column">
             <a:extLst xmlns:a="http://schemas.openxmlformats.org/drawingml/2006/main">
               <a:ext uri="{FF2B5EF4-FFF2-40B4-BE49-F238E27FC236}">
-                <a16:creationId xmlns:a16="http://schemas.microsoft.com/office/drawing/2014/main" id="{19F99C5A-3801-4BE7-87A7-34CEA45375D2}"/>
+                <a16:creationId xmlns:a16="http://schemas.microsoft.com/office/drawing/2014/main" id="{1F430A71-17D4-432D-A9C3-0DC15384D758}"/>
               </a:ext>
             </a:extLst>
           </p:cNvPr>
@@ -1191,7 +1192,7 @@
           <p:cNvPr id="3" name="Right column">
             <a:extLst xmlns:a="http://schemas.openxmlformats.org/drawingml/2006/main">
               <a:ext uri="{FF2B5EF4-FFF2-40B4-BE49-F238E27FC236}">
-                <a16:creationId xmlns:a16="http://schemas.microsoft.com/office/drawing/2014/main" id="{3182CC3F-AA06-49A8-B0C0-1EF0F2216707}"/>
+                <a16:creationId xmlns:a16="http://schemas.microsoft.com/office/drawing/2014/main" id="{616FBEFD-4607-40A0-8E59-0A441528D7DF}"/>
               </a:ext>
             </a:extLst>
           </p:cNvPr>
@@ -1365,7 +1366,7 @@
           <p:cNvPr id="3" name="Title">
             <a:extLst xmlns:a="http://schemas.openxmlformats.org/drawingml/2006/main">
               <a:ext uri="{FF2B5EF4-FFF2-40B4-BE49-F238E27FC236}">
-                <a16:creationId xmlns:a16="http://schemas.microsoft.com/office/drawing/2014/main" id="{9BD38A6C-F293-4B59-A4D8-9F602E012FF8}"/>
+                <a16:creationId xmlns:a16="http://schemas.microsoft.com/office/drawing/2014/main" id="{D6703742-EAB9-4FD3-8C6B-3FBF20FA0FED}"/>
               </a:ext>
             </a:extLst>
           </p:cNvPr>
@@ -1522,7 +1523,7 @@
           <p:cNvPr id="2" name="Left column">
             <a:extLst xmlns:a="http://schemas.openxmlformats.org/drawingml/2006/main">
               <a:ext uri="{FF2B5EF4-FFF2-40B4-BE49-F238E27FC236}">
-                <a16:creationId xmlns:a16="http://schemas.microsoft.com/office/drawing/2014/main" id="{CA636591-88C4-4F17-9ABC-BE0604361D05}"/>
+                <a16:creationId xmlns:a16="http://schemas.microsoft.com/office/drawing/2014/main" id="{F9BB1E81-54D0-445B-849E-D74390FE2F20}"/>
               </a:ext>
             </a:extLst>
           </p:cNvPr>
@@ -1717,12 +1718,12 @@
   </p:cSld>
   <p:clrMap bg1="lt1" tx1="dk1" bg2="lt2" tx2="dk2" accent1="accent1" accent2="accent2" accent3="accent3" accent4="accent4" accent5="accent5" accent6="accent6" hlink="hlink" folHlink="folHlink"/>
   <p:sldLayoutIdLst>
-    <p:sldLayoutId xmlns:r="http://schemas.openxmlformats.org/officeDocument/2006/relationships" id="2147483649" r:id="R9337798ea5ec4d91"/>
-    <p:sldLayoutId xmlns:r="http://schemas.openxmlformats.org/officeDocument/2006/relationships" id="2147483650" r:id="R616755b9bd6143bc"/>
-    <p:sldLayoutId xmlns:r="http://schemas.openxmlformats.org/officeDocument/2006/relationships" id="2147483651" r:id="R56c3a76527084cf2"/>
-    <p:sldLayoutId xmlns:r="http://schemas.openxmlformats.org/officeDocument/2006/relationships" id="2147483652" r:id="Rc1c4164200284a35"/>
-    <p:sldLayoutId xmlns:r="http://schemas.openxmlformats.org/officeDocument/2006/relationships" id="2147483653" r:id="Re5cf0bfb9a1949f4"/>
-    <p:sldLayoutId xmlns:r="http://schemas.openxmlformats.org/officeDocument/2006/relationships" id="2147483654" r:id="Raba7283ded524270"/>
+    <p:sldLayoutId xmlns:r="http://schemas.openxmlformats.org/officeDocument/2006/relationships" id="2147483649" r:id="R7b6f726bf93e46dd"/>
+    <p:sldLayoutId xmlns:r="http://schemas.openxmlformats.org/officeDocument/2006/relationships" id="2147483650" r:id="Ra90b673b78814c4b"/>
+    <p:sldLayoutId xmlns:r="http://schemas.openxmlformats.org/officeDocument/2006/relationships" id="2147483651" r:id="R8ca8491e8a8b455d"/>
+    <p:sldLayoutId xmlns:r="http://schemas.openxmlformats.org/officeDocument/2006/relationships" id="2147483652" r:id="Rc209707b73ed400a"/>
+    <p:sldLayoutId xmlns:r="http://schemas.openxmlformats.org/officeDocument/2006/relationships" id="2147483653" r:id="Rbd342144186949c4"/>
+    <p:sldLayoutId xmlns:r="http://schemas.openxmlformats.org/officeDocument/2006/relationships" id="2147483654" r:id="R167d6f7b7090427d"/>
   </p:sldLayoutIdLst>
   <p:txStyles>
     <p:titleStyle>
@@ -2273,7 +2274,7 @@
           <p:cNvPr id="7" name="">
             <a:extLst xmlns:a="http://schemas.openxmlformats.org/drawingml/2006/main">
               <a:ext uri="{FF2B5EF4-FFF2-40B4-BE49-F238E27FC236}">
-                <a16:creationId xmlns:a16="http://schemas.microsoft.com/office/drawing/2014/main" id="{09D9EFAA-6C28-4EA3-BC32-71789743ECFA}"/>
+                <a16:creationId xmlns:a16="http://schemas.microsoft.com/office/drawing/2014/main" id="{1794F021-1B96-43D1-ACEF-888205919E03}"/>
               </a:ext>
             </a:extLst>
           </p:cNvPr>
@@ -2341,7 +2342,7 @@
           <p:cNvPr id="2" name="">
             <a:extLst xmlns:a="http://schemas.openxmlformats.org/drawingml/2006/main">
               <a:ext uri="{FF2B5EF4-FFF2-40B4-BE49-F238E27FC236}">
-                <a16:creationId xmlns:a16="http://schemas.microsoft.com/office/drawing/2014/main" id="{BE051C77-DEF2-4D2D-89B9-DBD823289F70}"/>
+                <a16:creationId xmlns:a16="http://schemas.microsoft.com/office/drawing/2014/main" id="{B52C234D-636E-46CA-A3CF-C5301CEC290B}"/>
               </a:ext>
             </a:extLst>
           </p:cNvPr>
@@ -2399,7 +2400,7 @@
                 <a:ea typeface="Arial"/>
                 <a:cs typeface="Arial"/>
               </a:rPr>
-              <a:t>01 / 13</a:t>
+              <a:t>01 / 14</a:t>
             </a:r>
           </a:p>
         </p:txBody>
@@ -2409,7 +2410,7 @@
           <p:cNvPr id="3" name="">
             <a:extLst xmlns:a="http://schemas.openxmlformats.org/drawingml/2006/main">
               <a:ext uri="{FF2B5EF4-FFF2-40B4-BE49-F238E27FC236}">
-                <a16:creationId xmlns:a16="http://schemas.microsoft.com/office/drawing/2014/main" id="{8BB6F061-652B-450A-B375-4117F82A899E}"/>
+                <a16:creationId xmlns:a16="http://schemas.microsoft.com/office/drawing/2014/main" id="{A4F8EB4E-8D10-4858-B468-A3F854F392FA}"/>
               </a:ext>
             </a:extLst>
           </p:cNvPr>
@@ -2419,7 +2420,7 @@
           <p:nvPr/>
         </p:nvPicPr>
         <p:blipFill>
-          <a:blip xmlns:r="http://schemas.openxmlformats.org/officeDocument/2006/relationships" xmlns:a="http://schemas.openxmlformats.org/drawingml/2006/main" r:embed="R3ab16b7777314498"/>
+          <a:blip xmlns:r="http://schemas.openxmlformats.org/officeDocument/2006/relationships" xmlns:a="http://schemas.openxmlformats.org/drawingml/2006/main" r:embed="Rf1de8a28ab07412a"/>
           <a:stretch xmlns:a="http://schemas.openxmlformats.org/drawingml/2006/main"/>
         </p:blipFill>
         <p:spPr>
@@ -2437,7 +2438,7 @@
           <p:cNvPr id="4" name="">
             <a:extLst xmlns:a="http://schemas.openxmlformats.org/drawingml/2006/main">
               <a:ext uri="{FF2B5EF4-FFF2-40B4-BE49-F238E27FC236}">
-                <a16:creationId xmlns:a16="http://schemas.microsoft.com/office/drawing/2014/main" id="{87590199-D8C6-4AE2-8684-AB217E19D48A}"/>
+                <a16:creationId xmlns:a16="http://schemas.microsoft.com/office/drawing/2014/main" id="{531F3A39-D41C-4330-9E17-7E57D76956C7}"/>
               </a:ext>
             </a:extLst>
           </p:cNvPr>
@@ -2505,7 +2506,7 @@
           <p:cNvPr id="5" name="">
             <a:extLst xmlns:a="http://schemas.openxmlformats.org/drawingml/2006/main">
               <a:ext uri="{FF2B5EF4-FFF2-40B4-BE49-F238E27FC236}">
-                <a16:creationId xmlns:a16="http://schemas.microsoft.com/office/drawing/2014/main" id="{D30AB4AC-F4CE-4DCA-9467-0768E424CF62}"/>
+                <a16:creationId xmlns:a16="http://schemas.microsoft.com/office/drawing/2014/main" id="{3933FE87-0511-4E3F-A254-9C6B933D80D9}"/>
               </a:ext>
             </a:extLst>
           </p:cNvPr>
@@ -2601,7 +2602,7 @@
           <p:cNvPr id="6" name="">
             <a:extLst xmlns:a="http://schemas.openxmlformats.org/drawingml/2006/main">
               <a:ext uri="{FF2B5EF4-FFF2-40B4-BE49-F238E27FC236}">
-                <a16:creationId xmlns:a16="http://schemas.microsoft.com/office/drawing/2014/main" id="{EE97C475-E6AB-46DB-A6D7-E347379738C6}"/>
+                <a16:creationId xmlns:a16="http://schemas.microsoft.com/office/drawing/2014/main" id="{5369DC9D-2763-499C-B45D-E56E8BDC901D}"/>
               </a:ext>
             </a:extLst>
           </p:cNvPr>
@@ -2667,7 +2668,7 @@
     </p:spTree>
     <p:extLst>
       <p:ext uri="{BB962C8B-B14F-4D97-AF65-F5344CB8AC3E}">
-        <p14:creationId xmlns:p14="http://schemas.microsoft.com/office/powerpoint/2010/main" val="393408519"/>
+        <p14:creationId xmlns:p14="http://schemas.microsoft.com/office/powerpoint/2010/main" val="1656946579"/>
       </p:ext>
     </p:extLst>
   </p:cSld>
@@ -2695,10 +2696,10 @@
       </p:grpSpPr>
       <p:sp>
         <p:nvSpPr>
-          <p:cNvPr id="12" name="">
+          <p:cNvPr id="5" name="">
             <a:extLst xmlns:a="http://schemas.openxmlformats.org/drawingml/2006/main">
               <a:ext uri="{FF2B5EF4-FFF2-40B4-BE49-F238E27FC236}">
-                <a16:creationId xmlns:a16="http://schemas.microsoft.com/office/drawing/2014/main" id="{5FE99913-D5DE-4E76-9DB5-00A2BBA93306}"/>
+                <a16:creationId xmlns:a16="http://schemas.microsoft.com/office/drawing/2014/main" id="{91E0E2FD-F101-4EE5-B1A0-C08BB686CD14}"/>
               </a:ext>
             </a:extLst>
           </p:cNvPr>
@@ -2766,7 +2767,7 @@
           <p:cNvPr id="2" name="">
             <a:extLst xmlns:a="http://schemas.openxmlformats.org/drawingml/2006/main">
               <a:ext uri="{FF2B5EF4-FFF2-40B4-BE49-F238E27FC236}">
-                <a16:creationId xmlns:a16="http://schemas.microsoft.com/office/drawing/2014/main" id="{17B71AFE-A90D-4705-B9DC-65305E8A7E8C}"/>
+                <a16:creationId xmlns:a16="http://schemas.microsoft.com/office/drawing/2014/main" id="{C4F6E657-7CDF-48D0-8D69-62306C04925E}"/>
               </a:ext>
             </a:extLst>
           </p:cNvPr>
@@ -2824,7 +2825,7 @@
                 <a:ea typeface="Arial"/>
                 <a:cs typeface="Arial"/>
               </a:rPr>
-              <a:t>10 / 13</a:t>
+              <a:t>10 / 14</a:t>
             </a:r>
           </a:p>
         </p:txBody>
@@ -2834,7 +2835,7 @@
           <p:cNvPr id="3" name="">
             <a:extLst xmlns:a="http://schemas.openxmlformats.org/drawingml/2006/main">
               <a:ext uri="{FF2B5EF4-FFF2-40B4-BE49-F238E27FC236}">
-                <a16:creationId xmlns:a16="http://schemas.microsoft.com/office/drawing/2014/main" id="{019ABD22-2E8F-421C-BD48-46919353EF35}"/>
+                <a16:creationId xmlns:a16="http://schemas.microsoft.com/office/drawing/2014/main" id="{A90468E2-0989-4762-A845-1DBAF92E38ED}"/>
               </a:ext>
             </a:extLst>
           </p:cNvPr>
@@ -2892,7 +2893,7 @@
                 <a:ea typeface="Arial"/>
                 <a:cs typeface="Arial"/>
               </a:rPr>
-              <a:t>Prova 2: ruajtja e lejuar</a:t>
+              <a:t>Prova 1: hyrja dhe dalja</a:t>
             </a:r>
           </a:p>
         </p:txBody>
@@ -2902,7 +2903,7 @@
           <p:cNvPr id="4" name="">
             <a:extLst xmlns:a="http://schemas.openxmlformats.org/drawingml/2006/main">
               <a:ext uri="{FF2B5EF4-FFF2-40B4-BE49-F238E27FC236}">
-                <a16:creationId xmlns:a16="http://schemas.microsoft.com/office/drawing/2014/main" id="{31505095-C8AD-416C-9B82-FE318B5CC83E}"/>
+                <a16:creationId xmlns:a16="http://schemas.microsoft.com/office/drawing/2014/main" id="{A826F17D-C0D0-480F-9202-B84A46D8FFDF}"/>
               </a:ext>
             </a:extLst>
           </p:cNvPr>
@@ -2960,6 +2961,363 @@
                 <a:ea typeface="Arial"/>
                 <a:cs typeface="Arial"/>
               </a:rPr>
+              <a:t>Hap panelin pa hyrë. Hyr me GitHub, rifresko dhe shiko emrin.</a:t>
+            </a:r>
+          </a:p>
+          <a:p xmlns:a="http://schemas.openxmlformats.org/drawingml/2006/main">
+            <a:r>
+              <a:t/>
+            </a:r>
+          </a:p>
+          <a:p xmlns:a="http://schemas.openxmlformats.org/drawingml/2006/main">
+            <a:pPr>
+              <a:defRPr sz="2025" b="0">
+                <a:solidFill>
+                  <a:srgbClr val="EAF1FF"/>
+                </a:solidFill>
+                <a:latin typeface="Arial"/>
+                <a:ea typeface="Arial"/>
+                <a:cs typeface="Arial"/>
+              </a:defRPr>
+            </a:pPr>
+            <a:r>
+              <a:rPr sz="2025" b="0">
+                <a:solidFill>
+                  <a:srgbClr val="EAF1FF"/>
+                </a:solidFill>
+                <a:latin typeface="Arial"/>
+                <a:ea typeface="Arial"/>
+                <a:cs typeface="Arial"/>
+              </a:rPr>
+              <a:t>Hape panelin edhe në një skedë tjetër. Dil në të parën.</a:t>
+            </a:r>
+          </a:p>
+          <a:p xmlns:a="http://schemas.openxmlformats.org/drawingml/2006/main">
+            <a:r>
+              <a:t/>
+            </a:r>
+          </a:p>
+          <a:p xmlns:a="http://schemas.openxmlformats.org/drawingml/2006/main">
+            <a:pPr>
+              <a:defRPr sz="2025" b="0">
+                <a:solidFill>
+                  <a:srgbClr val="EAF1FF"/>
+                </a:solidFill>
+                <a:latin typeface="Arial"/>
+                <a:ea typeface="Arial"/>
+                <a:cs typeface="Arial"/>
+              </a:defRPr>
+            </a:pPr>
+            <a:r>
+              <a:rPr sz="2025" b="0">
+                <a:solidFill>
+                  <a:srgbClr val="EAF1FF"/>
+                </a:solidFill>
+                <a:latin typeface="Arial"/>
+                <a:ea typeface="Arial"/>
+                <a:cs typeface="Arial"/>
+              </a:rPr>
+              <a:t>Rifresko të dytën: duhet të kërkojë hyrje. Shkruaj rezultatin në raport.</a:t>
+            </a:r>
+          </a:p>
+        </p:txBody>
+      </p:sp>
+    </p:spTree>
+    <p:extLst>
+      <p:ext uri="{BB962C8B-B14F-4D97-AF65-F5344CB8AC3E}">
+        <p14:creationId xmlns:p14="http://schemas.microsoft.com/office/powerpoint/2010/main" val="1770433437"/>
+      </p:ext>
+    </p:extLst>
+  </p:cSld>
+</p:sld>
+</file>
+
+<file path=ppt/slides/slide11.xml><?xml version="1.0" encoding="utf-8"?>
+<p:sld xmlns:p="http://schemas.openxmlformats.org/presentationml/2006/main">
+  <p:cSld>
+    <p:bg>
+      <p:bgPr>
+        <a:solidFill xmlns:a="http://schemas.openxmlformats.org/drawingml/2006/main">
+          <a:srgbClr val="0B101B"/>
+        </a:solidFill>
+      </p:bgPr>
+    </p:bg>
+    <p:spTree>
+      <p:nvGrpSpPr>
+        <p:cNvPr id="1" name=""/>
+        <p:cNvGrpSpPr/>
+        <p:nvPr/>
+      </p:nvGrpSpPr>
+      <p:grpSpPr>
+        <a:xfrm xmlns:a="http://schemas.openxmlformats.org/drawingml/2006/main"/>
+      </p:grpSpPr>
+      <p:sp>
+        <p:nvSpPr>
+          <p:cNvPr id="12" name="">
+            <a:extLst xmlns:a="http://schemas.openxmlformats.org/drawingml/2006/main">
+              <a:ext uri="{FF2B5EF4-FFF2-40B4-BE49-F238E27FC236}">
+                <a16:creationId xmlns:a16="http://schemas.microsoft.com/office/drawing/2014/main" id="{7A499BF1-E453-43CA-A697-FC3122CE6975}"/>
+              </a:ext>
+            </a:extLst>
+          </p:cNvPr>
+          <p:cNvSpPr>
+            <a:spLocks xmlns:a="http://schemas.openxmlformats.org/drawingml/2006/main" noGrp="1"/>
+          </p:cNvSpPr>
+          <p:nvPr/>
+        </p:nvSpPr>
+        <p:spPr>
+          <a:xfrm xmlns:a="http://schemas.openxmlformats.org/drawingml/2006/main">
+            <a:off x="609600" y="285750"/>
+            <a:ext cx="10096500" cy="333375"/>
+          </a:xfrm>
+          <a:prstGeom xmlns:a="http://schemas.openxmlformats.org/drawingml/2006/main" prst="rect">
+            <a:avLst/>
+          </a:prstGeom>
+          <a:noFill xmlns:a="http://schemas.openxmlformats.org/drawingml/2006/main"/>
+          <a:ln xmlns:a="http://schemas.openxmlformats.org/drawingml/2006/main" w="0">
+            <a:noFill/>
+          </a:ln>
+        </p:spPr>
+        <p:txBody>
+          <a:bodyPr xmlns:a="http://schemas.openxmlformats.org/drawingml/2006/main">
+            <a:noAutofit/>
+          </a:bodyPr>
+          <a:lstStyle xmlns:a="http://schemas.openxmlformats.org/drawingml/2006/main">
+            <a:defPPr>
+              <a:defRPr sz="1350" b="1">
+                <a:solidFill>
+                  <a:srgbClr val="FCD34D"/>
+                </a:solidFill>
+                <a:latin typeface="Arial"/>
+                <a:ea typeface="Arial"/>
+                <a:cs typeface="Arial"/>
+              </a:defRPr>
+            </a:defPPr>
+          </a:lstStyle>
+          <a:p xmlns:a="http://schemas.openxmlformats.org/drawingml/2006/main">
+            <a:pPr>
+              <a:defRPr sz="1350" b="1">
+                <a:solidFill>
+                  <a:srgbClr val="FCD34D"/>
+                </a:solidFill>
+                <a:latin typeface="Arial"/>
+                <a:ea typeface="Arial"/>
+                <a:cs typeface="Arial"/>
+              </a:defRPr>
+            </a:pPr>
+            <a:r>
+              <a:rPr sz="1350" b="1">
+                <a:solidFill>
+                  <a:srgbClr val="FCD34D"/>
+                </a:solidFill>
+                <a:latin typeface="Arial"/>
+                <a:ea typeface="Arial"/>
+                <a:cs typeface="Arial"/>
+              </a:rPr>
+              <a:t>55–70 MIN · PROVAT</a:t>
+            </a:r>
+          </a:p>
+        </p:txBody>
+      </p:sp>
+      <p:sp>
+        <p:nvSpPr>
+          <p:cNvPr id="2" name="">
+            <a:extLst xmlns:a="http://schemas.openxmlformats.org/drawingml/2006/main">
+              <a:ext uri="{FF2B5EF4-FFF2-40B4-BE49-F238E27FC236}">
+                <a16:creationId xmlns:a16="http://schemas.microsoft.com/office/drawing/2014/main" id="{DC0FAC7E-AFA9-4E38-90FB-8EF2D7E2C8B8}"/>
+              </a:ext>
+            </a:extLst>
+          </p:cNvPr>
+          <p:cNvSpPr>
+            <a:spLocks xmlns:a="http://schemas.openxmlformats.org/drawingml/2006/main" noGrp="1"/>
+          </p:cNvSpPr>
+          <p:nvPr/>
+        </p:nvSpPr>
+        <p:spPr>
+          <a:xfrm xmlns:a="http://schemas.openxmlformats.org/drawingml/2006/main">
+            <a:off x="10810875" y="285750"/>
+            <a:ext cx="952500" cy="333375"/>
+          </a:xfrm>
+          <a:prstGeom xmlns:a="http://schemas.openxmlformats.org/drawingml/2006/main" prst="rect">
+            <a:avLst/>
+          </a:prstGeom>
+          <a:noFill xmlns:a="http://schemas.openxmlformats.org/drawingml/2006/main"/>
+          <a:ln xmlns:a="http://schemas.openxmlformats.org/drawingml/2006/main" w="0">
+            <a:noFill/>
+          </a:ln>
+        </p:spPr>
+        <p:txBody>
+          <a:bodyPr xmlns:a="http://schemas.openxmlformats.org/drawingml/2006/main">
+            <a:noAutofit/>
+          </a:bodyPr>
+          <a:lstStyle xmlns:a="http://schemas.openxmlformats.org/drawingml/2006/main">
+            <a:defPPr>
+              <a:defRPr sz="1350" b="0">
+                <a:solidFill>
+                  <a:srgbClr val="B7C5DB"/>
+                </a:solidFill>
+                <a:latin typeface="Arial"/>
+                <a:ea typeface="Arial"/>
+                <a:cs typeface="Arial"/>
+              </a:defRPr>
+            </a:defPPr>
+          </a:lstStyle>
+          <a:p xmlns:a="http://schemas.openxmlformats.org/drawingml/2006/main">
+            <a:pPr>
+              <a:defRPr sz="1350" b="0">
+                <a:solidFill>
+                  <a:srgbClr val="B7C5DB"/>
+                </a:solidFill>
+                <a:latin typeface="Arial"/>
+                <a:ea typeface="Arial"/>
+                <a:cs typeface="Arial"/>
+              </a:defRPr>
+            </a:pPr>
+            <a:r>
+              <a:rPr sz="1350" b="0">
+                <a:solidFill>
+                  <a:srgbClr val="B7C5DB"/>
+                </a:solidFill>
+                <a:latin typeface="Arial"/>
+                <a:ea typeface="Arial"/>
+                <a:cs typeface="Arial"/>
+              </a:rPr>
+              <a:t>11 / 14</a:t>
+            </a:r>
+          </a:p>
+        </p:txBody>
+      </p:sp>
+      <p:sp>
+        <p:nvSpPr>
+          <p:cNvPr id="3" name="">
+            <a:extLst xmlns:a="http://schemas.openxmlformats.org/drawingml/2006/main">
+              <a:ext uri="{FF2B5EF4-FFF2-40B4-BE49-F238E27FC236}">
+                <a16:creationId xmlns:a16="http://schemas.microsoft.com/office/drawing/2014/main" id="{E3DDF96C-A81D-4E34-ADDA-D663DA59F1AC}"/>
+              </a:ext>
+            </a:extLst>
+          </p:cNvPr>
+          <p:cNvSpPr>
+            <a:spLocks xmlns:a="http://schemas.openxmlformats.org/drawingml/2006/main" noGrp="1"/>
+          </p:cNvSpPr>
+          <p:nvPr/>
+        </p:nvSpPr>
+        <p:spPr>
+          <a:xfrm xmlns:a="http://schemas.openxmlformats.org/drawingml/2006/main">
+            <a:off x="609600" y="904875"/>
+            <a:ext cx="10953750" cy="904875"/>
+          </a:xfrm>
+          <a:prstGeom xmlns:a="http://schemas.openxmlformats.org/drawingml/2006/main" prst="rect">
+            <a:avLst/>
+          </a:prstGeom>
+          <a:noFill xmlns:a="http://schemas.openxmlformats.org/drawingml/2006/main"/>
+          <a:ln xmlns:a="http://schemas.openxmlformats.org/drawingml/2006/main" w="0">
+            <a:noFill/>
+          </a:ln>
+        </p:spPr>
+        <p:txBody>
+          <a:bodyPr xmlns:a="http://schemas.openxmlformats.org/drawingml/2006/main">
+            <a:noAutofit/>
+          </a:bodyPr>
+          <a:lstStyle xmlns:a="http://schemas.openxmlformats.org/drawingml/2006/main">
+            <a:defPPr>
+              <a:defRPr sz="3225" b="1">
+                <a:solidFill>
+                  <a:srgbClr val="FFFFFF"/>
+                </a:solidFill>
+                <a:latin typeface="Arial"/>
+                <a:ea typeface="Arial"/>
+                <a:cs typeface="Arial"/>
+              </a:defRPr>
+            </a:defPPr>
+          </a:lstStyle>
+          <a:p xmlns:a="http://schemas.openxmlformats.org/drawingml/2006/main">
+            <a:pPr>
+              <a:defRPr sz="3225" b="1">
+                <a:solidFill>
+                  <a:srgbClr val="FFFFFF"/>
+                </a:solidFill>
+                <a:latin typeface="Arial"/>
+                <a:ea typeface="Arial"/>
+                <a:cs typeface="Arial"/>
+              </a:defRPr>
+            </a:pPr>
+            <a:r>
+              <a:rPr sz="3225" b="1">
+                <a:solidFill>
+                  <a:srgbClr val="FFFFFF"/>
+                </a:solidFill>
+                <a:latin typeface="Arial"/>
+                <a:ea typeface="Arial"/>
+                <a:cs typeface="Arial"/>
+              </a:rPr>
+              <a:t>Prova 2: ruajtja e lejuar</a:t>
+            </a:r>
+          </a:p>
+        </p:txBody>
+      </p:sp>
+      <p:sp>
+        <p:nvSpPr>
+          <p:cNvPr id="4" name="">
+            <a:extLst xmlns:a="http://schemas.openxmlformats.org/drawingml/2006/main">
+              <a:ext uri="{FF2B5EF4-FFF2-40B4-BE49-F238E27FC236}">
+                <a16:creationId xmlns:a16="http://schemas.microsoft.com/office/drawing/2014/main" id="{CE880724-3684-4844-AE85-E5824C84810C}"/>
+              </a:ext>
+            </a:extLst>
+          </p:cNvPr>
+          <p:cNvSpPr>
+            <a:spLocks xmlns:a="http://schemas.openxmlformats.org/drawingml/2006/main" noGrp="1"/>
+          </p:cNvSpPr>
+          <p:nvPr/>
+        </p:nvSpPr>
+        <p:spPr>
+          <a:xfrm xmlns:a="http://schemas.openxmlformats.org/drawingml/2006/main">
+            <a:off x="609600" y="1952625"/>
+            <a:ext cx="10953750" cy="2857500"/>
+          </a:xfrm>
+          <a:prstGeom xmlns:a="http://schemas.openxmlformats.org/drawingml/2006/main" prst="rect">
+            <a:avLst/>
+          </a:prstGeom>
+          <a:noFill xmlns:a="http://schemas.openxmlformats.org/drawingml/2006/main"/>
+          <a:ln xmlns:a="http://schemas.openxmlformats.org/drawingml/2006/main" w="0">
+            <a:noFill/>
+          </a:ln>
+        </p:spPr>
+        <p:txBody>
+          <a:bodyPr xmlns:a="http://schemas.openxmlformats.org/drawingml/2006/main">
+            <a:noAutofit/>
+          </a:bodyPr>
+          <a:lstStyle xmlns:a="http://schemas.openxmlformats.org/drawingml/2006/main">
+            <a:defPPr>
+              <a:defRPr sz="2025" b="0">
+                <a:solidFill>
+                  <a:srgbClr val="EAF1FF"/>
+                </a:solidFill>
+                <a:latin typeface="Arial"/>
+                <a:ea typeface="Arial"/>
+                <a:cs typeface="Arial"/>
+              </a:defRPr>
+            </a:defPPr>
+          </a:lstStyle>
+          <a:p xmlns:a="http://schemas.openxmlformats.org/drawingml/2006/main">
+            <a:pPr>
+              <a:defRPr sz="2025" b="0">
+                <a:solidFill>
+                  <a:srgbClr val="EAF1FF"/>
+                </a:solidFill>
+                <a:latin typeface="Arial"/>
+                <a:ea typeface="Arial"/>
+                <a:cs typeface="Arial"/>
+              </a:defRPr>
+            </a:pPr>
+            <a:r>
+              <a:rPr sz="2025" b="0">
+                <a:solidFill>
+                  <a:srgbClr val="EAF1FF"/>
+                </a:solidFill>
+                <a:latin typeface="Arial"/>
+                <a:ea typeface="Arial"/>
+                <a:cs typeface="Arial"/>
+              </a:rPr>
               <a:t>Si shofer i ID 2 ruaj 08:25.</a:t>
             </a:r>
           </a:p>
@@ -3026,7 +3384,7 @@
           <p:cNvPr id="5" name="">
             <a:extLst xmlns:a="http://schemas.openxmlformats.org/drawingml/2006/main">
               <a:ext uri="{FF2B5EF4-FFF2-40B4-BE49-F238E27FC236}">
-                <a16:creationId xmlns:a16="http://schemas.microsoft.com/office/drawing/2014/main" id="{8C440B29-435F-420A-B859-4027FE03E2F0}"/>
+                <a16:creationId xmlns:a16="http://schemas.microsoft.com/office/drawing/2014/main" id="{8B2A0407-0170-4915-A7D8-5117C50D708E}"/>
               </a:ext>
             </a:extLst>
           </p:cNvPr>
@@ -3094,7 +3452,7 @@
           <p:cNvPr id="6" name="">
             <a:extLst xmlns:a="http://schemas.openxmlformats.org/drawingml/2006/main">
               <a:ext uri="{FF2B5EF4-FFF2-40B4-BE49-F238E27FC236}">
-                <a16:creationId xmlns:a16="http://schemas.microsoft.com/office/drawing/2014/main" id="{AE855AB5-1D74-400B-B26D-1CB8DA22002C}"/>
+                <a16:creationId xmlns:a16="http://schemas.microsoft.com/office/drawing/2014/main" id="{000CDF12-A036-4E49-A30B-0EB65D021C3F}"/>
               </a:ext>
             </a:extLst>
           </p:cNvPr>
@@ -3162,7 +3520,7 @@
           <p:cNvPr id="7" name="">
             <a:extLst xmlns:a="http://schemas.openxmlformats.org/drawingml/2006/main">
               <a:ext uri="{FF2B5EF4-FFF2-40B4-BE49-F238E27FC236}">
-                <a16:creationId xmlns:a16="http://schemas.microsoft.com/office/drawing/2014/main" id="{2D8DC451-E8D8-45E0-B4C8-3C62DC72180A}"/>
+                <a16:creationId xmlns:a16="http://schemas.microsoft.com/office/drawing/2014/main" id="{544D50B3-5D05-44D3-A1EA-0A4385236279}"/>
               </a:ext>
             </a:extLst>
           </p:cNvPr>
@@ -3230,7 +3588,7 @@
           <p:cNvPr id="8" name="">
             <a:extLst xmlns:a="http://schemas.openxmlformats.org/drawingml/2006/main">
               <a:ext uri="{FF2B5EF4-FFF2-40B4-BE49-F238E27FC236}">
-                <a16:creationId xmlns:a16="http://schemas.microsoft.com/office/drawing/2014/main" id="{32C59668-DAB5-4CBD-ADA4-7997B7D193C3}"/>
+                <a16:creationId xmlns:a16="http://schemas.microsoft.com/office/drawing/2014/main" id="{84938F93-4EA0-4274-A4E4-5D2381FD6E19}"/>
               </a:ext>
             </a:extLst>
           </p:cNvPr>
@@ -3298,7 +3656,7 @@
           <p:cNvPr id="9" name="">
             <a:extLst xmlns:a="http://schemas.openxmlformats.org/drawingml/2006/main">
               <a:ext uri="{FF2B5EF4-FFF2-40B4-BE49-F238E27FC236}">
-                <a16:creationId xmlns:a16="http://schemas.microsoft.com/office/drawing/2014/main" id="{D6BB308C-FEC2-4487-8818-026EE0453C2D}"/>
+                <a16:creationId xmlns:a16="http://schemas.microsoft.com/office/drawing/2014/main" id="{79F8F21C-667B-4B51-A35C-E8B37C17B16E}"/>
               </a:ext>
             </a:extLst>
           </p:cNvPr>
@@ -3366,7 +3724,7 @@
           <p:cNvPr id="10" name="">
             <a:extLst xmlns:a="http://schemas.openxmlformats.org/drawingml/2006/main">
               <a:ext uri="{FF2B5EF4-FFF2-40B4-BE49-F238E27FC236}">
-                <a16:creationId xmlns:a16="http://schemas.microsoft.com/office/drawing/2014/main" id="{D5D9D33D-35FE-423D-B7C5-6925CA9BF66B}"/>
+                <a16:creationId xmlns:a16="http://schemas.microsoft.com/office/drawing/2014/main" id="{FD283B51-607D-4902-9E6F-AAC7DBC5CCF2}"/>
               </a:ext>
             </a:extLst>
           </p:cNvPr>
@@ -3434,7 +3792,7 @@
           <p:cNvPr id="11" name="">
             <a:extLst xmlns:a="http://schemas.openxmlformats.org/drawingml/2006/main">
               <a:ext uri="{FF2B5EF4-FFF2-40B4-BE49-F238E27FC236}">
-                <a16:creationId xmlns:a16="http://schemas.microsoft.com/office/drawing/2014/main" id="{CD39B6E4-2A0A-4AA4-9FC7-32D9153DA498}"/>
+                <a16:creationId xmlns:a16="http://schemas.microsoft.com/office/drawing/2014/main" id="{87329553-DEC9-432F-B0F3-ECD535727139}"/>
               </a:ext>
             </a:extLst>
           </p:cNvPr>
@@ -3500,14 +3858,14 @@
     </p:spTree>
     <p:extLst>
       <p:ext uri="{BB962C8B-B14F-4D97-AF65-F5344CB8AC3E}">
-        <p14:creationId xmlns:p14="http://schemas.microsoft.com/office/powerpoint/2010/main" val="267364013"/>
+        <p14:creationId xmlns:p14="http://schemas.microsoft.com/office/powerpoint/2010/main" val="1498309100"/>
       </p:ext>
     </p:extLst>
   </p:cSld>
 </p:sld>
 </file>
 
-<file path=ppt/slides/slide11.xml><?xml version="1.0" encoding="utf-8"?>
+<file path=ppt/slides/slide12.xml><?xml version="1.0" encoding="utf-8"?>
 <p:sld xmlns:p="http://schemas.openxmlformats.org/presentationml/2006/main">
   <p:cSld>
     <p:bg>
@@ -3528,10 +3886,10 @@
       </p:grpSpPr>
       <p:sp>
         <p:nvSpPr>
-          <p:cNvPr id="7" name="">
+          <p:cNvPr id="8" name="">
             <a:extLst xmlns:a="http://schemas.openxmlformats.org/drawingml/2006/main">
               <a:ext uri="{FF2B5EF4-FFF2-40B4-BE49-F238E27FC236}">
-                <a16:creationId xmlns:a16="http://schemas.microsoft.com/office/drawing/2014/main" id="{4C8ADAF6-3AF4-4505-B59B-2FF09FD2663C}"/>
+                <a16:creationId xmlns:a16="http://schemas.microsoft.com/office/drawing/2014/main" id="{D98A7E68-ABB5-420B-ADAE-ACB761194C7D}"/>
               </a:ext>
             </a:extLst>
           </p:cNvPr>
@@ -3599,7 +3957,7 @@
           <p:cNvPr id="2" name="">
             <a:extLst xmlns:a="http://schemas.openxmlformats.org/drawingml/2006/main">
               <a:ext uri="{FF2B5EF4-FFF2-40B4-BE49-F238E27FC236}">
-                <a16:creationId xmlns:a16="http://schemas.microsoft.com/office/drawing/2014/main" id="{8B38BD7C-3441-49CB-A5EC-35EEC8F10B73}"/>
+                <a16:creationId xmlns:a16="http://schemas.microsoft.com/office/drawing/2014/main" id="{96201A4F-08CB-40DD-A6F8-9489F2467ABE}"/>
               </a:ext>
             </a:extLst>
           </p:cNvPr>
@@ -3657,7 +4015,7 @@
                 <a:ea typeface="Arial"/>
                 <a:cs typeface="Arial"/>
               </a:rPr>
-              <a:t>11 / 13</a:t>
+              <a:t>12 / 14</a:t>
             </a:r>
           </a:p>
         </p:txBody>
@@ -3667,7 +4025,7 @@
           <p:cNvPr id="3" name="">
             <a:extLst xmlns:a="http://schemas.openxmlformats.org/drawingml/2006/main">
               <a:ext uri="{FF2B5EF4-FFF2-40B4-BE49-F238E27FC236}">
-                <a16:creationId xmlns:a16="http://schemas.microsoft.com/office/drawing/2014/main" id="{7447802D-CB96-4B7E-8FC1-DBDD457665EC}"/>
+                <a16:creationId xmlns:a16="http://schemas.microsoft.com/office/drawing/2014/main" id="{E505B000-1839-41DD-ACE6-C484545218EF}"/>
               </a:ext>
             </a:extLst>
           </p:cNvPr>
@@ -3735,7 +4093,7 @@
           <p:cNvPr id="4" name="">
             <a:extLst xmlns:a="http://schemas.openxmlformats.org/drawingml/2006/main">
               <a:ext uri="{FF2B5EF4-FFF2-40B4-BE49-F238E27FC236}">
-                <a16:creationId xmlns:a16="http://schemas.microsoft.com/office/drawing/2014/main" id="{AF079AA3-3DBB-4133-9CE4-181DEE496F4B}"/>
+                <a16:creationId xmlns:a16="http://schemas.microsoft.com/office/drawing/2014/main" id="{1CA45031-12B0-419B-B221-F82FE2AFCC73}"/>
               </a:ext>
             </a:extLst>
           </p:cNvPr>
@@ -3859,7 +4217,7 @@
           <p:cNvPr id="5" name="">
             <a:extLst xmlns:a="http://schemas.openxmlformats.org/drawingml/2006/main">
               <a:ext uri="{FF2B5EF4-FFF2-40B4-BE49-F238E27FC236}">
-                <a16:creationId xmlns:a16="http://schemas.microsoft.com/office/drawing/2014/main" id="{9BF9FC51-A54E-4D6A-82E4-F37FF36F17B2}"/>
+                <a16:creationId xmlns:a16="http://schemas.microsoft.com/office/drawing/2014/main" id="{2401226D-1B70-459C-AD8C-F507153F1EB3}"/>
               </a:ext>
             </a:extLst>
           </p:cNvPr>
@@ -3870,8 +4228,8 @@
         </p:nvSpPr>
         <p:spPr>
           <a:xfrm xmlns:a="http://schemas.openxmlformats.org/drawingml/2006/main">
-            <a:off x="609600" y="5572125"/>
-            <a:ext cx="10953750" cy="666750"/>
+            <a:off x="609600" y="5286375"/>
+            <a:ext cx="10953750" cy="381000"/>
           </a:xfrm>
           <a:prstGeom xmlns:a="http://schemas.openxmlformats.org/drawingml/2006/main" prst="rect">
             <a:avLst/>
@@ -3887,9 +4245,9 @@
           </a:bodyPr>
           <a:lstStyle xmlns:a="http://schemas.openxmlformats.org/drawingml/2006/main">
             <a:defPPr>
-              <a:defRPr sz="1650" b="0">
-                <a:solidFill>
-                  <a:srgbClr val="B8EDDB"/>
+              <a:defRPr sz="1725" b="1">
+                <a:solidFill>
+                  <a:srgbClr val="FCD34D"/>
                 </a:solidFill>
                 <a:latin typeface="Arial"/>
                 <a:ea typeface="Arial"/>
@@ -3899,25 +4257,25 @@
           </a:lstStyle>
           <a:p xmlns:a="http://schemas.openxmlformats.org/drawingml/2006/main">
             <a:pPr>
-              <a:defRPr sz="1650" b="0">
-                <a:solidFill>
-                  <a:srgbClr val="B8EDDB"/>
-                </a:solidFill>
-                <a:latin typeface="Arial"/>
-                <a:ea typeface="Arial"/>
-                <a:cs typeface="Arial"/>
-              </a:defRPr>
-            </a:pPr>
-            <a:r>
-              <a:rPr sz="1650" b="0">
-                <a:solidFill>
-                  <a:srgbClr val="B8EDDB"/>
-                </a:solidFill>
-                <a:latin typeface="Arial"/>
-                <a:ea typeface="Arial"/>
-                <a:cs typeface="Arial"/>
-              </a:rPr>
-              <a:t>Përgjigjja: Edhe formulari i vjetër kalon në server. Sesioni, roli dhe pronari kontrollohen sërish.</a:t>
+              <a:defRPr sz="1725" b="1">
+                <a:solidFill>
+                  <a:srgbClr val="FCD34D"/>
+                </a:solidFill>
+                <a:latin typeface="Arial"/>
+                <a:ea typeface="Arial"/>
+                <a:cs typeface="Arial"/>
+              </a:defRPr>
+            </a:pPr>
+            <a:r>
+              <a:rPr sz="1725" b="1">
+                <a:solidFill>
+                  <a:srgbClr val="FCD34D"/>
+                </a:solidFill>
+                <a:latin typeface="Arial"/>
+                <a:ea typeface="Arial"/>
+                <a:cs typeface="Arial"/>
+              </a:rPr>
+              <a:t>Pse serveri duhet ta kontrollojë sërish edhe formularin e vjetër?</a:t>
             </a:r>
           </a:p>
         </p:txBody>
@@ -3927,7 +4285,75 @@
           <p:cNvPr id="6" name="">
             <a:extLst xmlns:a="http://schemas.openxmlformats.org/drawingml/2006/main">
               <a:ext uri="{FF2B5EF4-FFF2-40B4-BE49-F238E27FC236}">
-                <a16:creationId xmlns:a16="http://schemas.microsoft.com/office/drawing/2014/main" id="{72640FED-F8FB-41C1-809F-5849857286CE}"/>
+                <a16:creationId xmlns:a16="http://schemas.microsoft.com/office/drawing/2014/main" id="{E325513E-7D6C-414F-836C-0E342CD3D1F3}"/>
+              </a:ext>
+            </a:extLst>
+          </p:cNvPr>
+          <p:cNvSpPr>
+            <a:spLocks xmlns:a="http://schemas.openxmlformats.org/drawingml/2006/main" noGrp="1"/>
+          </p:cNvSpPr>
+          <p:nvPr/>
+        </p:nvSpPr>
+        <p:spPr>
+          <a:xfrm xmlns:a="http://schemas.openxmlformats.org/drawingml/2006/main">
+            <a:off x="609600" y="5715000"/>
+            <a:ext cx="10953750" cy="619125"/>
+          </a:xfrm>
+          <a:prstGeom xmlns:a="http://schemas.openxmlformats.org/drawingml/2006/main" prst="rect">
+            <a:avLst/>
+          </a:prstGeom>
+          <a:noFill xmlns:a="http://schemas.openxmlformats.org/drawingml/2006/main"/>
+          <a:ln xmlns:a="http://schemas.openxmlformats.org/drawingml/2006/main" w="0">
+            <a:noFill/>
+          </a:ln>
+        </p:spPr>
+        <p:txBody>
+          <a:bodyPr xmlns:a="http://schemas.openxmlformats.org/drawingml/2006/main">
+            <a:noAutofit/>
+          </a:bodyPr>
+          <a:lstStyle xmlns:a="http://schemas.openxmlformats.org/drawingml/2006/main">
+            <a:defPPr>
+              <a:defRPr sz="1575" b="0">
+                <a:solidFill>
+                  <a:srgbClr val="B8EDDB"/>
+                </a:solidFill>
+                <a:latin typeface="Arial"/>
+                <a:ea typeface="Arial"/>
+                <a:cs typeface="Arial"/>
+              </a:defRPr>
+            </a:defPPr>
+          </a:lstStyle>
+          <a:p xmlns:a="http://schemas.openxmlformats.org/drawingml/2006/main">
+            <a:pPr>
+              <a:defRPr sz="1575" b="0">
+                <a:solidFill>
+                  <a:srgbClr val="B8EDDB"/>
+                </a:solidFill>
+                <a:latin typeface="Arial"/>
+                <a:ea typeface="Arial"/>
+                <a:cs typeface="Arial"/>
+              </a:defRPr>
+            </a:pPr>
+            <a:r>
+              <a:rPr sz="1575" b="0">
+                <a:solidFill>
+                  <a:srgbClr val="B8EDDB"/>
+                </a:solidFill>
+                <a:latin typeface="Arial"/>
+                <a:ea typeface="Arial"/>
+                <a:cs typeface="Arial"/>
+              </a:rPr>
+              <a:t>Përgjigjja: Edhe formulari i vjetër kalon në server. Sesioni, roli dhe pronari kontrollohen sërish.</a:t>
+            </a:r>
+          </a:p>
+        </p:txBody>
+      </p:sp>
+      <p:sp>
+        <p:nvSpPr>
+          <p:cNvPr id="7" name="">
+            <a:extLst xmlns:a="http://schemas.openxmlformats.org/drawingml/2006/main">
+              <a:ext uri="{FF2B5EF4-FFF2-40B4-BE49-F238E27FC236}">
+                <a16:creationId xmlns:a16="http://schemas.microsoft.com/office/drawing/2014/main" id="{DCFB11AB-AFE4-49BB-BCD0-DE5AE4EBD613}"/>
               </a:ext>
             </a:extLst>
           </p:cNvPr>
@@ -3993,14 +4419,14 @@
     </p:spTree>
     <p:extLst>
       <p:ext uri="{BB962C8B-B14F-4D97-AF65-F5344CB8AC3E}">
-        <p14:creationId xmlns:p14="http://schemas.microsoft.com/office/powerpoint/2010/main" val="1300413405"/>
+        <p14:creationId xmlns:p14="http://schemas.microsoft.com/office/powerpoint/2010/main" val="597046566"/>
       </p:ext>
     </p:extLst>
   </p:cSld>
 </p:sld>
 </file>
 
-<file path=ppt/slides/slide12.xml><?xml version="1.0" encoding="utf-8"?>
+<file path=ppt/slides/slide13.xml><?xml version="1.0" encoding="utf-8"?>
 <p:sld xmlns:p="http://schemas.openxmlformats.org/presentationml/2006/main">
   <p:cSld>
     <p:bg>
@@ -4024,7 +4450,7 @@
           <p:cNvPr id="6" name="">
             <a:extLst xmlns:a="http://schemas.openxmlformats.org/drawingml/2006/main">
               <a:ext uri="{FF2B5EF4-FFF2-40B4-BE49-F238E27FC236}">
-                <a16:creationId xmlns:a16="http://schemas.microsoft.com/office/drawing/2014/main" id="{ED4C2502-2F92-4694-B0B1-210D20EA931E}"/>
+                <a16:creationId xmlns:a16="http://schemas.microsoft.com/office/drawing/2014/main" id="{BACF3F09-159F-4FA2-8B67-0C98E3972B32}"/>
               </a:ext>
             </a:extLst>
           </p:cNvPr>
@@ -4092,7 +4518,7 @@
           <p:cNvPr id="2" name="">
             <a:extLst xmlns:a="http://schemas.openxmlformats.org/drawingml/2006/main">
               <a:ext uri="{FF2B5EF4-FFF2-40B4-BE49-F238E27FC236}">
-                <a16:creationId xmlns:a16="http://schemas.microsoft.com/office/drawing/2014/main" id="{DCAECDE1-A44C-4959-91A3-C6F528A4953C}"/>
+                <a16:creationId xmlns:a16="http://schemas.microsoft.com/office/drawing/2014/main" id="{AB197A31-D3FD-49DC-B92A-083BB9A3ECB3}"/>
               </a:ext>
             </a:extLst>
           </p:cNvPr>
@@ -4150,7 +4576,7 @@
                 <a:ea typeface="Arial"/>
                 <a:cs typeface="Arial"/>
               </a:rPr>
-              <a:t>12 / 13</a:t>
+              <a:t>13 / 14</a:t>
             </a:r>
           </a:p>
         </p:txBody>
@@ -4160,7 +4586,7 @@
           <p:cNvPr id="3" name="">
             <a:extLst xmlns:a="http://schemas.openxmlformats.org/drawingml/2006/main">
               <a:ext uri="{FF2B5EF4-FFF2-40B4-BE49-F238E27FC236}">
-                <a16:creationId xmlns:a16="http://schemas.microsoft.com/office/drawing/2014/main" id="{FC7BF568-A6E4-4ED2-8593-1491E0B366E6}"/>
+                <a16:creationId xmlns:a16="http://schemas.microsoft.com/office/drawing/2014/main" id="{85DB3FB7-3951-484E-8328-B46DD509AAA8}"/>
               </a:ext>
             </a:extLst>
           </p:cNvPr>
@@ -4228,7 +4654,7 @@
           <p:cNvPr id="4" name="">
             <a:extLst xmlns:a="http://schemas.openxmlformats.org/drawingml/2006/main">
               <a:ext uri="{FF2B5EF4-FFF2-40B4-BE49-F238E27FC236}">
-                <a16:creationId xmlns:a16="http://schemas.microsoft.com/office/drawing/2014/main" id="{D012F3AD-F505-4576-A753-DB8ECB66C41E}"/>
+                <a16:creationId xmlns:a16="http://schemas.microsoft.com/office/drawing/2014/main" id="{6D42AA4D-2081-4C0F-9FFB-98C810B2093B}"/>
               </a:ext>
             </a:extLst>
           </p:cNvPr>
@@ -4352,7 +4778,7 @@
           <p:cNvPr id="5" name="">
             <a:extLst xmlns:a="http://schemas.openxmlformats.org/drawingml/2006/main">
               <a:ext uri="{FF2B5EF4-FFF2-40B4-BE49-F238E27FC236}">
-                <a16:creationId xmlns:a16="http://schemas.microsoft.com/office/drawing/2014/main" id="{080C0741-1123-4775-9B76-5ADBA6898863}"/>
+                <a16:creationId xmlns:a16="http://schemas.microsoft.com/office/drawing/2014/main" id="{8F7870A6-AF12-44DC-9282-968BFAB80E8C}"/>
               </a:ext>
             </a:extLst>
           </p:cNvPr>
@@ -4418,14 +4844,14 @@
     </p:spTree>
     <p:extLst>
       <p:ext uri="{BB962C8B-B14F-4D97-AF65-F5344CB8AC3E}">
-        <p14:creationId xmlns:p14="http://schemas.microsoft.com/office/powerpoint/2010/main" val="1566714685"/>
+        <p14:creationId xmlns:p14="http://schemas.microsoft.com/office/powerpoint/2010/main" val="1527759682"/>
       </p:ext>
     </p:extLst>
   </p:cSld>
 </p:sld>
 </file>
 
-<file path=ppt/slides/slide13.xml><?xml version="1.0" encoding="utf-8"?>
+<file path=ppt/slides/slide14.xml><?xml version="1.0" encoding="utf-8"?>
 <p:sld xmlns:p="http://schemas.openxmlformats.org/presentationml/2006/main">
   <p:cSld>
     <p:bg>
@@ -4449,7 +4875,7 @@
           <p:cNvPr id="5" name="">
             <a:extLst xmlns:a="http://schemas.openxmlformats.org/drawingml/2006/main">
               <a:ext uri="{FF2B5EF4-FFF2-40B4-BE49-F238E27FC236}">
-                <a16:creationId xmlns:a16="http://schemas.microsoft.com/office/drawing/2014/main" id="{354BFA6A-E89F-44FE-9719-9F331F4D00F3}"/>
+                <a16:creationId xmlns:a16="http://schemas.microsoft.com/office/drawing/2014/main" id="{55AF5203-A38B-4091-9F29-447E3B79A00C}"/>
               </a:ext>
             </a:extLst>
           </p:cNvPr>
@@ -4517,7 +4943,7 @@
           <p:cNvPr id="2" name="">
             <a:extLst xmlns:a="http://schemas.openxmlformats.org/drawingml/2006/main">
               <a:ext uri="{FF2B5EF4-FFF2-40B4-BE49-F238E27FC236}">
-                <a16:creationId xmlns:a16="http://schemas.microsoft.com/office/drawing/2014/main" id="{B17F2557-2B31-4AFF-8DC0-4B0709E0B4C3}"/>
+                <a16:creationId xmlns:a16="http://schemas.microsoft.com/office/drawing/2014/main" id="{9C610351-03A3-4A3A-A73C-49E4300F7FE1}"/>
               </a:ext>
             </a:extLst>
           </p:cNvPr>
@@ -4575,7 +5001,7 @@
                 <a:ea typeface="Arial"/>
                 <a:cs typeface="Arial"/>
               </a:rPr>
-              <a:t>13 / 13</a:t>
+              <a:t>14 / 14</a:t>
             </a:r>
           </a:p>
         </p:txBody>
@@ -4585,7 +5011,7 @@
           <p:cNvPr id="3" name="">
             <a:extLst xmlns:a="http://schemas.openxmlformats.org/drawingml/2006/main">
               <a:ext uri="{FF2B5EF4-FFF2-40B4-BE49-F238E27FC236}">
-                <a16:creationId xmlns:a16="http://schemas.microsoft.com/office/drawing/2014/main" id="{AA00BDA8-DCBD-49D4-9331-239FB813B035}"/>
+                <a16:creationId xmlns:a16="http://schemas.microsoft.com/office/drawing/2014/main" id="{67E2EA0B-7A8D-45A8-A8C1-3A81AC891E88}"/>
               </a:ext>
             </a:extLst>
           </p:cNvPr>
@@ -4653,7 +5079,7 @@
           <p:cNvPr id="4" name="">
             <a:extLst xmlns:a="http://schemas.openxmlformats.org/drawingml/2006/main">
               <a:ext uri="{FF2B5EF4-FFF2-40B4-BE49-F238E27FC236}">
-                <a16:creationId xmlns:a16="http://schemas.microsoft.com/office/drawing/2014/main" id="{A3D7ACDF-E7DA-4390-8119-CB3A21FCE9E9}"/>
+                <a16:creationId xmlns:a16="http://schemas.microsoft.com/office/drawing/2014/main" id="{9AEB98A7-DC6E-4429-98E2-2762F0E193AA}"/>
               </a:ext>
             </a:extLst>
           </p:cNvPr>
@@ -4775,7 +5201,7 @@
     </p:spTree>
     <p:extLst>
       <p:ext uri="{BB962C8B-B14F-4D97-AF65-F5344CB8AC3E}">
-        <p14:creationId xmlns:p14="http://schemas.microsoft.com/office/powerpoint/2010/main" val="620168807"/>
+        <p14:creationId xmlns:p14="http://schemas.microsoft.com/office/powerpoint/2010/main" val="1344983120"/>
       </p:ext>
     </p:extLst>
   </p:cSld>
@@ -4806,7 +5232,7 @@
           <p:cNvPr id="6" name="">
             <a:extLst xmlns:a="http://schemas.openxmlformats.org/drawingml/2006/main">
               <a:ext uri="{FF2B5EF4-FFF2-40B4-BE49-F238E27FC236}">
-                <a16:creationId xmlns:a16="http://schemas.microsoft.com/office/drawing/2014/main" id="{5ED64737-E57D-4994-B0AF-45E592E81A8E}"/>
+                <a16:creationId xmlns:a16="http://schemas.microsoft.com/office/drawing/2014/main" id="{FE693EB4-F3F5-4921-B795-B16503D28317}"/>
               </a:ext>
             </a:extLst>
           </p:cNvPr>
@@ -4874,7 +5300,7 @@
           <p:cNvPr id="2" name="">
             <a:extLst xmlns:a="http://schemas.openxmlformats.org/drawingml/2006/main">
               <a:ext uri="{FF2B5EF4-FFF2-40B4-BE49-F238E27FC236}">
-                <a16:creationId xmlns:a16="http://schemas.microsoft.com/office/drawing/2014/main" id="{B57D8DD7-E1F0-4E27-80C9-370E4D36D65D}"/>
+                <a16:creationId xmlns:a16="http://schemas.microsoft.com/office/drawing/2014/main" id="{5F0EC4F4-0141-4821-AE8F-40912684439C}"/>
               </a:ext>
             </a:extLst>
           </p:cNvPr>
@@ -4932,7 +5358,7 @@
                 <a:ea typeface="Arial"/>
                 <a:cs typeface="Arial"/>
               </a:rPr>
-              <a:t>02 / 13</a:t>
+              <a:t>02 / 14</a:t>
             </a:r>
           </a:p>
         </p:txBody>
@@ -4942,7 +5368,7 @@
           <p:cNvPr id="3" name="">
             <a:extLst xmlns:a="http://schemas.openxmlformats.org/drawingml/2006/main">
               <a:ext uri="{FF2B5EF4-FFF2-40B4-BE49-F238E27FC236}">
-                <a16:creationId xmlns:a16="http://schemas.microsoft.com/office/drawing/2014/main" id="{52D55881-4030-4C0D-905E-C4FB519D1E78}"/>
+                <a16:creationId xmlns:a16="http://schemas.microsoft.com/office/drawing/2014/main" id="{B9AEA9E5-64CD-4EF4-BE23-ED6D24AB62A0}"/>
               </a:ext>
             </a:extLst>
           </p:cNvPr>
@@ -5010,7 +5436,7 @@
           <p:cNvPr id="4" name="">
             <a:extLst xmlns:a="http://schemas.openxmlformats.org/drawingml/2006/main">
               <a:ext uri="{FF2B5EF4-FFF2-40B4-BE49-F238E27FC236}">
-                <a16:creationId xmlns:a16="http://schemas.microsoft.com/office/drawing/2014/main" id="{F07BA886-9958-4D9B-AB88-9305D5159691}"/>
+                <a16:creationId xmlns:a16="http://schemas.microsoft.com/office/drawing/2014/main" id="{D22701C1-F351-4F43-A594-31D65DC25921}"/>
               </a:ext>
             </a:extLst>
           </p:cNvPr>
@@ -5134,7 +5560,7 @@
           <p:cNvPr id="5" name="">
             <a:extLst xmlns:a="http://schemas.openxmlformats.org/drawingml/2006/main">
               <a:ext uri="{FF2B5EF4-FFF2-40B4-BE49-F238E27FC236}">
-                <a16:creationId xmlns:a16="http://schemas.microsoft.com/office/drawing/2014/main" id="{999E04B1-BE7E-43EF-90E6-0E1668EC0F70}"/>
+                <a16:creationId xmlns:a16="http://schemas.microsoft.com/office/drawing/2014/main" id="{7DC255CA-9C3D-41A0-9164-DEF510FBBB59}"/>
               </a:ext>
             </a:extLst>
           </p:cNvPr>
@@ -5256,7 +5682,7 @@
     </p:spTree>
     <p:extLst>
       <p:ext uri="{BB962C8B-B14F-4D97-AF65-F5344CB8AC3E}">
-        <p14:creationId xmlns:p14="http://schemas.microsoft.com/office/powerpoint/2010/main" val="1416480891"/>
+        <p14:creationId xmlns:p14="http://schemas.microsoft.com/office/powerpoint/2010/main" val="1031085638"/>
       </p:ext>
     </p:extLst>
   </p:cSld>
@@ -5284,10 +5710,10 @@
       </p:grpSpPr>
       <p:sp>
         <p:nvSpPr>
-          <p:cNvPr id="12" name="">
+          <p:cNvPr id="6" name="">
             <a:extLst xmlns:a="http://schemas.openxmlformats.org/drawingml/2006/main">
               <a:ext uri="{FF2B5EF4-FFF2-40B4-BE49-F238E27FC236}">
-                <a16:creationId xmlns:a16="http://schemas.microsoft.com/office/drawing/2014/main" id="{E8CECDEE-FCA1-4189-A0B7-7B25DDB6A03A}"/>
+                <a16:creationId xmlns:a16="http://schemas.microsoft.com/office/drawing/2014/main" id="{B089D998-60AA-418E-A6E8-78D52E4F5270}"/>
               </a:ext>
             </a:extLst>
           </p:cNvPr>
@@ -5345,7 +5771,7 @@
                 <a:ea typeface="Arial"/>
                 <a:cs typeface="Arial"/>
               </a:rPr>
-              <a:t>ORGANIZIMI</a:t>
+              <a:t>REZULTATI I SOTËM · 90 MINUTA</a:t>
             </a:r>
           </a:p>
         </p:txBody>
@@ -5355,7 +5781,7 @@
           <p:cNvPr id="2" name="">
             <a:extLst xmlns:a="http://schemas.openxmlformats.org/drawingml/2006/main">
               <a:ext uri="{FF2B5EF4-FFF2-40B4-BE49-F238E27FC236}">
-                <a16:creationId xmlns:a16="http://schemas.microsoft.com/office/drawing/2014/main" id="{1AF0E43E-8D5B-40EB-966A-99C7A6266E9D}"/>
+                <a16:creationId xmlns:a16="http://schemas.microsoft.com/office/drawing/2014/main" id="{EE43CD95-1449-4BD9-8D26-09891FF54BBB}"/>
               </a:ext>
             </a:extLst>
           </p:cNvPr>
@@ -5413,7 +5839,7 @@
                 <a:ea typeface="Arial"/>
                 <a:cs typeface="Arial"/>
               </a:rPr>
-              <a:t>03 / 13</a:t>
+              <a:t>03 / 14</a:t>
             </a:r>
           </a:p>
         </p:txBody>
@@ -5423,7 +5849,7 @@
           <p:cNvPr id="3" name="">
             <a:extLst xmlns:a="http://schemas.openxmlformats.org/drawingml/2006/main">
               <a:ext uri="{FF2B5EF4-FFF2-40B4-BE49-F238E27FC236}">
-                <a16:creationId xmlns:a16="http://schemas.microsoft.com/office/drawing/2014/main" id="{C93ECF5D-D59A-4FEF-B731-1F27C16C770A}"/>
+                <a16:creationId xmlns:a16="http://schemas.microsoft.com/office/drawing/2014/main" id="{8118BD41-131E-4B3C-878F-1632A444C22F}"/>
               </a:ext>
             </a:extLst>
           </p:cNvPr>
@@ -5481,6 +5907,363 @@
                 <a:ea typeface="Arial"/>
                 <a:cs typeface="Arial"/>
               </a:rPr>
+              <a:t>Harta e ushtrimeve: nga hyrja te dorëzimi</a:t>
+            </a:r>
+          </a:p>
+        </p:txBody>
+      </p:sp>
+      <p:pic>
+        <p:nvPicPr>
+          <p:cNvPr id="4" name="">
+            <a:extLst xmlns:a="http://schemas.openxmlformats.org/drawingml/2006/main">
+              <a:ext uri="{FF2B5EF4-FFF2-40B4-BE49-F238E27FC236}">
+                <a16:creationId xmlns:a16="http://schemas.microsoft.com/office/drawing/2014/main" id="{4651F743-14C7-4460-A810-B679F8775250}"/>
+              </a:ext>
+            </a:extLst>
+          </p:cNvPr>
+          <p:cNvPicPr>
+            <a:picLocks xmlns:a="http://schemas.openxmlformats.org/drawingml/2006/main" noChangeAspect="1"/>
+          </p:cNvPicPr>
+          <p:nvPr/>
+        </p:nvPicPr>
+        <p:blipFill>
+          <a:blip xmlns:r="http://schemas.openxmlformats.org/officeDocument/2006/relationships" xmlns:a="http://schemas.openxmlformats.org/drawingml/2006/main" r:embed="R1044a7571956446b"/>
+          <a:stretch xmlns:a="http://schemas.openxmlformats.org/drawingml/2006/main"/>
+        </p:blipFill>
+        <p:spPr>
+          <a:xfrm xmlns:a="http://schemas.openxmlformats.org/drawingml/2006/main">
+            <a:off x="695587" y="1762125"/>
+            <a:ext cx="10800826" cy="4000500"/>
+          </a:xfrm>
+          <a:prstGeom xmlns:a="http://schemas.openxmlformats.org/drawingml/2006/main" prst="rect">
+            <a:avLst/>
+          </a:prstGeom>
+        </p:spPr>
+      </p:pic>
+      <p:sp>
+        <p:nvSpPr>
+          <p:cNvPr id="5" name="">
+            <a:extLst xmlns:a="http://schemas.openxmlformats.org/drawingml/2006/main">
+              <a:ext uri="{FF2B5EF4-FFF2-40B4-BE49-F238E27FC236}">
+                <a16:creationId xmlns:a16="http://schemas.microsoft.com/office/drawing/2014/main" id="{A5C5B0A6-49FC-4C4F-8BF2-FC91F8C04AD6}"/>
+              </a:ext>
+            </a:extLst>
+          </p:cNvPr>
+          <p:cNvSpPr>
+            <a:spLocks xmlns:a="http://schemas.openxmlformats.org/drawingml/2006/main" noGrp="1"/>
+          </p:cNvSpPr>
+          <p:nvPr/>
+        </p:nvSpPr>
+        <p:spPr>
+          <a:xfrm xmlns:a="http://schemas.openxmlformats.org/drawingml/2006/main">
+            <a:off x="609600" y="5857875"/>
+            <a:ext cx="10953750" cy="809625"/>
+          </a:xfrm>
+          <a:prstGeom xmlns:a="http://schemas.openxmlformats.org/drawingml/2006/main" prst="rect">
+            <a:avLst/>
+          </a:prstGeom>
+          <a:noFill xmlns:a="http://schemas.openxmlformats.org/drawingml/2006/main"/>
+          <a:ln xmlns:a="http://schemas.openxmlformats.org/drawingml/2006/main" w="0">
+            <a:noFill/>
+          </a:ln>
+        </p:spPr>
+        <p:txBody>
+          <a:bodyPr xmlns:a="http://schemas.openxmlformats.org/drawingml/2006/main">
+            <a:noAutofit/>
+          </a:bodyPr>
+          <a:lstStyle xmlns:a="http://schemas.openxmlformats.org/drawingml/2006/main">
+            <a:defPPr>
+              <a:defRPr sz="1650" b="0">
+                <a:solidFill>
+                  <a:srgbClr val="EAF1FF"/>
+                </a:solidFill>
+                <a:latin typeface="Arial"/>
+                <a:ea typeface="Arial"/>
+                <a:cs typeface="Arial"/>
+              </a:defRPr>
+            </a:defPPr>
+          </a:lstStyle>
+          <a:p xmlns:a="http://schemas.openxmlformats.org/drawingml/2006/main">
+            <a:pPr>
+              <a:defRPr sz="1650" b="0">
+                <a:solidFill>
+                  <a:srgbClr val="EAF1FF"/>
+                </a:solidFill>
+                <a:latin typeface="Arial"/>
+                <a:ea typeface="Arial"/>
+                <a:cs typeface="Arial"/>
+              </a:defRPr>
+            </a:pPr>
+            <a:r>
+              <a:rPr sz="1650" b="0">
+                <a:solidFill>
+                  <a:srgbClr val="EAF1FF"/>
+                </a:solidFill>
+                <a:latin typeface="Arial"/>
+                <a:ea typeface="Arial"/>
+                <a:cs typeface="Arial"/>
+              </a:rPr>
+              <a:t>Hyr me GitHub, ndrysho orën e ID 2 dhe provo refuzimin për ID 1.</a:t>
+            </a:r>
+          </a:p>
+          <a:p xmlns:a="http://schemas.openxmlformats.org/drawingml/2006/main">
+            <a:r>
+              <a:t/>
+            </a:r>
+          </a:p>
+          <a:p xmlns:a="http://schemas.openxmlformats.org/drawingml/2006/main">
+            <a:pPr>
+              <a:defRPr sz="1650" b="0">
+                <a:solidFill>
+                  <a:srgbClr val="EAF1FF"/>
+                </a:solidFill>
+                <a:latin typeface="Arial"/>
+                <a:ea typeface="Arial"/>
+                <a:cs typeface="Arial"/>
+              </a:defRPr>
+            </a:pPr>
+            <a:r>
+              <a:rPr sz="1650" b="0">
+                <a:solidFill>
+                  <a:srgbClr val="EAF1FF"/>
+                </a:solidFill>
+                <a:latin typeface="Arial"/>
+                <a:ea typeface="Arial"/>
+                <a:cs typeface="Arial"/>
+              </a:rPr>
+              <a:t>Next.js punon lokalisht. Në fund dërgon kodin dhe raportin në repository-n tënd.</a:t>
+            </a:r>
+          </a:p>
+        </p:txBody>
+      </p:sp>
+    </p:spTree>
+    <p:extLst>
+      <p:ext uri="{BB962C8B-B14F-4D97-AF65-F5344CB8AC3E}">
+        <p14:creationId xmlns:p14="http://schemas.microsoft.com/office/powerpoint/2010/main" val="2053387850"/>
+      </p:ext>
+    </p:extLst>
+  </p:cSld>
+</p:sld>
+</file>
+
+<file path=ppt/slides/slide4.xml><?xml version="1.0" encoding="utf-8"?>
+<p:sld xmlns:p="http://schemas.openxmlformats.org/presentationml/2006/main">
+  <p:cSld>
+    <p:bg>
+      <p:bgPr>
+        <a:solidFill xmlns:a="http://schemas.openxmlformats.org/drawingml/2006/main">
+          <a:srgbClr val="0B101B"/>
+        </a:solidFill>
+      </p:bgPr>
+    </p:bg>
+    <p:spTree>
+      <p:nvGrpSpPr>
+        <p:cNvPr id="1" name=""/>
+        <p:cNvGrpSpPr/>
+        <p:nvPr/>
+      </p:nvGrpSpPr>
+      <p:grpSpPr>
+        <a:xfrm xmlns:a="http://schemas.openxmlformats.org/drawingml/2006/main"/>
+      </p:grpSpPr>
+      <p:sp>
+        <p:nvSpPr>
+          <p:cNvPr id="12" name="">
+            <a:extLst xmlns:a="http://schemas.openxmlformats.org/drawingml/2006/main">
+              <a:ext uri="{FF2B5EF4-FFF2-40B4-BE49-F238E27FC236}">
+                <a16:creationId xmlns:a16="http://schemas.microsoft.com/office/drawing/2014/main" id="{35F72E11-ED0B-4B61-BB10-1ACC7F9FDEB0}"/>
+              </a:ext>
+            </a:extLst>
+          </p:cNvPr>
+          <p:cNvSpPr>
+            <a:spLocks xmlns:a="http://schemas.openxmlformats.org/drawingml/2006/main" noGrp="1"/>
+          </p:cNvSpPr>
+          <p:nvPr/>
+        </p:nvSpPr>
+        <p:spPr>
+          <a:xfrm xmlns:a="http://schemas.openxmlformats.org/drawingml/2006/main">
+            <a:off x="609600" y="285750"/>
+            <a:ext cx="10096500" cy="333375"/>
+          </a:xfrm>
+          <a:prstGeom xmlns:a="http://schemas.openxmlformats.org/drawingml/2006/main" prst="rect">
+            <a:avLst/>
+          </a:prstGeom>
+          <a:noFill xmlns:a="http://schemas.openxmlformats.org/drawingml/2006/main"/>
+          <a:ln xmlns:a="http://schemas.openxmlformats.org/drawingml/2006/main" w="0">
+            <a:noFill/>
+          </a:ln>
+        </p:spPr>
+        <p:txBody>
+          <a:bodyPr xmlns:a="http://schemas.openxmlformats.org/drawingml/2006/main">
+            <a:noAutofit/>
+          </a:bodyPr>
+          <a:lstStyle xmlns:a="http://schemas.openxmlformats.org/drawingml/2006/main">
+            <a:defPPr>
+              <a:defRPr sz="1350" b="1">
+                <a:solidFill>
+                  <a:srgbClr val="FCD34D"/>
+                </a:solidFill>
+                <a:latin typeface="Arial"/>
+                <a:ea typeface="Arial"/>
+                <a:cs typeface="Arial"/>
+              </a:defRPr>
+            </a:defPPr>
+          </a:lstStyle>
+          <a:p xmlns:a="http://schemas.openxmlformats.org/drawingml/2006/main">
+            <a:pPr>
+              <a:defRPr sz="1350" b="1">
+                <a:solidFill>
+                  <a:srgbClr val="FCD34D"/>
+                </a:solidFill>
+                <a:latin typeface="Arial"/>
+                <a:ea typeface="Arial"/>
+                <a:cs typeface="Arial"/>
+              </a:defRPr>
+            </a:pPr>
+            <a:r>
+              <a:rPr sz="1350" b="1">
+                <a:solidFill>
+                  <a:srgbClr val="FCD34D"/>
+                </a:solidFill>
+                <a:latin typeface="Arial"/>
+                <a:ea typeface="Arial"/>
+                <a:cs typeface="Arial"/>
+              </a:rPr>
+              <a:t>ORGANIZIMI</a:t>
+            </a:r>
+          </a:p>
+        </p:txBody>
+      </p:sp>
+      <p:sp>
+        <p:nvSpPr>
+          <p:cNvPr id="2" name="">
+            <a:extLst xmlns:a="http://schemas.openxmlformats.org/drawingml/2006/main">
+              <a:ext uri="{FF2B5EF4-FFF2-40B4-BE49-F238E27FC236}">
+                <a16:creationId xmlns:a16="http://schemas.microsoft.com/office/drawing/2014/main" id="{63348F9D-1BB7-4266-98C5-6156F6FB8593}"/>
+              </a:ext>
+            </a:extLst>
+          </p:cNvPr>
+          <p:cNvSpPr>
+            <a:spLocks xmlns:a="http://schemas.openxmlformats.org/drawingml/2006/main" noGrp="1"/>
+          </p:cNvSpPr>
+          <p:nvPr/>
+        </p:nvSpPr>
+        <p:spPr>
+          <a:xfrm xmlns:a="http://schemas.openxmlformats.org/drawingml/2006/main">
+            <a:off x="10810875" y="285750"/>
+            <a:ext cx="952500" cy="333375"/>
+          </a:xfrm>
+          <a:prstGeom xmlns:a="http://schemas.openxmlformats.org/drawingml/2006/main" prst="rect">
+            <a:avLst/>
+          </a:prstGeom>
+          <a:noFill xmlns:a="http://schemas.openxmlformats.org/drawingml/2006/main"/>
+          <a:ln xmlns:a="http://schemas.openxmlformats.org/drawingml/2006/main" w="0">
+            <a:noFill/>
+          </a:ln>
+        </p:spPr>
+        <p:txBody>
+          <a:bodyPr xmlns:a="http://schemas.openxmlformats.org/drawingml/2006/main">
+            <a:noAutofit/>
+          </a:bodyPr>
+          <a:lstStyle xmlns:a="http://schemas.openxmlformats.org/drawingml/2006/main">
+            <a:defPPr>
+              <a:defRPr sz="1350" b="0">
+                <a:solidFill>
+                  <a:srgbClr val="B7C5DB"/>
+                </a:solidFill>
+                <a:latin typeface="Arial"/>
+                <a:ea typeface="Arial"/>
+                <a:cs typeface="Arial"/>
+              </a:defRPr>
+            </a:defPPr>
+          </a:lstStyle>
+          <a:p xmlns:a="http://schemas.openxmlformats.org/drawingml/2006/main">
+            <a:pPr>
+              <a:defRPr sz="1350" b="0">
+                <a:solidFill>
+                  <a:srgbClr val="B7C5DB"/>
+                </a:solidFill>
+                <a:latin typeface="Arial"/>
+                <a:ea typeface="Arial"/>
+                <a:cs typeface="Arial"/>
+              </a:defRPr>
+            </a:pPr>
+            <a:r>
+              <a:rPr sz="1350" b="0">
+                <a:solidFill>
+                  <a:srgbClr val="B7C5DB"/>
+                </a:solidFill>
+                <a:latin typeface="Arial"/>
+                <a:ea typeface="Arial"/>
+                <a:cs typeface="Arial"/>
+              </a:rPr>
+              <a:t>04 / 14</a:t>
+            </a:r>
+          </a:p>
+        </p:txBody>
+      </p:sp>
+      <p:sp>
+        <p:nvSpPr>
+          <p:cNvPr id="3" name="">
+            <a:extLst xmlns:a="http://schemas.openxmlformats.org/drawingml/2006/main">
+              <a:ext uri="{FF2B5EF4-FFF2-40B4-BE49-F238E27FC236}">
+                <a16:creationId xmlns:a16="http://schemas.microsoft.com/office/drawing/2014/main" id="{DCC12AAD-C033-4F2F-B6DF-F8253EC81C4F}"/>
+              </a:ext>
+            </a:extLst>
+          </p:cNvPr>
+          <p:cNvSpPr>
+            <a:spLocks xmlns:a="http://schemas.openxmlformats.org/drawingml/2006/main" noGrp="1"/>
+          </p:cNvSpPr>
+          <p:nvPr/>
+        </p:nvSpPr>
+        <p:spPr>
+          <a:xfrm xmlns:a="http://schemas.openxmlformats.org/drawingml/2006/main">
+            <a:off x="609600" y="904875"/>
+            <a:ext cx="10953750" cy="904875"/>
+          </a:xfrm>
+          <a:prstGeom xmlns:a="http://schemas.openxmlformats.org/drawingml/2006/main" prst="rect">
+            <a:avLst/>
+          </a:prstGeom>
+          <a:noFill xmlns:a="http://schemas.openxmlformats.org/drawingml/2006/main"/>
+          <a:ln xmlns:a="http://schemas.openxmlformats.org/drawingml/2006/main" w="0">
+            <a:noFill/>
+          </a:ln>
+        </p:spPr>
+        <p:txBody>
+          <a:bodyPr xmlns:a="http://schemas.openxmlformats.org/drawingml/2006/main">
+            <a:noAutofit/>
+          </a:bodyPr>
+          <a:lstStyle xmlns:a="http://schemas.openxmlformats.org/drawingml/2006/main">
+            <a:defPPr>
+              <a:defRPr sz="3225" b="1">
+                <a:solidFill>
+                  <a:srgbClr val="FFFFFF"/>
+                </a:solidFill>
+                <a:latin typeface="Arial"/>
+                <a:ea typeface="Arial"/>
+                <a:cs typeface="Arial"/>
+              </a:defRPr>
+            </a:defPPr>
+          </a:lstStyle>
+          <a:p xmlns:a="http://schemas.openxmlformats.org/drawingml/2006/main">
+            <a:pPr>
+              <a:defRPr sz="3225" b="1">
+                <a:solidFill>
+                  <a:srgbClr val="FFFFFF"/>
+                </a:solidFill>
+                <a:latin typeface="Arial"/>
+                <a:ea typeface="Arial"/>
+                <a:cs typeface="Arial"/>
+              </a:defRPr>
+            </a:pPr>
+            <a:r>
+              <a:rPr sz="3225" b="1">
+                <a:solidFill>
+                  <a:srgbClr val="FFFFFF"/>
+                </a:solidFill>
+                <a:latin typeface="Arial"/>
+                <a:ea typeface="Arial"/>
+                <a:cs typeface="Arial"/>
+              </a:rPr>
               <a:t>Plani i 90 minutave</a:t>
             </a:r>
           </a:p>
@@ -5491,7 +6274,7 @@
           <p:cNvPr id="4" name="">
             <a:extLst xmlns:a="http://schemas.openxmlformats.org/drawingml/2006/main">
               <a:ext uri="{FF2B5EF4-FFF2-40B4-BE49-F238E27FC236}">
-                <a16:creationId xmlns:a16="http://schemas.microsoft.com/office/drawing/2014/main" id="{90027401-31EB-4A67-85BD-00BE8AC005EE}"/>
+                <a16:creationId xmlns:a16="http://schemas.microsoft.com/office/drawing/2014/main" id="{9B84B66A-5B6D-4C35-9D3C-26D62C7E22D3}"/>
               </a:ext>
             </a:extLst>
           </p:cNvPr>
@@ -5615,7 +6398,7 @@
           <p:cNvPr id="5" name="">
             <a:extLst xmlns:a="http://schemas.openxmlformats.org/drawingml/2006/main">
               <a:ext uri="{FF2B5EF4-FFF2-40B4-BE49-F238E27FC236}">
-                <a16:creationId xmlns:a16="http://schemas.microsoft.com/office/drawing/2014/main" id="{9B953146-C7D7-48C1-B765-3B910957ADBE}"/>
+                <a16:creationId xmlns:a16="http://schemas.microsoft.com/office/drawing/2014/main" id="{8D197FF6-F655-4AC2-A264-EA60E4A7EA4F}"/>
               </a:ext>
             </a:extLst>
           </p:cNvPr>
@@ -5683,7 +6466,7 @@
           <p:cNvPr id="6" name="">
             <a:extLst xmlns:a="http://schemas.openxmlformats.org/drawingml/2006/main">
               <a:ext uri="{FF2B5EF4-FFF2-40B4-BE49-F238E27FC236}">
-                <a16:creationId xmlns:a16="http://schemas.microsoft.com/office/drawing/2014/main" id="{830748A1-8F22-4058-9CDF-3FCFC21E3ABD}"/>
+                <a16:creationId xmlns:a16="http://schemas.microsoft.com/office/drawing/2014/main" id="{A9484AC4-F56B-4F60-B50E-294D968F9B56}"/>
               </a:ext>
             </a:extLst>
           </p:cNvPr>
@@ -5751,7 +6534,7 @@
           <p:cNvPr id="7" name="">
             <a:extLst xmlns:a="http://schemas.openxmlformats.org/drawingml/2006/main">
               <a:ext uri="{FF2B5EF4-FFF2-40B4-BE49-F238E27FC236}">
-                <a16:creationId xmlns:a16="http://schemas.microsoft.com/office/drawing/2014/main" id="{A884DCDC-4F4A-4F26-9580-7E97F52520F9}"/>
+                <a16:creationId xmlns:a16="http://schemas.microsoft.com/office/drawing/2014/main" id="{FFF1E302-3F3F-4463-9CD5-2CC9A0E06531}"/>
               </a:ext>
             </a:extLst>
           </p:cNvPr>
@@ -5819,7 +6602,7 @@
           <p:cNvPr id="8" name="">
             <a:extLst xmlns:a="http://schemas.openxmlformats.org/drawingml/2006/main">
               <a:ext uri="{FF2B5EF4-FFF2-40B4-BE49-F238E27FC236}">
-                <a16:creationId xmlns:a16="http://schemas.microsoft.com/office/drawing/2014/main" id="{6DB6D81A-5ABC-44CE-B260-1CE878938A4D}"/>
+                <a16:creationId xmlns:a16="http://schemas.microsoft.com/office/drawing/2014/main" id="{553444B8-73BB-42A7-BF62-BD7B43BA329A}"/>
               </a:ext>
             </a:extLst>
           </p:cNvPr>
@@ -5887,7 +6670,7 @@
           <p:cNvPr id="9" name="">
             <a:extLst xmlns:a="http://schemas.openxmlformats.org/drawingml/2006/main">
               <a:ext uri="{FF2B5EF4-FFF2-40B4-BE49-F238E27FC236}">
-                <a16:creationId xmlns:a16="http://schemas.microsoft.com/office/drawing/2014/main" id="{3E38D972-E6B3-4875-9485-03D24C30D510}"/>
+                <a16:creationId xmlns:a16="http://schemas.microsoft.com/office/drawing/2014/main" id="{18D04CAD-1756-406C-9A65-0E966F16D963}"/>
               </a:ext>
             </a:extLst>
           </p:cNvPr>
@@ -5955,7 +6738,7 @@
           <p:cNvPr id="10" name="">
             <a:extLst xmlns:a="http://schemas.openxmlformats.org/drawingml/2006/main">
               <a:ext uri="{FF2B5EF4-FFF2-40B4-BE49-F238E27FC236}">
-                <a16:creationId xmlns:a16="http://schemas.microsoft.com/office/drawing/2014/main" id="{AC1BB903-7F90-43E3-AE62-03F8F665F4EC}"/>
+                <a16:creationId xmlns:a16="http://schemas.microsoft.com/office/drawing/2014/main" id="{F049F9BE-6B5E-4B1E-9521-A31136697D64}"/>
               </a:ext>
             </a:extLst>
           </p:cNvPr>
@@ -6023,7 +6806,7 @@
           <p:cNvPr id="11" name="">
             <a:extLst xmlns:a="http://schemas.openxmlformats.org/drawingml/2006/main">
               <a:ext uri="{FF2B5EF4-FFF2-40B4-BE49-F238E27FC236}">
-                <a16:creationId xmlns:a16="http://schemas.microsoft.com/office/drawing/2014/main" id="{75F99179-D340-436E-8C5C-BB88E7FC4C89}"/>
+                <a16:creationId xmlns:a16="http://schemas.microsoft.com/office/drawing/2014/main" id="{F02E074E-8A8C-470D-AB85-5609F84A58C8}"/>
               </a:ext>
             </a:extLst>
           </p:cNvPr>
@@ -6089,460 +6872,7 @@
     </p:spTree>
     <p:extLst>
       <p:ext uri="{BB962C8B-B14F-4D97-AF65-F5344CB8AC3E}">
-        <p14:creationId xmlns:p14="http://schemas.microsoft.com/office/powerpoint/2010/main" val="213947295"/>
-      </p:ext>
-    </p:extLst>
-  </p:cSld>
-</p:sld>
-</file>
-
-<file path=ppt/slides/slide4.xml><?xml version="1.0" encoding="utf-8"?>
-<p:sld xmlns:p="http://schemas.openxmlformats.org/presentationml/2006/main">
-  <p:cSld>
-    <p:bg>
-      <p:bgPr>
-        <a:solidFill xmlns:a="http://schemas.openxmlformats.org/drawingml/2006/main">
-          <a:srgbClr val="0B101B"/>
-        </a:solidFill>
-      </p:bgPr>
-    </p:bg>
-    <p:spTree>
-      <p:nvGrpSpPr>
-        <p:cNvPr id="1" name=""/>
-        <p:cNvGrpSpPr/>
-        <p:nvPr/>
-      </p:nvGrpSpPr>
-      <p:grpSpPr>
-        <a:xfrm xmlns:a="http://schemas.openxmlformats.org/drawingml/2006/main"/>
-      </p:grpSpPr>
-      <p:sp>
-        <p:nvSpPr>
-          <p:cNvPr id="6" name="">
-            <a:extLst xmlns:a="http://schemas.openxmlformats.org/drawingml/2006/main">
-              <a:ext uri="{FF2B5EF4-FFF2-40B4-BE49-F238E27FC236}">
-                <a16:creationId xmlns:a16="http://schemas.microsoft.com/office/drawing/2014/main" id="{C20BCAFA-5805-451D-A8A0-C191AE4E0C44}"/>
-              </a:ext>
-            </a:extLst>
-          </p:cNvPr>
-          <p:cNvSpPr>
-            <a:spLocks xmlns:a="http://schemas.openxmlformats.org/drawingml/2006/main" noGrp="1"/>
-          </p:cNvSpPr>
-          <p:nvPr/>
-        </p:nvSpPr>
-        <p:spPr>
-          <a:xfrm xmlns:a="http://schemas.openxmlformats.org/drawingml/2006/main">
-            <a:off x="609600" y="285750"/>
-            <a:ext cx="10096500" cy="333375"/>
-          </a:xfrm>
-          <a:prstGeom xmlns:a="http://schemas.openxmlformats.org/drawingml/2006/main" prst="rect">
-            <a:avLst/>
-          </a:prstGeom>
-          <a:noFill xmlns:a="http://schemas.openxmlformats.org/drawingml/2006/main"/>
-          <a:ln xmlns:a="http://schemas.openxmlformats.org/drawingml/2006/main" w="0">
-            <a:noFill/>
-          </a:ln>
-        </p:spPr>
-        <p:txBody>
-          <a:bodyPr xmlns:a="http://schemas.openxmlformats.org/drawingml/2006/main">
-            <a:noAutofit/>
-          </a:bodyPr>
-          <a:lstStyle xmlns:a="http://schemas.openxmlformats.org/drawingml/2006/main">
-            <a:defPPr>
-              <a:defRPr sz="1350" b="1">
-                <a:solidFill>
-                  <a:srgbClr val="FCD34D"/>
-                </a:solidFill>
-                <a:latin typeface="Arial"/>
-                <a:ea typeface="Arial"/>
-                <a:cs typeface="Arial"/>
-              </a:defRPr>
-            </a:defPPr>
-          </a:lstStyle>
-          <a:p xmlns:a="http://schemas.openxmlformats.org/drawingml/2006/main">
-            <a:pPr>
-              <a:defRPr sz="1350" b="1">
-                <a:solidFill>
-                  <a:srgbClr val="FCD34D"/>
-                </a:solidFill>
-                <a:latin typeface="Arial"/>
-                <a:ea typeface="Arial"/>
-                <a:cs typeface="Arial"/>
-              </a:defRPr>
-            </a:pPr>
-            <a:r>
-              <a:rPr sz="1350" b="1">
-                <a:solidFill>
-                  <a:srgbClr val="FCD34D"/>
-                </a:solidFill>
-                <a:latin typeface="Arial"/>
-                <a:ea typeface="Arial"/>
-                <a:cs typeface="Arial"/>
-              </a:rPr>
-              <a:t>10–25 MIN · KONFIGURIMI</a:t>
-            </a:r>
-          </a:p>
-        </p:txBody>
-      </p:sp>
-      <p:sp>
-        <p:nvSpPr>
-          <p:cNvPr id="2" name="">
-            <a:extLst xmlns:a="http://schemas.openxmlformats.org/drawingml/2006/main">
-              <a:ext uri="{FF2B5EF4-FFF2-40B4-BE49-F238E27FC236}">
-                <a16:creationId xmlns:a16="http://schemas.microsoft.com/office/drawing/2014/main" id="{E883D6E3-4C1C-47B2-98CB-6E97B5D44EA1}"/>
-              </a:ext>
-            </a:extLst>
-          </p:cNvPr>
-          <p:cNvSpPr>
-            <a:spLocks xmlns:a="http://schemas.openxmlformats.org/drawingml/2006/main" noGrp="1"/>
-          </p:cNvSpPr>
-          <p:nvPr/>
-        </p:nvSpPr>
-        <p:spPr>
-          <a:xfrm xmlns:a="http://schemas.openxmlformats.org/drawingml/2006/main">
-            <a:off x="10810875" y="285750"/>
-            <a:ext cx="952500" cy="333375"/>
-          </a:xfrm>
-          <a:prstGeom xmlns:a="http://schemas.openxmlformats.org/drawingml/2006/main" prst="rect">
-            <a:avLst/>
-          </a:prstGeom>
-          <a:noFill xmlns:a="http://schemas.openxmlformats.org/drawingml/2006/main"/>
-          <a:ln xmlns:a="http://schemas.openxmlformats.org/drawingml/2006/main" w="0">
-            <a:noFill/>
-          </a:ln>
-        </p:spPr>
-        <p:txBody>
-          <a:bodyPr xmlns:a="http://schemas.openxmlformats.org/drawingml/2006/main">
-            <a:noAutofit/>
-          </a:bodyPr>
-          <a:lstStyle xmlns:a="http://schemas.openxmlformats.org/drawingml/2006/main">
-            <a:defPPr>
-              <a:defRPr sz="1350" b="0">
-                <a:solidFill>
-                  <a:srgbClr val="B7C5DB"/>
-                </a:solidFill>
-                <a:latin typeface="Arial"/>
-                <a:ea typeface="Arial"/>
-                <a:cs typeface="Arial"/>
-              </a:defRPr>
-            </a:defPPr>
-          </a:lstStyle>
-          <a:p xmlns:a="http://schemas.openxmlformats.org/drawingml/2006/main">
-            <a:pPr>
-              <a:defRPr sz="1350" b="0">
-                <a:solidFill>
-                  <a:srgbClr val="B7C5DB"/>
-                </a:solidFill>
-                <a:latin typeface="Arial"/>
-                <a:ea typeface="Arial"/>
-                <a:cs typeface="Arial"/>
-              </a:defRPr>
-            </a:pPr>
-            <a:r>
-              <a:rPr sz="1350" b="0">
-                <a:solidFill>
-                  <a:srgbClr val="B7C5DB"/>
-                </a:solidFill>
-                <a:latin typeface="Arial"/>
-                <a:ea typeface="Arial"/>
-                <a:cs typeface="Arial"/>
-              </a:rPr>
-              <a:t>04 / 13</a:t>
-            </a:r>
-          </a:p>
-        </p:txBody>
-      </p:sp>
-      <p:sp>
-        <p:nvSpPr>
-          <p:cNvPr id="3" name="">
-            <a:extLst xmlns:a="http://schemas.openxmlformats.org/drawingml/2006/main">
-              <a:ext uri="{FF2B5EF4-FFF2-40B4-BE49-F238E27FC236}">
-                <a16:creationId xmlns:a16="http://schemas.microsoft.com/office/drawing/2014/main" id="{6D2232C6-5B98-4312-9C79-637B9991C422}"/>
-              </a:ext>
-            </a:extLst>
-          </p:cNvPr>
-          <p:cNvSpPr>
-            <a:spLocks xmlns:a="http://schemas.openxmlformats.org/drawingml/2006/main" noGrp="1"/>
-          </p:cNvSpPr>
-          <p:nvPr/>
-        </p:nvSpPr>
-        <p:spPr>
-          <a:xfrm xmlns:a="http://schemas.openxmlformats.org/drawingml/2006/main">
-            <a:off x="609600" y="904875"/>
-            <a:ext cx="10953750" cy="904875"/>
-          </a:xfrm>
-          <a:prstGeom xmlns:a="http://schemas.openxmlformats.org/drawingml/2006/main" prst="rect">
-            <a:avLst/>
-          </a:prstGeom>
-          <a:noFill xmlns:a="http://schemas.openxmlformats.org/drawingml/2006/main"/>
-          <a:ln xmlns:a="http://schemas.openxmlformats.org/drawingml/2006/main" w="0">
-            <a:noFill/>
-          </a:ln>
-        </p:spPr>
-        <p:txBody>
-          <a:bodyPr xmlns:a="http://schemas.openxmlformats.org/drawingml/2006/main">
-            <a:noAutofit/>
-          </a:bodyPr>
-          <a:lstStyle xmlns:a="http://schemas.openxmlformats.org/drawingml/2006/main">
-            <a:defPPr>
-              <a:defRPr sz="3225" b="1">
-                <a:solidFill>
-                  <a:srgbClr val="FFFFFF"/>
-                </a:solidFill>
-                <a:latin typeface="Arial"/>
-                <a:ea typeface="Arial"/>
-                <a:cs typeface="Arial"/>
-              </a:defRPr>
-            </a:defPPr>
-          </a:lstStyle>
-          <a:p xmlns:a="http://schemas.openxmlformats.org/drawingml/2006/main">
-            <a:pPr>
-              <a:defRPr sz="3225" b="1">
-                <a:solidFill>
-                  <a:srgbClr val="FFFFFF"/>
-                </a:solidFill>
-                <a:latin typeface="Arial"/>
-                <a:ea typeface="Arial"/>
-                <a:cs typeface="Arial"/>
-              </a:defRPr>
-            </a:pPr>
-            <a:r>
-              <a:rPr sz="3225" b="1">
-                <a:solidFill>
-                  <a:srgbClr val="FFFFFF"/>
-                </a:solidFill>
-                <a:latin typeface="Arial"/>
-                <a:ea typeface="Arial"/>
-                <a:cs typeface="Arial"/>
-              </a:rPr>
-              <a:t>OAuth App në GitHub</a:t>
-            </a:r>
-          </a:p>
-        </p:txBody>
-      </p:sp>
-      <p:sp>
-        <p:nvSpPr>
-          <p:cNvPr id="4" name="">
-            <a:extLst xmlns:a="http://schemas.openxmlformats.org/drawingml/2006/main">
-              <a:ext uri="{FF2B5EF4-FFF2-40B4-BE49-F238E27FC236}">
-                <a16:creationId xmlns:a16="http://schemas.microsoft.com/office/drawing/2014/main" id="{6CBF6639-7B19-4327-8374-CE64438A36A5}"/>
-              </a:ext>
-            </a:extLst>
-          </p:cNvPr>
-          <p:cNvSpPr>
-            <a:spLocks xmlns:a="http://schemas.openxmlformats.org/drawingml/2006/main" noGrp="1"/>
-          </p:cNvSpPr>
-          <p:nvPr/>
-        </p:nvSpPr>
-        <p:spPr>
-          <a:xfrm xmlns:a="http://schemas.openxmlformats.org/drawingml/2006/main">
-            <a:off x="609600" y="1952625"/>
-            <a:ext cx="10953750" cy="2857500"/>
-          </a:xfrm>
-          <a:prstGeom xmlns:a="http://schemas.openxmlformats.org/drawingml/2006/main" prst="rect">
-            <a:avLst/>
-          </a:prstGeom>
-          <a:noFill xmlns:a="http://schemas.openxmlformats.org/drawingml/2006/main"/>
-          <a:ln xmlns:a="http://schemas.openxmlformats.org/drawingml/2006/main" w="0">
-            <a:noFill/>
-          </a:ln>
-        </p:spPr>
-        <p:txBody>
-          <a:bodyPr xmlns:a="http://schemas.openxmlformats.org/drawingml/2006/main">
-            <a:noAutofit/>
-          </a:bodyPr>
-          <a:lstStyle xmlns:a="http://schemas.openxmlformats.org/drawingml/2006/main">
-            <a:defPPr>
-              <a:defRPr sz="2025" b="0">
-                <a:solidFill>
-                  <a:srgbClr val="EAF1FF"/>
-                </a:solidFill>
-                <a:latin typeface="Arial"/>
-                <a:ea typeface="Arial"/>
-                <a:cs typeface="Arial"/>
-              </a:defRPr>
-            </a:defPPr>
-          </a:lstStyle>
-          <a:p xmlns:a="http://schemas.openxmlformats.org/drawingml/2006/main">
-            <a:pPr>
-              <a:defRPr sz="2025" b="0">
-                <a:solidFill>
-                  <a:srgbClr val="EAF1FF"/>
-                </a:solidFill>
-                <a:latin typeface="Arial"/>
-                <a:ea typeface="Arial"/>
-                <a:cs typeface="Arial"/>
-              </a:defRPr>
-            </a:pPr>
-            <a:r>
-              <a:rPr sz="2025" b="0">
-                <a:solidFill>
-                  <a:srgbClr val="EAF1FF"/>
-                </a:solidFill>
-                <a:latin typeface="Arial"/>
-                <a:ea typeface="Arial"/>
-                <a:cs typeface="Arial"/>
-              </a:rPr>
-              <a:t>GitHub Settings → Developer settings → OAuth Apps → New OAuth App.</a:t>
-            </a:r>
-          </a:p>
-          <a:p xmlns:a="http://schemas.openxmlformats.org/drawingml/2006/main">
-            <a:r>
-              <a:t/>
-            </a:r>
-          </a:p>
-          <a:p xmlns:a="http://schemas.openxmlformats.org/drawingml/2006/main">
-            <a:pPr>
-              <a:defRPr sz="2025" b="0">
-                <a:solidFill>
-                  <a:srgbClr val="EAF1FF"/>
-                </a:solidFill>
-                <a:latin typeface="Arial"/>
-                <a:ea typeface="Arial"/>
-                <a:cs typeface="Arial"/>
-              </a:defRPr>
-            </a:pPr>
-            <a:r>
-              <a:rPr sz="2025" b="0">
-                <a:solidFill>
-                  <a:srgbClr val="EAF1FF"/>
-                </a:solidFill>
-                <a:latin typeface="Arial"/>
-                <a:ea typeface="Arial"/>
-                <a:cs typeface="Arial"/>
-              </a:rPr>
-              <a:t>Homepage: http://localhost:3000</a:t>
-            </a:r>
-          </a:p>
-          <a:p xmlns:a="http://schemas.openxmlformats.org/drawingml/2006/main">
-            <a:r>
-              <a:t/>
-            </a:r>
-          </a:p>
-          <a:p xmlns:a="http://schemas.openxmlformats.org/drawingml/2006/main">
-            <a:pPr>
-              <a:defRPr sz="2025" b="0">
-                <a:solidFill>
-                  <a:srgbClr val="EAF1FF"/>
-                </a:solidFill>
-                <a:latin typeface="Arial"/>
-                <a:ea typeface="Arial"/>
-                <a:cs typeface="Arial"/>
-              </a:defRPr>
-            </a:pPr>
-            <a:r>
-              <a:rPr sz="2025" b="0">
-                <a:solidFill>
-                  <a:srgbClr val="EAF1FF"/>
-                </a:solidFill>
-                <a:latin typeface="Arial"/>
-                <a:ea typeface="Arial"/>
-                <a:cs typeface="Arial"/>
-              </a:rPr>
-              <a:t>Callback: http://localhost:3000/api/auth/callback/github</a:t>
-            </a:r>
-          </a:p>
-          <a:p xmlns:a="http://schemas.openxmlformats.org/drawingml/2006/main">
-            <a:r>
-              <a:t/>
-            </a:r>
-          </a:p>
-          <a:p xmlns:a="http://schemas.openxmlformats.org/drawingml/2006/main">
-            <a:pPr>
-              <a:defRPr sz="2025" b="0">
-                <a:solidFill>
-                  <a:srgbClr val="EAF1FF"/>
-                </a:solidFill>
-                <a:latin typeface="Arial"/>
-                <a:ea typeface="Arial"/>
-                <a:cs typeface="Arial"/>
-              </a:defRPr>
-            </a:pPr>
-            <a:r>
-              <a:rPr sz="2025" b="0">
-                <a:solidFill>
-                  <a:srgbClr val="EAF1FF"/>
-                </a:solidFill>
-                <a:latin typeface="Arial"/>
-                <a:ea typeface="Arial"/>
-                <a:cs typeface="Arial"/>
-              </a:rPr>
-              <a:t>Kopjo Client ID dhe gjenero Client secret. Këto nuk janë emaili ose emri yt.</a:t>
-            </a:r>
-          </a:p>
-        </p:txBody>
-      </p:sp>
-      <p:sp>
-        <p:nvSpPr>
-          <p:cNvPr id="5" name="">
-            <a:extLst xmlns:a="http://schemas.openxmlformats.org/drawingml/2006/main">
-              <a:ext uri="{FF2B5EF4-FFF2-40B4-BE49-F238E27FC236}">
-                <a16:creationId xmlns:a16="http://schemas.microsoft.com/office/drawing/2014/main" id="{54DA21E1-E4EA-45A3-B0A0-DAA320C2E9E4}"/>
-              </a:ext>
-            </a:extLst>
-          </p:cNvPr>
-          <p:cNvSpPr>
-            <a:spLocks xmlns:a="http://schemas.openxmlformats.org/drawingml/2006/main" noGrp="1"/>
-          </p:cNvSpPr>
-          <p:nvPr/>
-        </p:nvSpPr>
-        <p:spPr>
-          <a:xfrm xmlns:a="http://schemas.openxmlformats.org/drawingml/2006/main">
-            <a:off x="609600" y="6334125"/>
-            <a:ext cx="10953750" cy="285750"/>
-          </a:xfrm>
-          <a:prstGeom xmlns:a="http://schemas.openxmlformats.org/drawingml/2006/main" prst="rect">
-            <a:avLst/>
-          </a:prstGeom>
-          <a:noFill xmlns:a="http://schemas.openxmlformats.org/drawingml/2006/main"/>
-          <a:ln xmlns:a="http://schemas.openxmlformats.org/drawingml/2006/main" w="0">
-            <a:noFill/>
-          </a:ln>
-        </p:spPr>
-        <p:txBody>
-          <a:bodyPr xmlns:a="http://schemas.openxmlformats.org/drawingml/2006/main">
-            <a:noAutofit/>
-          </a:bodyPr>
-          <a:lstStyle xmlns:a="http://schemas.openxmlformats.org/drawingml/2006/main">
-            <a:defPPr>
-              <a:defRPr sz="1350" b="0">
-                <a:solidFill>
-                  <a:srgbClr val="FCD34D"/>
-                </a:solidFill>
-                <a:latin typeface="Arial"/>
-                <a:ea typeface="Arial"/>
-                <a:cs typeface="Arial"/>
-              </a:defRPr>
-            </a:defPPr>
-          </a:lstStyle>
-          <a:p xmlns:a="http://schemas.openxmlformats.org/drawingml/2006/main">
-            <a:pPr>
-              <a:defRPr sz="1350" b="0">
-                <a:solidFill>
-                  <a:srgbClr val="FCD34D"/>
-                </a:solidFill>
-                <a:latin typeface="Arial"/>
-                <a:ea typeface="Arial"/>
-                <a:cs typeface="Arial"/>
-              </a:defRPr>
-            </a:pPr>
-            <a:r>
-              <a:rPr sz="1350" b="0">
-                <a:solidFill>
-                  <a:srgbClr val="FCD34D"/>
-                </a:solidFill>
-                <a:latin typeface="Arial"/>
-                <a:ea typeface="Arial"/>
-                <a:cs typeface="Arial"/>
-              </a:rPr>
-              <a:t>Në faqe: Hap udhëzimin e konfigurimit →</a:t>
-            </a:r>
-          </a:p>
-        </p:txBody>
-      </p:sp>
-    </p:spTree>
-    <p:extLst>
-      <p:ext uri="{BB962C8B-B14F-4D97-AF65-F5344CB8AC3E}">
-        <p14:creationId xmlns:p14="http://schemas.microsoft.com/office/powerpoint/2010/main" val="826484435"/>
+        <p14:creationId xmlns:p14="http://schemas.microsoft.com/office/powerpoint/2010/main" val="1576359989"/>
       </p:ext>
     </p:extLst>
   </p:cSld>
@@ -6573,7 +6903,7 @@
           <p:cNvPr id="6" name="">
             <a:extLst xmlns:a="http://schemas.openxmlformats.org/drawingml/2006/main">
               <a:ext uri="{FF2B5EF4-FFF2-40B4-BE49-F238E27FC236}">
-                <a16:creationId xmlns:a16="http://schemas.microsoft.com/office/drawing/2014/main" id="{DC3D1C76-E53F-44D8-936C-FCBF7351E5D4}"/>
+                <a16:creationId xmlns:a16="http://schemas.microsoft.com/office/drawing/2014/main" id="{97AAF91E-295F-4742-B889-9E779A98D51D}"/>
               </a:ext>
             </a:extLst>
           </p:cNvPr>
@@ -6631,7 +6961,7 @@
                 <a:ea typeface="Arial"/>
                 <a:cs typeface="Arial"/>
               </a:rPr>
-              <a:t>BRENDA 10–25 MIN</a:t>
+              <a:t>10–25 MIN · KONFIGURIMI</a:t>
             </a:r>
           </a:p>
         </p:txBody>
@@ -6641,7 +6971,7 @@
           <p:cNvPr id="2" name="">
             <a:extLst xmlns:a="http://schemas.openxmlformats.org/drawingml/2006/main">
               <a:ext uri="{FF2B5EF4-FFF2-40B4-BE49-F238E27FC236}">
-                <a16:creationId xmlns:a16="http://schemas.microsoft.com/office/drawing/2014/main" id="{B3649B94-6408-4833-8158-4D369ACCD096}"/>
+                <a16:creationId xmlns:a16="http://schemas.microsoft.com/office/drawing/2014/main" id="{38080C2D-9C1D-46FE-BE9C-73C59092DF83}"/>
               </a:ext>
             </a:extLst>
           </p:cNvPr>
@@ -6699,7 +7029,7 @@
                 <a:ea typeface="Arial"/>
                 <a:cs typeface="Arial"/>
               </a:rPr>
-              <a:t>05 / 13</a:t>
+              <a:t>05 / 14</a:t>
             </a:r>
           </a:p>
         </p:txBody>
@@ -6709,7 +7039,7 @@
           <p:cNvPr id="3" name="">
             <a:extLst xmlns:a="http://schemas.openxmlformats.org/drawingml/2006/main">
               <a:ext uri="{FF2B5EF4-FFF2-40B4-BE49-F238E27FC236}">
-                <a16:creationId xmlns:a16="http://schemas.microsoft.com/office/drawing/2014/main" id="{4D191A39-CE4E-4F2E-AE37-27594D55ADF7}"/>
+                <a16:creationId xmlns:a16="http://schemas.microsoft.com/office/drawing/2014/main" id="{8BE92026-999D-432D-99C7-9F0B3DF3D888}"/>
               </a:ext>
             </a:extLst>
           </p:cNvPr>
@@ -6767,7 +7097,7 @@
                 <a:ea typeface="Arial"/>
                 <a:cs typeface="Arial"/>
               </a:rPr>
-              <a:t>Variablat mbeten lokale</a:t>
+              <a:t>OAuth App në GitHub</a:t>
             </a:r>
           </a:p>
         </p:txBody>
@@ -6777,7 +7107,7 @@
           <p:cNvPr id="4" name="">
             <a:extLst xmlns:a="http://schemas.openxmlformats.org/drawingml/2006/main">
               <a:ext uri="{FF2B5EF4-FFF2-40B4-BE49-F238E27FC236}">
-                <a16:creationId xmlns:a16="http://schemas.microsoft.com/office/drawing/2014/main" id="{0211DD6F-5D7B-4833-8580-C707A1CF8BE9}"/>
+                <a16:creationId xmlns:a16="http://schemas.microsoft.com/office/drawing/2014/main" id="{6FFA111D-E7F5-4B2D-BD24-836DEE6951D4}"/>
               </a:ext>
             </a:extLst>
           </p:cNvPr>
@@ -6835,7 +7165,7 @@
                 <a:ea typeface="Arial"/>
                 <a:cs typeface="Arial"/>
               </a:rPr>
-              <a:t>Shto GITHUB_ID, GITHUB_SECRET, NEXTAUTH_SECRET dhe NEXTAUTH_URL në .env.local.</a:t>
+              <a:t>GitHub Settings → Developer settings → OAuth Apps → New OAuth App.</a:t>
             </a:r>
           </a:p>
           <a:p xmlns:a="http://schemas.openxmlformats.org/drawingml/2006/main">
@@ -6863,7 +7193,7 @@
                 <a:ea typeface="Arial"/>
                 <a:cs typeface="Arial"/>
               </a:rPr>
-              <a:t>DATABASE_URL e Javës 4 mbetet. Gjenero sekretin e sesionit me komandën në udhëzim.</a:t>
+              <a:t>Homepage: http://localhost:3000</a:t>
             </a:r>
           </a:p>
           <a:p xmlns:a="http://schemas.openxmlformats.org/drawingml/2006/main">
@@ -6891,7 +7221,35 @@
                 <a:ea typeface="Arial"/>
                 <a:cs typeface="Arial"/>
               </a:rPr>
-              <a:t>Instalo next-auth@4.24.15. Rinis serverin pas konfigurimit.</a:t>
+              <a:t>Callback: http://localhost:3000/api/auth/callback/github</a:t>
+            </a:r>
+          </a:p>
+          <a:p xmlns:a="http://schemas.openxmlformats.org/drawingml/2006/main">
+            <a:r>
+              <a:t/>
+            </a:r>
+          </a:p>
+          <a:p xmlns:a="http://schemas.openxmlformats.org/drawingml/2006/main">
+            <a:pPr>
+              <a:defRPr sz="2025" b="0">
+                <a:solidFill>
+                  <a:srgbClr val="EAF1FF"/>
+                </a:solidFill>
+                <a:latin typeface="Arial"/>
+                <a:ea typeface="Arial"/>
+                <a:cs typeface="Arial"/>
+              </a:defRPr>
+            </a:pPr>
+            <a:r>
+              <a:rPr sz="2025" b="0">
+                <a:solidFill>
+                  <a:srgbClr val="EAF1FF"/>
+                </a:solidFill>
+                <a:latin typeface="Arial"/>
+                <a:ea typeface="Arial"/>
+                <a:cs typeface="Arial"/>
+              </a:rPr>
+              <a:t>Kopjo Client ID dhe gjenero Client secret. Këto nuk janë emaili ose emri yt.</a:t>
             </a:r>
           </a:p>
         </p:txBody>
@@ -6901,7 +7259,7 @@
           <p:cNvPr id="5" name="">
             <a:extLst xmlns:a="http://schemas.openxmlformats.org/drawingml/2006/main">
               <a:ext uri="{FF2B5EF4-FFF2-40B4-BE49-F238E27FC236}">
-                <a16:creationId xmlns:a16="http://schemas.microsoft.com/office/drawing/2014/main" id="{18716E6E-9F95-49CC-B393-4002CEA0A503}"/>
+                <a16:creationId xmlns:a16="http://schemas.microsoft.com/office/drawing/2014/main" id="{ADF84C29-D2EC-4E32-A29C-610955F60334}"/>
               </a:ext>
             </a:extLst>
           </p:cNvPr>
@@ -6959,7 +7317,7 @@
                 <a:ea typeface="Arial"/>
                 <a:cs typeface="Arial"/>
               </a:rPr>
-              <a:t>Në faqe: Hap komandat dhe shembullin →</a:t>
+              <a:t>Në faqe: Hap udhëzimin e konfigurimit →</a:t>
             </a:r>
           </a:p>
         </p:txBody>
@@ -6967,7 +7325,7 @@
     </p:spTree>
     <p:extLst>
       <p:ext uri="{BB962C8B-B14F-4D97-AF65-F5344CB8AC3E}">
-        <p14:creationId xmlns:p14="http://schemas.microsoft.com/office/powerpoint/2010/main" val="555086904"/>
+        <p14:creationId xmlns:p14="http://schemas.microsoft.com/office/powerpoint/2010/main" val="807417135"/>
       </p:ext>
     </p:extLst>
   </p:cSld>
@@ -6998,7 +7356,7 @@
           <p:cNvPr id="6" name="">
             <a:extLst xmlns:a="http://schemas.openxmlformats.org/drawingml/2006/main">
               <a:ext uri="{FF2B5EF4-FFF2-40B4-BE49-F238E27FC236}">
-                <a16:creationId xmlns:a16="http://schemas.microsoft.com/office/drawing/2014/main" id="{3CFA7B97-A16B-47B6-96D6-D19E5604A01E}"/>
+                <a16:creationId xmlns:a16="http://schemas.microsoft.com/office/drawing/2014/main" id="{12B2E142-17A6-4C05-BB41-002D4AF52DB3}"/>
               </a:ext>
             </a:extLst>
           </p:cNvPr>
@@ -7056,7 +7414,7 @@
                 <a:ea typeface="Arial"/>
                 <a:cs typeface="Arial"/>
               </a:rPr>
-              <a:t>25–45 MIN</a:t>
+              <a:t>BRENDA 10–25 MIN</a:t>
             </a:r>
           </a:p>
         </p:txBody>
@@ -7066,7 +7424,7 @@
           <p:cNvPr id="2" name="">
             <a:extLst xmlns:a="http://schemas.openxmlformats.org/drawingml/2006/main">
               <a:ext uri="{FF2B5EF4-FFF2-40B4-BE49-F238E27FC236}">
-                <a16:creationId xmlns:a16="http://schemas.microsoft.com/office/drawing/2014/main" id="{0595B01A-C555-4326-AF80-0DF7FAE60371}"/>
+                <a16:creationId xmlns:a16="http://schemas.microsoft.com/office/drawing/2014/main" id="{FA095E35-BA99-4903-A790-EF407A33EDDB}"/>
               </a:ext>
             </a:extLst>
           </p:cNvPr>
@@ -7124,7 +7482,7 @@
                 <a:ea typeface="Arial"/>
                 <a:cs typeface="Arial"/>
               </a:rPr>
-              <a:t>06 / 13</a:t>
+              <a:t>06 / 14</a:t>
             </a:r>
           </a:p>
         </p:txBody>
@@ -7134,7 +7492,7 @@
           <p:cNvPr id="3" name="">
             <a:extLst xmlns:a="http://schemas.openxmlformats.org/drawingml/2006/main">
               <a:ext uri="{FF2B5EF4-FFF2-40B4-BE49-F238E27FC236}">
-                <a16:creationId xmlns:a16="http://schemas.microsoft.com/office/drawing/2014/main" id="{73C4EC6E-AFFC-4AFC-8C73-F9779B95C416}"/>
+                <a16:creationId xmlns:a16="http://schemas.microsoft.com/office/drawing/2014/main" id="{51D14C8F-C40F-4D82-B890-8952DA6E3D29}"/>
               </a:ext>
             </a:extLst>
           </p:cNvPr>
@@ -7192,7 +7550,7 @@
                 <a:ea typeface="Arial"/>
                 <a:cs typeface="Arial"/>
               </a:rPr>
-              <a:t>SQL dhe skedarët me radhë</a:t>
+              <a:t>Variablat mbeten lokale</a:t>
             </a:r>
           </a:p>
         </p:txBody>
@@ -7202,7 +7560,7 @@
           <p:cNvPr id="4" name="">
             <a:extLst xmlns:a="http://schemas.openxmlformats.org/drawingml/2006/main">
               <a:ext uri="{FF2B5EF4-FFF2-40B4-BE49-F238E27FC236}">
-                <a16:creationId xmlns:a16="http://schemas.microsoft.com/office/drawing/2014/main" id="{3572FABC-E5D9-4D3D-8E95-056251A429EF}"/>
+                <a16:creationId xmlns:a16="http://schemas.microsoft.com/office/drawing/2014/main" id="{18E1DA8E-B517-4106-9517-F0211C885424}"/>
               </a:ext>
             </a:extLst>
           </p:cNvPr>
@@ -7260,7 +7618,7 @@
                 <a:ea typeface="Arial"/>
                 <a:cs typeface="Arial"/>
               </a:rPr>
-              <a:t>Ekzekuto schema-java05.sql në të njëjtën databazë Neon.</a:t>
+              <a:t>Shto GITHUB_ID, GITHUB_SECRET, NEXTAUTH_SECRET dhe NEXTAUTH_URL në .env.local.</a:t>
             </a:r>
           </a:p>
           <a:p xmlns:a="http://schemas.openxmlformats.org/drawingml/2006/main">
@@ -7288,7 +7646,7 @@
                 <a:ea typeface="Arial"/>
                 <a:cs typeface="Arial"/>
               </a:rPr>
-              <a:t>Kopjo A → G sipas emrit të skedarit. Kodi i listës shton vetëm hyrjen për panelin.</a:t>
+              <a:t>DATABASE_URL e Javës 4 mbetet. Gjenero sekretin e sesionit me komandën në udhëzim.</a:t>
             </a:r>
           </a:p>
           <a:p xmlns:a="http://schemas.openxmlformats.org/drawingml/2006/main">
@@ -7316,7 +7674,7 @@
                 <a:ea typeface="Arial"/>
                 <a:cs typeface="Arial"/>
               </a:rPr>
-              <a:t>Komponenti i kartës, db.ts dhe udhetimet.ts mbeten nga Java 4.</a:t>
+              <a:t>Instalo next-auth@4.24.15. Rinis serverin pas konfigurimit.</a:t>
             </a:r>
           </a:p>
         </p:txBody>
@@ -7326,7 +7684,7 @@
           <p:cNvPr id="5" name="">
             <a:extLst xmlns:a="http://schemas.openxmlformats.org/drawingml/2006/main">
               <a:ext uri="{FF2B5EF4-FFF2-40B4-BE49-F238E27FC236}">
-                <a16:creationId xmlns:a16="http://schemas.microsoft.com/office/drawing/2014/main" id="{AD6C74B1-7E05-4E8A-BE9F-A9146F5DA0E1}"/>
+                <a16:creationId xmlns:a16="http://schemas.microsoft.com/office/drawing/2014/main" id="{547EFB9F-0870-4BF9-9E0E-A29ACE81B532}"/>
               </a:ext>
             </a:extLst>
           </p:cNvPr>
@@ -7384,7 +7742,7 @@
                 <a:ea typeface="Arial"/>
                 <a:cs typeface="Arial"/>
               </a:rPr>
-              <a:t>Në faqe: Hap skedarët për kopjim →</a:t>
+              <a:t>Në faqe: Hap komandat dhe shembullin →</a:t>
             </a:r>
           </a:p>
         </p:txBody>
@@ -7392,7 +7750,7 @@
     </p:spTree>
     <p:extLst>
       <p:ext uri="{BB962C8B-B14F-4D97-AF65-F5344CB8AC3E}">
-        <p14:creationId xmlns:p14="http://schemas.microsoft.com/office/powerpoint/2010/main" val="1654692069"/>
+        <p14:creationId xmlns:p14="http://schemas.microsoft.com/office/powerpoint/2010/main" val="1343199611"/>
       </p:ext>
     </p:extLst>
   </p:cSld>
@@ -7423,7 +7781,7 @@
           <p:cNvPr id="6" name="">
             <a:extLst xmlns:a="http://schemas.openxmlformats.org/drawingml/2006/main">
               <a:ext uri="{FF2B5EF4-FFF2-40B4-BE49-F238E27FC236}">
-                <a16:creationId xmlns:a16="http://schemas.microsoft.com/office/drawing/2014/main" id="{A1570D8D-7AA3-4E5F-9C8F-14A2525FCFA4}"/>
+                <a16:creationId xmlns:a16="http://schemas.microsoft.com/office/drawing/2014/main" id="{4E92E36D-67B4-4902-8371-B563AA19A15F}"/>
               </a:ext>
             </a:extLst>
           </p:cNvPr>
@@ -7481,7 +7839,7 @@
                 <a:ea typeface="Arial"/>
                 <a:cs typeface="Arial"/>
               </a:rPr>
-              <a:t>45–50 MIN</a:t>
+              <a:t>25–45 MIN</a:t>
             </a:r>
           </a:p>
         </p:txBody>
@@ -7491,7 +7849,7 @@
           <p:cNvPr id="2" name="">
             <a:extLst xmlns:a="http://schemas.openxmlformats.org/drawingml/2006/main">
               <a:ext uri="{FF2B5EF4-FFF2-40B4-BE49-F238E27FC236}">
-                <a16:creationId xmlns:a16="http://schemas.microsoft.com/office/drawing/2014/main" id="{156B1D56-E313-41CE-A838-97963CB11358}"/>
+                <a16:creationId xmlns:a16="http://schemas.microsoft.com/office/drawing/2014/main" id="{EA69DA12-4DCD-4894-8267-D68368F4B974}"/>
               </a:ext>
             </a:extLst>
           </p:cNvPr>
@@ -7549,7 +7907,7 @@
                 <a:ea typeface="Arial"/>
                 <a:cs typeface="Arial"/>
               </a:rPr>
-              <a:t>07 / 13</a:t>
+              <a:t>07 / 14</a:t>
             </a:r>
           </a:p>
         </p:txBody>
@@ -7559,7 +7917,7 @@
           <p:cNvPr id="3" name="">
             <a:extLst xmlns:a="http://schemas.openxmlformats.org/drawingml/2006/main">
               <a:ext uri="{FF2B5EF4-FFF2-40B4-BE49-F238E27FC236}">
-                <a16:creationId xmlns:a16="http://schemas.microsoft.com/office/drawing/2014/main" id="{E0C09C91-D8BD-43B0-AF6A-926694428C73}"/>
+                <a16:creationId xmlns:a16="http://schemas.microsoft.com/office/drawing/2014/main" id="{BA2C6184-6A82-4F8B-9B1F-521A5BAA7744}"/>
               </a:ext>
             </a:extLst>
           </p:cNvPr>
@@ -7617,7 +7975,7 @@
                 <a:ea typeface="Arial"/>
                 <a:cs typeface="Arial"/>
               </a:rPr>
-              <a:t>Hyrja e parë është si udhëtar</a:t>
+              <a:t>SQL dhe skedarët me radhë</a:t>
             </a:r>
           </a:p>
         </p:txBody>
@@ -7627,7 +7985,7 @@
           <p:cNvPr id="4" name="">
             <a:extLst xmlns:a="http://schemas.openxmlformats.org/drawingml/2006/main">
               <a:ext uri="{FF2B5EF4-FFF2-40B4-BE49-F238E27FC236}">
-                <a16:creationId xmlns:a16="http://schemas.microsoft.com/office/drawing/2014/main" id="{BEAF4E7A-004A-417C-9002-326488656855}"/>
+                <a16:creationId xmlns:a16="http://schemas.microsoft.com/office/drawing/2014/main" id="{2A25F01C-0379-4701-A222-05260D949AB4}"/>
               </a:ext>
             </a:extLst>
           </p:cNvPr>
@@ -7685,7 +8043,7 @@
                 <a:ea typeface="Arial"/>
                 <a:cs typeface="Arial"/>
               </a:rPr>
-              <a:t>Hap /panel → Hyr me GitHub. Duhet të shfaqet emri, ID dhe roli udhetar.</a:t>
+              <a:t>Ekzekuto schema-java05.sql në të njëjtën databazë Neon.</a:t>
             </a:r>
           </a:p>
           <a:p xmlns:a="http://schemas.openxmlformats.org/drawingml/2006/main">
@@ -7713,7 +8071,7 @@
                 <a:ea typeface="Arial"/>
                 <a:cs typeface="Arial"/>
               </a:rPr>
-              <a:t>Rifresko: sesioni duhet të mbetet.</a:t>
+              <a:t>Kopjo A → G sipas emrit të skedarit. Kodi i listës shton vetëm hyrjen për panelin.</a:t>
             </a:r>
           </a:p>
           <a:p xmlns:a="http://schemas.openxmlformats.org/drawingml/2006/main">
@@ -7741,7 +8099,7 @@
                 <a:ea typeface="Arial"/>
                 <a:cs typeface="Arial"/>
               </a:rPr>
-              <a:t>Mos krijo llogari të re dhe mos përdor kredencialet e profesorit.</a:t>
+              <a:t>Komponenti i kartës, db.ts dhe udhetimet.ts mbeten nga Java 4.</a:t>
             </a:r>
           </a:p>
         </p:txBody>
@@ -7751,7 +8109,7 @@
           <p:cNvPr id="5" name="">
             <a:extLst xmlns:a="http://schemas.openxmlformats.org/drawingml/2006/main">
               <a:ext uri="{FF2B5EF4-FFF2-40B4-BE49-F238E27FC236}">
-                <a16:creationId xmlns:a16="http://schemas.microsoft.com/office/drawing/2014/main" id="{CDA55A51-E03D-4B01-AEA8-2FAA1322FA30}"/>
+                <a16:creationId xmlns:a16="http://schemas.microsoft.com/office/drawing/2014/main" id="{71C16E4D-DD5D-44CA-BBAC-64A9E1076433}"/>
               </a:ext>
             </a:extLst>
           </p:cNvPr>
@@ -7762,8 +8120,8 @@
         </p:nvSpPr>
         <p:spPr>
           <a:xfrm xmlns:a="http://schemas.openxmlformats.org/drawingml/2006/main">
-            <a:off x="609600" y="5572125"/>
-            <a:ext cx="10953750" cy="666750"/>
+            <a:off x="609600" y="6334125"/>
+            <a:ext cx="10953750" cy="285750"/>
           </a:xfrm>
           <a:prstGeom xmlns:a="http://schemas.openxmlformats.org/drawingml/2006/main" prst="rect">
             <a:avLst/>
@@ -7779,9 +8137,9 @@
           </a:bodyPr>
           <a:lstStyle xmlns:a="http://schemas.openxmlformats.org/drawingml/2006/main">
             <a:defPPr>
-              <a:defRPr sz="1650" b="0">
-                <a:solidFill>
-                  <a:srgbClr val="B8EDDB"/>
+              <a:defRPr sz="1350" b="0">
+                <a:solidFill>
+                  <a:srgbClr val="FCD34D"/>
                 </a:solidFill>
                 <a:latin typeface="Arial"/>
                 <a:ea typeface="Arial"/>
@@ -7791,25 +8149,25 @@
           </a:lstStyle>
           <a:p xmlns:a="http://schemas.openxmlformats.org/drawingml/2006/main">
             <a:pPr>
-              <a:defRPr sz="1650" b="0">
-                <a:solidFill>
-                  <a:srgbClr val="B8EDDB"/>
-                </a:solidFill>
-                <a:latin typeface="Arial"/>
-                <a:ea typeface="Arial"/>
-                <a:cs typeface="Arial"/>
-              </a:defRPr>
-            </a:pPr>
-            <a:r>
-              <a:rPr sz="1650" b="0">
-                <a:solidFill>
-                  <a:srgbClr val="B8EDDB"/>
-                </a:solidFill>
-                <a:latin typeface="Arial"/>
-                <a:ea typeface="Arial"/>
-                <a:cs typeface="Arial"/>
-              </a:rPr>
-              <a:t>Përgjigjja: Roli fillestar është udhetar sepse është leja më e vogël e nevojshme.</a:t>
+              <a:defRPr sz="1350" b="0">
+                <a:solidFill>
+                  <a:srgbClr val="FCD34D"/>
+                </a:solidFill>
+                <a:latin typeface="Arial"/>
+                <a:ea typeface="Arial"/>
+                <a:cs typeface="Arial"/>
+              </a:defRPr>
+            </a:pPr>
+            <a:r>
+              <a:rPr sz="1350" b="0">
+                <a:solidFill>
+                  <a:srgbClr val="FCD34D"/>
+                </a:solidFill>
+                <a:latin typeface="Arial"/>
+                <a:ea typeface="Arial"/>
+                <a:cs typeface="Arial"/>
+              </a:rPr>
+              <a:t>Në faqe: Hap skedarët për kopjim →</a:t>
             </a:r>
           </a:p>
         </p:txBody>
@@ -7817,7 +8175,7 @@
     </p:spTree>
     <p:extLst>
       <p:ext uri="{BB962C8B-B14F-4D97-AF65-F5344CB8AC3E}">
-        <p14:creationId xmlns:p14="http://schemas.microsoft.com/office/powerpoint/2010/main" val="1361167396"/>
+        <p14:creationId xmlns:p14="http://schemas.microsoft.com/office/powerpoint/2010/main" val="1006145719"/>
       </p:ext>
     </p:extLst>
   </p:cSld>
@@ -7845,10 +8203,10 @@
       </p:grpSpPr>
       <p:sp>
         <p:nvSpPr>
-          <p:cNvPr id="6" name="">
+          <p:cNvPr id="7" name="">
             <a:extLst xmlns:a="http://schemas.openxmlformats.org/drawingml/2006/main">
               <a:ext uri="{FF2B5EF4-FFF2-40B4-BE49-F238E27FC236}">
-                <a16:creationId xmlns:a16="http://schemas.microsoft.com/office/drawing/2014/main" id="{174E881E-DF04-44EB-A774-7EE1ECAEE442}"/>
+                <a16:creationId xmlns:a16="http://schemas.microsoft.com/office/drawing/2014/main" id="{0D3122E3-80F2-44DF-B917-889B5C4E408A}"/>
               </a:ext>
             </a:extLst>
           </p:cNvPr>
@@ -7906,7 +8264,7 @@
                 <a:ea typeface="Arial"/>
                 <a:cs typeface="Arial"/>
               </a:rPr>
-              <a:t>50–55 MIN</a:t>
+              <a:t>45–50 MIN</a:t>
             </a:r>
           </a:p>
         </p:txBody>
@@ -7916,7 +8274,7 @@
           <p:cNvPr id="2" name="">
             <a:extLst xmlns:a="http://schemas.openxmlformats.org/drawingml/2006/main">
               <a:ext uri="{FF2B5EF4-FFF2-40B4-BE49-F238E27FC236}">
-                <a16:creationId xmlns:a16="http://schemas.microsoft.com/office/drawing/2014/main" id="{1EC84D44-AAA3-4DFB-9AA1-93C6B4D60833}"/>
+                <a16:creationId xmlns:a16="http://schemas.microsoft.com/office/drawing/2014/main" id="{F26E51E8-0EAC-434A-AAE2-35B59D213DE9}"/>
               </a:ext>
             </a:extLst>
           </p:cNvPr>
@@ -7974,7 +8332,7 @@
                 <a:ea typeface="Arial"/>
                 <a:cs typeface="Arial"/>
               </a:rPr>
-              <a:t>08 / 13</a:t>
+              <a:t>08 / 14</a:t>
             </a:r>
           </a:p>
         </p:txBody>
@@ -7984,7 +8342,7 @@
           <p:cNvPr id="3" name="">
             <a:extLst xmlns:a="http://schemas.openxmlformats.org/drawingml/2006/main">
               <a:ext uri="{FF2B5EF4-FFF2-40B4-BE49-F238E27FC236}">
-                <a16:creationId xmlns:a16="http://schemas.microsoft.com/office/drawing/2014/main" id="{1368C91F-8B1F-43FA-9A7B-40EF49598F3A}"/>
+                <a16:creationId xmlns:a16="http://schemas.microsoft.com/office/drawing/2014/main" id="{1C2FDB2E-64EC-4C01-BE7A-3107AD522541}"/>
               </a:ext>
             </a:extLst>
           </p:cNvPr>
@@ -8042,7 +8400,7 @@
                 <a:ea typeface="Arial"/>
                 <a:cs typeface="Arial"/>
               </a:rPr>
-              <a:t>Cakto pronarin vetëm nga SQL Editor</a:t>
+              <a:t>Hyrja e parë është si udhëtar</a:t>
             </a:r>
           </a:p>
         </p:txBody>
@@ -8052,7 +8410,7 @@
           <p:cNvPr id="4" name="">
             <a:extLst xmlns:a="http://schemas.openxmlformats.org/drawingml/2006/main">
               <a:ext uri="{FF2B5EF4-FFF2-40B4-BE49-F238E27FC236}">
-                <a16:creationId xmlns:a16="http://schemas.microsoft.com/office/drawing/2014/main" id="{C19FD3A0-5716-4BCC-B8A9-E4F8C62B45A5}"/>
+                <a16:creationId xmlns:a16="http://schemas.microsoft.com/office/drawing/2014/main" id="{CAAB5CB1-ECA7-4158-BB69-807ADE0B3659}"/>
               </a:ext>
             </a:extLst>
           </p:cNvPr>
@@ -8110,7 +8468,7 @@
                 <a:ea typeface="Arial"/>
                 <a:cs typeface="Arial"/>
               </a:rPr>
-              <a:t>Kopjo ID-në tënde nga paneli në dy komandat e udhëzimit.</a:t>
+              <a:t>Hap /panel → Hyr me GitHub. Duhet të shfaqet emri, ID dhe roli udhetar.</a:t>
             </a:r>
           </a:p>
           <a:p xmlns:a="http://schemas.openxmlformats.org/drawingml/2006/main">
@@ -8138,7 +8496,7 @@
                 <a:ea typeface="Arial"/>
                 <a:cs typeface="Arial"/>
               </a:rPr>
-              <a:t>Në databazën tënde cakto veten shofer dhe pronar të ID 2.</a:t>
+              <a:t>Rifresko: sesioni duhet të mbetet.</a:t>
             </a:r>
           </a:p>
           <a:p xmlns:a="http://schemas.openxmlformats.org/drawingml/2006/main">
@@ -8166,7 +8524,7 @@
                 <a:ea typeface="Arial"/>
                 <a:cs typeface="Arial"/>
               </a:rPr>
-              <a:t>Rifresko panelin: shfaqet formulari. ID 1 ka pronar tjetër fiktiv.</a:t>
+              <a:t>Mos krijo llogari të re dhe mos përdor kredencialet e profesorit.</a:t>
             </a:r>
           </a:p>
         </p:txBody>
@@ -8176,7 +8534,500 @@
           <p:cNvPr id="5" name="">
             <a:extLst xmlns:a="http://schemas.openxmlformats.org/drawingml/2006/main">
               <a:ext uri="{FF2B5EF4-FFF2-40B4-BE49-F238E27FC236}">
-                <a16:creationId xmlns:a16="http://schemas.microsoft.com/office/drawing/2014/main" id="{C3C9B82D-0C6C-420C-B8DD-80FCEC407C19}"/>
+                <a16:creationId xmlns:a16="http://schemas.microsoft.com/office/drawing/2014/main" id="{84A9FF52-2F40-4C8F-8B67-72B757D2D73D}"/>
+              </a:ext>
+            </a:extLst>
+          </p:cNvPr>
+          <p:cNvSpPr>
+            <a:spLocks xmlns:a="http://schemas.openxmlformats.org/drawingml/2006/main" noGrp="1"/>
+          </p:cNvSpPr>
+          <p:nvPr/>
+        </p:nvSpPr>
+        <p:spPr>
+          <a:xfrm xmlns:a="http://schemas.openxmlformats.org/drawingml/2006/main">
+            <a:off x="609600" y="5286375"/>
+            <a:ext cx="10953750" cy="381000"/>
+          </a:xfrm>
+          <a:prstGeom xmlns:a="http://schemas.openxmlformats.org/drawingml/2006/main" prst="rect">
+            <a:avLst/>
+          </a:prstGeom>
+          <a:noFill xmlns:a="http://schemas.openxmlformats.org/drawingml/2006/main"/>
+          <a:ln xmlns:a="http://schemas.openxmlformats.org/drawingml/2006/main" w="0">
+            <a:noFill/>
+          </a:ln>
+        </p:spPr>
+        <p:txBody>
+          <a:bodyPr xmlns:a="http://schemas.openxmlformats.org/drawingml/2006/main">
+            <a:noAutofit/>
+          </a:bodyPr>
+          <a:lstStyle xmlns:a="http://schemas.openxmlformats.org/drawingml/2006/main">
+            <a:defPPr>
+              <a:defRPr sz="1725" b="1">
+                <a:solidFill>
+                  <a:srgbClr val="FCD34D"/>
+                </a:solidFill>
+                <a:latin typeface="Arial"/>
+                <a:ea typeface="Arial"/>
+                <a:cs typeface="Arial"/>
+              </a:defRPr>
+            </a:defPPr>
+          </a:lstStyle>
+          <a:p xmlns:a="http://schemas.openxmlformats.org/drawingml/2006/main">
+            <a:pPr>
+              <a:defRPr sz="1725" b="1">
+                <a:solidFill>
+                  <a:srgbClr val="FCD34D"/>
+                </a:solidFill>
+                <a:latin typeface="Arial"/>
+                <a:ea typeface="Arial"/>
+                <a:cs typeface="Arial"/>
+              </a:defRPr>
+            </a:pPr>
+            <a:r>
+              <a:rPr sz="1725" b="1">
+                <a:solidFill>
+                  <a:srgbClr val="FCD34D"/>
+                </a:solidFill>
+                <a:latin typeface="Arial"/>
+                <a:ea typeface="Arial"/>
+                <a:cs typeface="Arial"/>
+              </a:rPr>
+              <a:t>Pse hyrja e parë të jep rolin udhëtar?</a:t>
+            </a:r>
+          </a:p>
+        </p:txBody>
+      </p:sp>
+      <p:sp>
+        <p:nvSpPr>
+          <p:cNvPr id="6" name="">
+            <a:extLst xmlns:a="http://schemas.openxmlformats.org/drawingml/2006/main">
+              <a:ext uri="{FF2B5EF4-FFF2-40B4-BE49-F238E27FC236}">
+                <a16:creationId xmlns:a16="http://schemas.microsoft.com/office/drawing/2014/main" id="{AC25C2E4-A71D-4C4F-92CF-E81E9CF953FD}"/>
+              </a:ext>
+            </a:extLst>
+          </p:cNvPr>
+          <p:cNvSpPr>
+            <a:spLocks xmlns:a="http://schemas.openxmlformats.org/drawingml/2006/main" noGrp="1"/>
+          </p:cNvSpPr>
+          <p:nvPr/>
+        </p:nvSpPr>
+        <p:spPr>
+          <a:xfrm xmlns:a="http://schemas.openxmlformats.org/drawingml/2006/main">
+            <a:off x="609600" y="5715000"/>
+            <a:ext cx="10953750" cy="619125"/>
+          </a:xfrm>
+          <a:prstGeom xmlns:a="http://schemas.openxmlformats.org/drawingml/2006/main" prst="rect">
+            <a:avLst/>
+          </a:prstGeom>
+          <a:noFill xmlns:a="http://schemas.openxmlformats.org/drawingml/2006/main"/>
+          <a:ln xmlns:a="http://schemas.openxmlformats.org/drawingml/2006/main" w="0">
+            <a:noFill/>
+          </a:ln>
+        </p:spPr>
+        <p:txBody>
+          <a:bodyPr xmlns:a="http://schemas.openxmlformats.org/drawingml/2006/main">
+            <a:noAutofit/>
+          </a:bodyPr>
+          <a:lstStyle xmlns:a="http://schemas.openxmlformats.org/drawingml/2006/main">
+            <a:defPPr>
+              <a:defRPr sz="1575" b="0">
+                <a:solidFill>
+                  <a:srgbClr val="B8EDDB"/>
+                </a:solidFill>
+                <a:latin typeface="Arial"/>
+                <a:ea typeface="Arial"/>
+                <a:cs typeface="Arial"/>
+              </a:defRPr>
+            </a:defPPr>
+          </a:lstStyle>
+          <a:p xmlns:a="http://schemas.openxmlformats.org/drawingml/2006/main">
+            <a:pPr>
+              <a:defRPr sz="1575" b="0">
+                <a:solidFill>
+                  <a:srgbClr val="B8EDDB"/>
+                </a:solidFill>
+                <a:latin typeface="Arial"/>
+                <a:ea typeface="Arial"/>
+                <a:cs typeface="Arial"/>
+              </a:defRPr>
+            </a:pPr>
+            <a:r>
+              <a:rPr sz="1575" b="0">
+                <a:solidFill>
+                  <a:srgbClr val="B8EDDB"/>
+                </a:solidFill>
+                <a:latin typeface="Arial"/>
+                <a:ea typeface="Arial"/>
+                <a:cs typeface="Arial"/>
+              </a:rPr>
+              <a:t>Përgjigjja: Roli fillestar është udhetar sepse është leja më e vogël e nevojshme.</a:t>
+            </a:r>
+          </a:p>
+        </p:txBody>
+      </p:sp>
+    </p:spTree>
+    <p:extLst>
+      <p:ext uri="{BB962C8B-B14F-4D97-AF65-F5344CB8AC3E}">
+        <p14:creationId xmlns:p14="http://schemas.microsoft.com/office/powerpoint/2010/main" val="1623445013"/>
+      </p:ext>
+    </p:extLst>
+  </p:cSld>
+</p:sld>
+</file>
+
+<file path=ppt/slides/slide9.xml><?xml version="1.0" encoding="utf-8"?>
+<p:sld xmlns:p="http://schemas.openxmlformats.org/presentationml/2006/main">
+  <p:cSld>
+    <p:bg>
+      <p:bgPr>
+        <a:solidFill xmlns:a="http://schemas.openxmlformats.org/drawingml/2006/main">
+          <a:srgbClr val="0B101B"/>
+        </a:solidFill>
+      </p:bgPr>
+    </p:bg>
+    <p:spTree>
+      <p:nvGrpSpPr>
+        <p:cNvPr id="1" name=""/>
+        <p:cNvGrpSpPr/>
+        <p:nvPr/>
+      </p:nvGrpSpPr>
+      <p:grpSpPr>
+        <a:xfrm xmlns:a="http://schemas.openxmlformats.org/drawingml/2006/main"/>
+      </p:grpSpPr>
+      <p:sp>
+        <p:nvSpPr>
+          <p:cNvPr id="6" name="">
+            <a:extLst xmlns:a="http://schemas.openxmlformats.org/drawingml/2006/main">
+              <a:ext uri="{FF2B5EF4-FFF2-40B4-BE49-F238E27FC236}">
+                <a16:creationId xmlns:a16="http://schemas.microsoft.com/office/drawing/2014/main" id="{6EAACF28-D1B2-4F6F-8B1C-2A0C1B70A3D4}"/>
+              </a:ext>
+            </a:extLst>
+          </p:cNvPr>
+          <p:cNvSpPr>
+            <a:spLocks xmlns:a="http://schemas.openxmlformats.org/drawingml/2006/main" noGrp="1"/>
+          </p:cNvSpPr>
+          <p:nvPr/>
+        </p:nvSpPr>
+        <p:spPr>
+          <a:xfrm xmlns:a="http://schemas.openxmlformats.org/drawingml/2006/main">
+            <a:off x="609600" y="285750"/>
+            <a:ext cx="10096500" cy="333375"/>
+          </a:xfrm>
+          <a:prstGeom xmlns:a="http://schemas.openxmlformats.org/drawingml/2006/main" prst="rect">
+            <a:avLst/>
+          </a:prstGeom>
+          <a:noFill xmlns:a="http://schemas.openxmlformats.org/drawingml/2006/main"/>
+          <a:ln xmlns:a="http://schemas.openxmlformats.org/drawingml/2006/main" w="0">
+            <a:noFill/>
+          </a:ln>
+        </p:spPr>
+        <p:txBody>
+          <a:bodyPr xmlns:a="http://schemas.openxmlformats.org/drawingml/2006/main">
+            <a:noAutofit/>
+          </a:bodyPr>
+          <a:lstStyle xmlns:a="http://schemas.openxmlformats.org/drawingml/2006/main">
+            <a:defPPr>
+              <a:defRPr sz="1350" b="1">
+                <a:solidFill>
+                  <a:srgbClr val="FCD34D"/>
+                </a:solidFill>
+                <a:latin typeface="Arial"/>
+                <a:ea typeface="Arial"/>
+                <a:cs typeface="Arial"/>
+              </a:defRPr>
+            </a:defPPr>
+          </a:lstStyle>
+          <a:p xmlns:a="http://schemas.openxmlformats.org/drawingml/2006/main">
+            <a:pPr>
+              <a:defRPr sz="1350" b="1">
+                <a:solidFill>
+                  <a:srgbClr val="FCD34D"/>
+                </a:solidFill>
+                <a:latin typeface="Arial"/>
+                <a:ea typeface="Arial"/>
+                <a:cs typeface="Arial"/>
+              </a:defRPr>
+            </a:pPr>
+            <a:r>
+              <a:rPr sz="1350" b="1">
+                <a:solidFill>
+                  <a:srgbClr val="FCD34D"/>
+                </a:solidFill>
+                <a:latin typeface="Arial"/>
+                <a:ea typeface="Arial"/>
+                <a:cs typeface="Arial"/>
+              </a:rPr>
+              <a:t>50–55 MIN</a:t>
+            </a:r>
+          </a:p>
+        </p:txBody>
+      </p:sp>
+      <p:sp>
+        <p:nvSpPr>
+          <p:cNvPr id="2" name="">
+            <a:extLst xmlns:a="http://schemas.openxmlformats.org/drawingml/2006/main">
+              <a:ext uri="{FF2B5EF4-FFF2-40B4-BE49-F238E27FC236}">
+                <a16:creationId xmlns:a16="http://schemas.microsoft.com/office/drawing/2014/main" id="{ADFB48AB-5ACD-4803-8D2A-0FC3759468A5}"/>
+              </a:ext>
+            </a:extLst>
+          </p:cNvPr>
+          <p:cNvSpPr>
+            <a:spLocks xmlns:a="http://schemas.openxmlformats.org/drawingml/2006/main" noGrp="1"/>
+          </p:cNvSpPr>
+          <p:nvPr/>
+        </p:nvSpPr>
+        <p:spPr>
+          <a:xfrm xmlns:a="http://schemas.openxmlformats.org/drawingml/2006/main">
+            <a:off x="10810875" y="285750"/>
+            <a:ext cx="952500" cy="333375"/>
+          </a:xfrm>
+          <a:prstGeom xmlns:a="http://schemas.openxmlformats.org/drawingml/2006/main" prst="rect">
+            <a:avLst/>
+          </a:prstGeom>
+          <a:noFill xmlns:a="http://schemas.openxmlformats.org/drawingml/2006/main"/>
+          <a:ln xmlns:a="http://schemas.openxmlformats.org/drawingml/2006/main" w="0">
+            <a:noFill/>
+          </a:ln>
+        </p:spPr>
+        <p:txBody>
+          <a:bodyPr xmlns:a="http://schemas.openxmlformats.org/drawingml/2006/main">
+            <a:noAutofit/>
+          </a:bodyPr>
+          <a:lstStyle xmlns:a="http://schemas.openxmlformats.org/drawingml/2006/main">
+            <a:defPPr>
+              <a:defRPr sz="1350" b="0">
+                <a:solidFill>
+                  <a:srgbClr val="B7C5DB"/>
+                </a:solidFill>
+                <a:latin typeface="Arial"/>
+                <a:ea typeface="Arial"/>
+                <a:cs typeface="Arial"/>
+              </a:defRPr>
+            </a:defPPr>
+          </a:lstStyle>
+          <a:p xmlns:a="http://schemas.openxmlformats.org/drawingml/2006/main">
+            <a:pPr>
+              <a:defRPr sz="1350" b="0">
+                <a:solidFill>
+                  <a:srgbClr val="B7C5DB"/>
+                </a:solidFill>
+                <a:latin typeface="Arial"/>
+                <a:ea typeface="Arial"/>
+                <a:cs typeface="Arial"/>
+              </a:defRPr>
+            </a:pPr>
+            <a:r>
+              <a:rPr sz="1350" b="0">
+                <a:solidFill>
+                  <a:srgbClr val="B7C5DB"/>
+                </a:solidFill>
+                <a:latin typeface="Arial"/>
+                <a:ea typeface="Arial"/>
+                <a:cs typeface="Arial"/>
+              </a:rPr>
+              <a:t>09 / 14</a:t>
+            </a:r>
+          </a:p>
+        </p:txBody>
+      </p:sp>
+      <p:sp>
+        <p:nvSpPr>
+          <p:cNvPr id="3" name="">
+            <a:extLst xmlns:a="http://schemas.openxmlformats.org/drawingml/2006/main">
+              <a:ext uri="{FF2B5EF4-FFF2-40B4-BE49-F238E27FC236}">
+                <a16:creationId xmlns:a16="http://schemas.microsoft.com/office/drawing/2014/main" id="{6DA3E4A2-7F87-482F-9624-48EC79B4553C}"/>
+              </a:ext>
+            </a:extLst>
+          </p:cNvPr>
+          <p:cNvSpPr>
+            <a:spLocks xmlns:a="http://schemas.openxmlformats.org/drawingml/2006/main" noGrp="1"/>
+          </p:cNvSpPr>
+          <p:nvPr/>
+        </p:nvSpPr>
+        <p:spPr>
+          <a:xfrm xmlns:a="http://schemas.openxmlformats.org/drawingml/2006/main">
+            <a:off x="609600" y="904875"/>
+            <a:ext cx="10953750" cy="904875"/>
+          </a:xfrm>
+          <a:prstGeom xmlns:a="http://schemas.openxmlformats.org/drawingml/2006/main" prst="rect">
+            <a:avLst/>
+          </a:prstGeom>
+          <a:noFill xmlns:a="http://schemas.openxmlformats.org/drawingml/2006/main"/>
+          <a:ln xmlns:a="http://schemas.openxmlformats.org/drawingml/2006/main" w="0">
+            <a:noFill/>
+          </a:ln>
+        </p:spPr>
+        <p:txBody>
+          <a:bodyPr xmlns:a="http://schemas.openxmlformats.org/drawingml/2006/main">
+            <a:noAutofit/>
+          </a:bodyPr>
+          <a:lstStyle xmlns:a="http://schemas.openxmlformats.org/drawingml/2006/main">
+            <a:defPPr>
+              <a:defRPr sz="3225" b="1">
+                <a:solidFill>
+                  <a:srgbClr val="FFFFFF"/>
+                </a:solidFill>
+                <a:latin typeface="Arial"/>
+                <a:ea typeface="Arial"/>
+                <a:cs typeface="Arial"/>
+              </a:defRPr>
+            </a:defPPr>
+          </a:lstStyle>
+          <a:p xmlns:a="http://schemas.openxmlformats.org/drawingml/2006/main">
+            <a:pPr>
+              <a:defRPr sz="3225" b="1">
+                <a:solidFill>
+                  <a:srgbClr val="FFFFFF"/>
+                </a:solidFill>
+                <a:latin typeface="Arial"/>
+                <a:ea typeface="Arial"/>
+                <a:cs typeface="Arial"/>
+              </a:defRPr>
+            </a:pPr>
+            <a:r>
+              <a:rPr sz="3225" b="1">
+                <a:solidFill>
+                  <a:srgbClr val="FFFFFF"/>
+                </a:solidFill>
+                <a:latin typeface="Arial"/>
+                <a:ea typeface="Arial"/>
+                <a:cs typeface="Arial"/>
+              </a:rPr>
+              <a:t>Cakto pronarin vetëm nga SQL Editor</a:t>
+            </a:r>
+          </a:p>
+        </p:txBody>
+      </p:sp>
+      <p:sp>
+        <p:nvSpPr>
+          <p:cNvPr id="4" name="">
+            <a:extLst xmlns:a="http://schemas.openxmlformats.org/drawingml/2006/main">
+              <a:ext uri="{FF2B5EF4-FFF2-40B4-BE49-F238E27FC236}">
+                <a16:creationId xmlns:a16="http://schemas.microsoft.com/office/drawing/2014/main" id="{65FE4E03-4983-4526-9238-94168557A13F}"/>
+              </a:ext>
+            </a:extLst>
+          </p:cNvPr>
+          <p:cNvSpPr>
+            <a:spLocks xmlns:a="http://schemas.openxmlformats.org/drawingml/2006/main" noGrp="1"/>
+          </p:cNvSpPr>
+          <p:nvPr/>
+        </p:nvSpPr>
+        <p:spPr>
+          <a:xfrm xmlns:a="http://schemas.openxmlformats.org/drawingml/2006/main">
+            <a:off x="609600" y="1952625"/>
+            <a:ext cx="10953750" cy="2857500"/>
+          </a:xfrm>
+          <a:prstGeom xmlns:a="http://schemas.openxmlformats.org/drawingml/2006/main" prst="rect">
+            <a:avLst/>
+          </a:prstGeom>
+          <a:noFill xmlns:a="http://schemas.openxmlformats.org/drawingml/2006/main"/>
+          <a:ln xmlns:a="http://schemas.openxmlformats.org/drawingml/2006/main" w="0">
+            <a:noFill/>
+          </a:ln>
+        </p:spPr>
+        <p:txBody>
+          <a:bodyPr xmlns:a="http://schemas.openxmlformats.org/drawingml/2006/main">
+            <a:noAutofit/>
+          </a:bodyPr>
+          <a:lstStyle xmlns:a="http://schemas.openxmlformats.org/drawingml/2006/main">
+            <a:defPPr>
+              <a:defRPr sz="2025" b="0">
+                <a:solidFill>
+                  <a:srgbClr val="EAF1FF"/>
+                </a:solidFill>
+                <a:latin typeface="Arial"/>
+                <a:ea typeface="Arial"/>
+                <a:cs typeface="Arial"/>
+              </a:defRPr>
+            </a:defPPr>
+          </a:lstStyle>
+          <a:p xmlns:a="http://schemas.openxmlformats.org/drawingml/2006/main">
+            <a:pPr>
+              <a:defRPr sz="2025" b="0">
+                <a:solidFill>
+                  <a:srgbClr val="EAF1FF"/>
+                </a:solidFill>
+                <a:latin typeface="Arial"/>
+                <a:ea typeface="Arial"/>
+                <a:cs typeface="Arial"/>
+              </a:defRPr>
+            </a:pPr>
+            <a:r>
+              <a:rPr sz="2025" b="0">
+                <a:solidFill>
+                  <a:srgbClr val="EAF1FF"/>
+                </a:solidFill>
+                <a:latin typeface="Arial"/>
+                <a:ea typeface="Arial"/>
+                <a:cs typeface="Arial"/>
+              </a:rPr>
+              <a:t>Kopjo ID-në tënde nga paneli në dy komandat e udhëzimit.</a:t>
+            </a:r>
+          </a:p>
+          <a:p xmlns:a="http://schemas.openxmlformats.org/drawingml/2006/main">
+            <a:r>
+              <a:t/>
+            </a:r>
+          </a:p>
+          <a:p xmlns:a="http://schemas.openxmlformats.org/drawingml/2006/main">
+            <a:pPr>
+              <a:defRPr sz="2025" b="0">
+                <a:solidFill>
+                  <a:srgbClr val="EAF1FF"/>
+                </a:solidFill>
+                <a:latin typeface="Arial"/>
+                <a:ea typeface="Arial"/>
+                <a:cs typeface="Arial"/>
+              </a:defRPr>
+            </a:pPr>
+            <a:r>
+              <a:rPr sz="2025" b="0">
+                <a:solidFill>
+                  <a:srgbClr val="EAF1FF"/>
+                </a:solidFill>
+                <a:latin typeface="Arial"/>
+                <a:ea typeface="Arial"/>
+                <a:cs typeface="Arial"/>
+              </a:rPr>
+              <a:t>Në databazën tënde cakto veten shofer dhe pronar të ID 2.</a:t>
+            </a:r>
+          </a:p>
+          <a:p xmlns:a="http://schemas.openxmlformats.org/drawingml/2006/main">
+            <a:r>
+              <a:t/>
+            </a:r>
+          </a:p>
+          <a:p xmlns:a="http://schemas.openxmlformats.org/drawingml/2006/main">
+            <a:pPr>
+              <a:defRPr sz="2025" b="0">
+                <a:solidFill>
+                  <a:srgbClr val="EAF1FF"/>
+                </a:solidFill>
+                <a:latin typeface="Arial"/>
+                <a:ea typeface="Arial"/>
+                <a:cs typeface="Arial"/>
+              </a:defRPr>
+            </a:pPr>
+            <a:r>
+              <a:rPr sz="2025" b="0">
+                <a:solidFill>
+                  <a:srgbClr val="EAF1FF"/>
+                </a:solidFill>
+                <a:latin typeface="Arial"/>
+                <a:ea typeface="Arial"/>
+                <a:cs typeface="Arial"/>
+              </a:rPr>
+              <a:t>Rifresko panelin: shfaqet formulari. ID 1 ka pronar tjetër fiktiv.</a:t>
+            </a:r>
+          </a:p>
+        </p:txBody>
+      </p:sp>
+      <p:sp>
+        <p:nvSpPr>
+          <p:cNvPr id="5" name="">
+            <a:extLst xmlns:a="http://schemas.openxmlformats.org/drawingml/2006/main">
+              <a:ext uri="{FF2B5EF4-FFF2-40B4-BE49-F238E27FC236}">
+                <a16:creationId xmlns:a16="http://schemas.microsoft.com/office/drawing/2014/main" id="{2631ECBE-2A70-4C9F-ABAE-1AB87F405388}"/>
               </a:ext>
             </a:extLst>
           </p:cNvPr>
@@ -8242,364 +9093,7 @@
     </p:spTree>
     <p:extLst>
       <p:ext uri="{BB962C8B-B14F-4D97-AF65-F5344CB8AC3E}">
-        <p14:creationId xmlns:p14="http://schemas.microsoft.com/office/powerpoint/2010/main" val="1975538571"/>
-      </p:ext>
-    </p:extLst>
-  </p:cSld>
-</p:sld>
-</file>
-
-<file path=ppt/slides/slide9.xml><?xml version="1.0" encoding="utf-8"?>
-<p:sld xmlns:p="http://schemas.openxmlformats.org/presentationml/2006/main">
-  <p:cSld>
-    <p:bg>
-      <p:bgPr>
-        <a:solidFill xmlns:a="http://schemas.openxmlformats.org/drawingml/2006/main">
-          <a:srgbClr val="0B101B"/>
-        </a:solidFill>
-      </p:bgPr>
-    </p:bg>
-    <p:spTree>
-      <p:nvGrpSpPr>
-        <p:cNvPr id="1" name=""/>
-        <p:cNvGrpSpPr/>
-        <p:nvPr/>
-      </p:nvGrpSpPr>
-      <p:grpSpPr>
-        <a:xfrm xmlns:a="http://schemas.openxmlformats.org/drawingml/2006/main"/>
-      </p:grpSpPr>
-      <p:sp>
-        <p:nvSpPr>
-          <p:cNvPr id="5" name="">
-            <a:extLst xmlns:a="http://schemas.openxmlformats.org/drawingml/2006/main">
-              <a:ext uri="{FF2B5EF4-FFF2-40B4-BE49-F238E27FC236}">
-                <a16:creationId xmlns:a16="http://schemas.microsoft.com/office/drawing/2014/main" id="{90B7B4EA-AAF1-4A6C-9F2F-6DB55A991121}"/>
-              </a:ext>
-            </a:extLst>
-          </p:cNvPr>
-          <p:cNvSpPr>
-            <a:spLocks xmlns:a="http://schemas.openxmlformats.org/drawingml/2006/main" noGrp="1"/>
-          </p:cNvSpPr>
-          <p:nvPr/>
-        </p:nvSpPr>
-        <p:spPr>
-          <a:xfrm xmlns:a="http://schemas.openxmlformats.org/drawingml/2006/main">
-            <a:off x="609600" y="285750"/>
-            <a:ext cx="10096500" cy="333375"/>
-          </a:xfrm>
-          <a:prstGeom xmlns:a="http://schemas.openxmlformats.org/drawingml/2006/main" prst="rect">
-            <a:avLst/>
-          </a:prstGeom>
-          <a:noFill xmlns:a="http://schemas.openxmlformats.org/drawingml/2006/main"/>
-          <a:ln xmlns:a="http://schemas.openxmlformats.org/drawingml/2006/main" w="0">
-            <a:noFill/>
-          </a:ln>
-        </p:spPr>
-        <p:txBody>
-          <a:bodyPr xmlns:a="http://schemas.openxmlformats.org/drawingml/2006/main">
-            <a:noAutofit/>
-          </a:bodyPr>
-          <a:lstStyle xmlns:a="http://schemas.openxmlformats.org/drawingml/2006/main">
-            <a:defPPr>
-              <a:defRPr sz="1350" b="1">
-                <a:solidFill>
-                  <a:srgbClr val="FCD34D"/>
-                </a:solidFill>
-                <a:latin typeface="Arial"/>
-                <a:ea typeface="Arial"/>
-                <a:cs typeface="Arial"/>
-              </a:defRPr>
-            </a:defPPr>
-          </a:lstStyle>
-          <a:p xmlns:a="http://schemas.openxmlformats.org/drawingml/2006/main">
-            <a:pPr>
-              <a:defRPr sz="1350" b="1">
-                <a:solidFill>
-                  <a:srgbClr val="FCD34D"/>
-                </a:solidFill>
-                <a:latin typeface="Arial"/>
-                <a:ea typeface="Arial"/>
-                <a:cs typeface="Arial"/>
-              </a:defRPr>
-            </a:pPr>
-            <a:r>
-              <a:rPr sz="1350" b="1">
-                <a:solidFill>
-                  <a:srgbClr val="FCD34D"/>
-                </a:solidFill>
-                <a:latin typeface="Arial"/>
-                <a:ea typeface="Arial"/>
-                <a:cs typeface="Arial"/>
-              </a:rPr>
-              <a:t>55–70 MIN · PROVAT</a:t>
-            </a:r>
-          </a:p>
-        </p:txBody>
-      </p:sp>
-      <p:sp>
-        <p:nvSpPr>
-          <p:cNvPr id="2" name="">
-            <a:extLst xmlns:a="http://schemas.openxmlformats.org/drawingml/2006/main">
-              <a:ext uri="{FF2B5EF4-FFF2-40B4-BE49-F238E27FC236}">
-                <a16:creationId xmlns:a16="http://schemas.microsoft.com/office/drawing/2014/main" id="{5F8CB8F7-4AAE-4D6C-BB4E-F8F976D60506}"/>
-              </a:ext>
-            </a:extLst>
-          </p:cNvPr>
-          <p:cNvSpPr>
-            <a:spLocks xmlns:a="http://schemas.openxmlformats.org/drawingml/2006/main" noGrp="1"/>
-          </p:cNvSpPr>
-          <p:nvPr/>
-        </p:nvSpPr>
-        <p:spPr>
-          <a:xfrm xmlns:a="http://schemas.openxmlformats.org/drawingml/2006/main">
-            <a:off x="10810875" y="285750"/>
-            <a:ext cx="952500" cy="333375"/>
-          </a:xfrm>
-          <a:prstGeom xmlns:a="http://schemas.openxmlformats.org/drawingml/2006/main" prst="rect">
-            <a:avLst/>
-          </a:prstGeom>
-          <a:noFill xmlns:a="http://schemas.openxmlformats.org/drawingml/2006/main"/>
-          <a:ln xmlns:a="http://schemas.openxmlformats.org/drawingml/2006/main" w="0">
-            <a:noFill/>
-          </a:ln>
-        </p:spPr>
-        <p:txBody>
-          <a:bodyPr xmlns:a="http://schemas.openxmlformats.org/drawingml/2006/main">
-            <a:noAutofit/>
-          </a:bodyPr>
-          <a:lstStyle xmlns:a="http://schemas.openxmlformats.org/drawingml/2006/main">
-            <a:defPPr>
-              <a:defRPr sz="1350" b="0">
-                <a:solidFill>
-                  <a:srgbClr val="B7C5DB"/>
-                </a:solidFill>
-                <a:latin typeface="Arial"/>
-                <a:ea typeface="Arial"/>
-                <a:cs typeface="Arial"/>
-              </a:defRPr>
-            </a:defPPr>
-          </a:lstStyle>
-          <a:p xmlns:a="http://schemas.openxmlformats.org/drawingml/2006/main">
-            <a:pPr>
-              <a:defRPr sz="1350" b="0">
-                <a:solidFill>
-                  <a:srgbClr val="B7C5DB"/>
-                </a:solidFill>
-                <a:latin typeface="Arial"/>
-                <a:ea typeface="Arial"/>
-                <a:cs typeface="Arial"/>
-              </a:defRPr>
-            </a:pPr>
-            <a:r>
-              <a:rPr sz="1350" b="0">
-                <a:solidFill>
-                  <a:srgbClr val="B7C5DB"/>
-                </a:solidFill>
-                <a:latin typeface="Arial"/>
-                <a:ea typeface="Arial"/>
-                <a:cs typeface="Arial"/>
-              </a:rPr>
-              <a:t>09 / 13</a:t>
-            </a:r>
-          </a:p>
-        </p:txBody>
-      </p:sp>
-      <p:sp>
-        <p:nvSpPr>
-          <p:cNvPr id="3" name="">
-            <a:extLst xmlns:a="http://schemas.openxmlformats.org/drawingml/2006/main">
-              <a:ext uri="{FF2B5EF4-FFF2-40B4-BE49-F238E27FC236}">
-                <a16:creationId xmlns:a16="http://schemas.microsoft.com/office/drawing/2014/main" id="{6F74B49A-4486-4549-8710-5E0794998CA5}"/>
-              </a:ext>
-            </a:extLst>
-          </p:cNvPr>
-          <p:cNvSpPr>
-            <a:spLocks xmlns:a="http://schemas.openxmlformats.org/drawingml/2006/main" noGrp="1"/>
-          </p:cNvSpPr>
-          <p:nvPr/>
-        </p:nvSpPr>
-        <p:spPr>
-          <a:xfrm xmlns:a="http://schemas.openxmlformats.org/drawingml/2006/main">
-            <a:off x="609600" y="904875"/>
-            <a:ext cx="10953750" cy="904875"/>
-          </a:xfrm>
-          <a:prstGeom xmlns:a="http://schemas.openxmlformats.org/drawingml/2006/main" prst="rect">
-            <a:avLst/>
-          </a:prstGeom>
-          <a:noFill xmlns:a="http://schemas.openxmlformats.org/drawingml/2006/main"/>
-          <a:ln xmlns:a="http://schemas.openxmlformats.org/drawingml/2006/main" w="0">
-            <a:noFill/>
-          </a:ln>
-        </p:spPr>
-        <p:txBody>
-          <a:bodyPr xmlns:a="http://schemas.openxmlformats.org/drawingml/2006/main">
-            <a:noAutofit/>
-          </a:bodyPr>
-          <a:lstStyle xmlns:a="http://schemas.openxmlformats.org/drawingml/2006/main">
-            <a:defPPr>
-              <a:defRPr sz="3225" b="1">
-                <a:solidFill>
-                  <a:srgbClr val="FFFFFF"/>
-                </a:solidFill>
-                <a:latin typeface="Arial"/>
-                <a:ea typeface="Arial"/>
-                <a:cs typeface="Arial"/>
-              </a:defRPr>
-            </a:defPPr>
-          </a:lstStyle>
-          <a:p xmlns:a="http://schemas.openxmlformats.org/drawingml/2006/main">
-            <a:pPr>
-              <a:defRPr sz="3225" b="1">
-                <a:solidFill>
-                  <a:srgbClr val="FFFFFF"/>
-                </a:solidFill>
-                <a:latin typeface="Arial"/>
-                <a:ea typeface="Arial"/>
-                <a:cs typeface="Arial"/>
-              </a:defRPr>
-            </a:pPr>
-            <a:r>
-              <a:rPr sz="3225" b="1">
-                <a:solidFill>
-                  <a:srgbClr val="FFFFFF"/>
-                </a:solidFill>
-                <a:latin typeface="Arial"/>
-                <a:ea typeface="Arial"/>
-                <a:cs typeface="Arial"/>
-              </a:rPr>
-              <a:t>Prova 1: hyrja dhe dalja</a:t>
-            </a:r>
-          </a:p>
-        </p:txBody>
-      </p:sp>
-      <p:sp>
-        <p:nvSpPr>
-          <p:cNvPr id="4" name="">
-            <a:extLst xmlns:a="http://schemas.openxmlformats.org/drawingml/2006/main">
-              <a:ext uri="{FF2B5EF4-FFF2-40B4-BE49-F238E27FC236}">
-                <a16:creationId xmlns:a16="http://schemas.microsoft.com/office/drawing/2014/main" id="{CF7CB291-F7A0-4EB4-961E-5641FE1DEA1D}"/>
-              </a:ext>
-            </a:extLst>
-          </p:cNvPr>
-          <p:cNvSpPr>
-            <a:spLocks xmlns:a="http://schemas.openxmlformats.org/drawingml/2006/main" noGrp="1"/>
-          </p:cNvSpPr>
-          <p:nvPr/>
-        </p:nvSpPr>
-        <p:spPr>
-          <a:xfrm xmlns:a="http://schemas.openxmlformats.org/drawingml/2006/main">
-            <a:off x="609600" y="1952625"/>
-            <a:ext cx="10953750" cy="2857500"/>
-          </a:xfrm>
-          <a:prstGeom xmlns:a="http://schemas.openxmlformats.org/drawingml/2006/main" prst="rect">
-            <a:avLst/>
-          </a:prstGeom>
-          <a:noFill xmlns:a="http://schemas.openxmlformats.org/drawingml/2006/main"/>
-          <a:ln xmlns:a="http://schemas.openxmlformats.org/drawingml/2006/main" w="0">
-            <a:noFill/>
-          </a:ln>
-        </p:spPr>
-        <p:txBody>
-          <a:bodyPr xmlns:a="http://schemas.openxmlformats.org/drawingml/2006/main">
-            <a:noAutofit/>
-          </a:bodyPr>
-          <a:lstStyle xmlns:a="http://schemas.openxmlformats.org/drawingml/2006/main">
-            <a:defPPr>
-              <a:defRPr sz="2025" b="0">
-                <a:solidFill>
-                  <a:srgbClr val="EAF1FF"/>
-                </a:solidFill>
-                <a:latin typeface="Arial"/>
-                <a:ea typeface="Arial"/>
-                <a:cs typeface="Arial"/>
-              </a:defRPr>
-            </a:defPPr>
-          </a:lstStyle>
-          <a:p xmlns:a="http://schemas.openxmlformats.org/drawingml/2006/main">
-            <a:pPr>
-              <a:defRPr sz="2025" b="0">
-                <a:solidFill>
-                  <a:srgbClr val="EAF1FF"/>
-                </a:solidFill>
-                <a:latin typeface="Arial"/>
-                <a:ea typeface="Arial"/>
-                <a:cs typeface="Arial"/>
-              </a:defRPr>
-            </a:pPr>
-            <a:r>
-              <a:rPr sz="2025" b="0">
-                <a:solidFill>
-                  <a:srgbClr val="EAF1FF"/>
-                </a:solidFill>
-                <a:latin typeface="Arial"/>
-                <a:ea typeface="Arial"/>
-                <a:cs typeface="Arial"/>
-              </a:rPr>
-              <a:t>Hap panelin pa hyrë. Hyr me GitHub, rifresko dhe shiko emrin.</a:t>
-            </a:r>
-          </a:p>
-          <a:p xmlns:a="http://schemas.openxmlformats.org/drawingml/2006/main">
-            <a:r>
-              <a:t/>
-            </a:r>
-          </a:p>
-          <a:p xmlns:a="http://schemas.openxmlformats.org/drawingml/2006/main">
-            <a:pPr>
-              <a:defRPr sz="2025" b="0">
-                <a:solidFill>
-                  <a:srgbClr val="EAF1FF"/>
-                </a:solidFill>
-                <a:latin typeface="Arial"/>
-                <a:ea typeface="Arial"/>
-                <a:cs typeface="Arial"/>
-              </a:defRPr>
-            </a:pPr>
-            <a:r>
-              <a:rPr sz="2025" b="0">
-                <a:solidFill>
-                  <a:srgbClr val="EAF1FF"/>
-                </a:solidFill>
-                <a:latin typeface="Arial"/>
-                <a:ea typeface="Arial"/>
-                <a:cs typeface="Arial"/>
-              </a:rPr>
-              <a:t>Hape panelin edhe në një skedë tjetër. Dil në të parën.</a:t>
-            </a:r>
-          </a:p>
-          <a:p xmlns:a="http://schemas.openxmlformats.org/drawingml/2006/main">
-            <a:r>
-              <a:t/>
-            </a:r>
-          </a:p>
-          <a:p xmlns:a="http://schemas.openxmlformats.org/drawingml/2006/main">
-            <a:pPr>
-              <a:defRPr sz="2025" b="0">
-                <a:solidFill>
-                  <a:srgbClr val="EAF1FF"/>
-                </a:solidFill>
-                <a:latin typeface="Arial"/>
-                <a:ea typeface="Arial"/>
-                <a:cs typeface="Arial"/>
-              </a:defRPr>
-            </a:pPr>
-            <a:r>
-              <a:rPr sz="2025" b="0">
-                <a:solidFill>
-                  <a:srgbClr val="EAF1FF"/>
-                </a:solidFill>
-                <a:latin typeface="Arial"/>
-                <a:ea typeface="Arial"/>
-                <a:cs typeface="Arial"/>
-              </a:rPr>
-              <a:t>Rifresko të dytën: duhet të kërkojë hyrje. Shkruaj rezultatin në raport.</a:t>
-            </a:r>
-          </a:p>
-        </p:txBody>
-      </p:sp>
-    </p:spTree>
-    <p:extLst>
-      <p:ext uri="{BB962C8B-B14F-4D97-AF65-F5344CB8AC3E}">
-        <p14:creationId xmlns:p14="http://schemas.microsoft.com/office/powerpoint/2010/main" val="750321936"/>
+        <p14:creationId xmlns:p14="http://schemas.microsoft.com/office/powerpoint/2010/main" val="1182432569"/>
       </p:ext>
     </p:extLst>
   </p:cSld>

--- a/lendet/2026-2027/mobile/lectures/ushtrimet-05-hyrja-lejet-rideshare-2026.pptx
+++ b/lendet/2026-2027/mobile/lectures/ushtrimet-05-hyrja-lejet-rideshare-2026.pptx
@@ -2,23 +2,23 @@
 <file path=ppt/presentation.xml><?xml version="1.0" encoding="utf-8"?>
 <p:presentation xmlns:p="http://schemas.openxmlformats.org/presentationml/2006/main">
   <p:sldMasterIdLst>
-    <p:sldMasterId xmlns:r="http://schemas.openxmlformats.org/officeDocument/2006/relationships" id="2147483648" r:id="Red7867abea7a4f98"/>
+    <p:sldMasterId xmlns:r="http://schemas.openxmlformats.org/officeDocument/2006/relationships" id="2147483648" r:id="Rc7a5850b99db472b"/>
   </p:sldMasterIdLst>
   <p:sldIdLst>
-    <p:sldId xmlns:r="http://schemas.openxmlformats.org/officeDocument/2006/relationships" id="256" r:id="R4293f53bdb6447aa"/>
-    <p:sldId xmlns:r="http://schemas.openxmlformats.org/officeDocument/2006/relationships" id="257" r:id="R5cd12bb736fd4047"/>
-    <p:sldId xmlns:r="http://schemas.openxmlformats.org/officeDocument/2006/relationships" id="258" r:id="Ra6f4419e78e542c4"/>
-    <p:sldId xmlns:r="http://schemas.openxmlformats.org/officeDocument/2006/relationships" id="259" r:id="Rabda7ad0400e406f"/>
-    <p:sldId xmlns:r="http://schemas.openxmlformats.org/officeDocument/2006/relationships" id="260" r:id="R6dcd18c1422b4f19"/>
-    <p:sldId xmlns:r="http://schemas.openxmlformats.org/officeDocument/2006/relationships" id="261" r:id="R6e7d700748da430b"/>
-    <p:sldId xmlns:r="http://schemas.openxmlformats.org/officeDocument/2006/relationships" id="262" r:id="R2f2e465519754186"/>
-    <p:sldId xmlns:r="http://schemas.openxmlformats.org/officeDocument/2006/relationships" id="263" r:id="Rf19d4347e2364e24"/>
-    <p:sldId xmlns:r="http://schemas.openxmlformats.org/officeDocument/2006/relationships" id="264" r:id="R3c701d0f98084ea7"/>
-    <p:sldId xmlns:r="http://schemas.openxmlformats.org/officeDocument/2006/relationships" id="265" r:id="Rd6b1c34967b846ae"/>
-    <p:sldId xmlns:r="http://schemas.openxmlformats.org/officeDocument/2006/relationships" id="266" r:id="R540b434b1131462c"/>
-    <p:sldId xmlns:r="http://schemas.openxmlformats.org/officeDocument/2006/relationships" id="267" r:id="Rcfa27e2fb450401b"/>
-    <p:sldId xmlns:r="http://schemas.openxmlformats.org/officeDocument/2006/relationships" id="268" r:id="R8e1a87d0a61341cd"/>
-    <p:sldId xmlns:r="http://schemas.openxmlformats.org/officeDocument/2006/relationships" id="269" r:id="R0e4183fdee364b93"/>
+    <p:sldId xmlns:r="http://schemas.openxmlformats.org/officeDocument/2006/relationships" id="256" r:id="Rccc39cfe4fd742d3"/>
+    <p:sldId xmlns:r="http://schemas.openxmlformats.org/officeDocument/2006/relationships" id="257" r:id="R00cdef560b0f4bf9"/>
+    <p:sldId xmlns:r="http://schemas.openxmlformats.org/officeDocument/2006/relationships" id="258" r:id="Rc88605ee4a4c4d1b"/>
+    <p:sldId xmlns:r="http://schemas.openxmlformats.org/officeDocument/2006/relationships" id="259" r:id="R9461f3613b66410a"/>
+    <p:sldId xmlns:r="http://schemas.openxmlformats.org/officeDocument/2006/relationships" id="260" r:id="Raf863b201df54ae2"/>
+    <p:sldId xmlns:r="http://schemas.openxmlformats.org/officeDocument/2006/relationships" id="261" r:id="R9a3e80be532d4476"/>
+    <p:sldId xmlns:r="http://schemas.openxmlformats.org/officeDocument/2006/relationships" id="262" r:id="Rb203cb8714b04762"/>
+    <p:sldId xmlns:r="http://schemas.openxmlformats.org/officeDocument/2006/relationships" id="263" r:id="Rfd8f6d8c8c19410c"/>
+    <p:sldId xmlns:r="http://schemas.openxmlformats.org/officeDocument/2006/relationships" id="264" r:id="Ra6c798b9f4414891"/>
+    <p:sldId xmlns:r="http://schemas.openxmlformats.org/officeDocument/2006/relationships" id="265" r:id="R70e059ae9c0b4f16"/>
+    <p:sldId xmlns:r="http://schemas.openxmlformats.org/officeDocument/2006/relationships" id="266" r:id="R1426b9cf31694363"/>
+    <p:sldId xmlns:r="http://schemas.openxmlformats.org/officeDocument/2006/relationships" id="267" r:id="R984495a723de4e63"/>
+    <p:sldId xmlns:r="http://schemas.openxmlformats.org/officeDocument/2006/relationships" id="268" r:id="Raf06bebbe4054f48"/>
+    <p:sldId xmlns:r="http://schemas.openxmlformats.org/officeDocument/2006/relationships" id="269" r:id="Rde54e64d381a49a8"/>
   </p:sldIdLst>
   <p:sldSz cx="12192000" cy="6858000"/>
   <p:notesSz cx="6858000" cy="9144000"/>
@@ -42,7 +42,7 @@
           <p:cNvPr id="3" name="Title">
             <a:extLst xmlns:a="http://schemas.openxmlformats.org/drawingml/2006/main">
               <a:ext uri="{FF2B5EF4-FFF2-40B4-BE49-F238E27FC236}">
-                <a16:creationId xmlns:a16="http://schemas.microsoft.com/office/drawing/2014/main" id="{4B268428-4A84-4F77-A129-CF4061E50683}"/>
+                <a16:creationId xmlns:a16="http://schemas.microsoft.com/office/drawing/2014/main" id="{D38B8985-0DD1-4F0D-A1BB-9729BEB3AA43}"/>
               </a:ext>
             </a:extLst>
           </p:cNvPr>
@@ -199,7 +199,7 @@
           <p:cNvPr id="2" name="Subtitle">
             <a:extLst xmlns:a="http://schemas.openxmlformats.org/drawingml/2006/main">
               <a:ext uri="{FF2B5EF4-FFF2-40B4-BE49-F238E27FC236}">
-                <a16:creationId xmlns:a16="http://schemas.microsoft.com/office/drawing/2014/main" id="{E1B20DD8-C5C1-4EE0-B230-3CD6437901DB}"/>
+                <a16:creationId xmlns:a16="http://schemas.microsoft.com/office/drawing/2014/main" id="{89E18F8F-5B72-4848-9F2E-1F5B9FB75067}"/>
               </a:ext>
             </a:extLst>
           </p:cNvPr>
@@ -373,7 +373,7 @@
           <p:cNvPr id="2" name="Section title">
             <a:extLst xmlns:a="http://schemas.openxmlformats.org/drawingml/2006/main">
               <a:ext uri="{FF2B5EF4-FFF2-40B4-BE49-F238E27FC236}">
-                <a16:creationId xmlns:a16="http://schemas.microsoft.com/office/drawing/2014/main" id="{19BF7EB9-CB17-44E5-AD00-2DA977AB0CA0}"/>
+                <a16:creationId xmlns:a16="http://schemas.microsoft.com/office/drawing/2014/main" id="{7F066084-ED91-471F-8D18-0990ADA332D3}"/>
               </a:ext>
             </a:extLst>
           </p:cNvPr>
@@ -547,7 +547,7 @@
           <p:cNvPr id="3" name="Title">
             <a:extLst xmlns:a="http://schemas.openxmlformats.org/drawingml/2006/main">
               <a:ext uri="{FF2B5EF4-FFF2-40B4-BE49-F238E27FC236}">
-                <a16:creationId xmlns:a16="http://schemas.microsoft.com/office/drawing/2014/main" id="{F748F749-C1FC-4234-923E-16D44E8B749D}"/>
+                <a16:creationId xmlns:a16="http://schemas.microsoft.com/office/drawing/2014/main" id="{65C4017C-3A70-47F1-BF8B-B0A9167DEE67}"/>
               </a:ext>
             </a:extLst>
           </p:cNvPr>
@@ -704,7 +704,7 @@
           <p:cNvPr id="2" name="Body">
             <a:extLst xmlns:a="http://schemas.openxmlformats.org/drawingml/2006/main">
               <a:ext uri="{FF2B5EF4-FFF2-40B4-BE49-F238E27FC236}">
-                <a16:creationId xmlns:a16="http://schemas.microsoft.com/office/drawing/2014/main" id="{A046B0A6-6098-43AB-B355-F4FC53EE264B}"/>
+                <a16:creationId xmlns:a16="http://schemas.microsoft.com/office/drawing/2014/main" id="{A2572771-4EC8-4D9A-A518-9926A72695DF}"/>
               </a:ext>
             </a:extLst>
           </p:cNvPr>
@@ -878,7 +878,7 @@
           <p:cNvPr id="4" name="Title">
             <a:extLst xmlns:a="http://schemas.openxmlformats.org/drawingml/2006/main">
               <a:ext uri="{FF2B5EF4-FFF2-40B4-BE49-F238E27FC236}">
-                <a16:creationId xmlns:a16="http://schemas.microsoft.com/office/drawing/2014/main" id="{A52A2020-CB2C-4889-B0AF-70C40907D9DD}"/>
+                <a16:creationId xmlns:a16="http://schemas.microsoft.com/office/drawing/2014/main" id="{9D5DC25D-0F74-4AE7-A2BB-2F2DD0F42681}"/>
               </a:ext>
             </a:extLst>
           </p:cNvPr>
@@ -1035,7 +1035,7 @@
           <p:cNvPr id="2" name="Left column">
             <a:extLst xmlns:a="http://schemas.openxmlformats.org/drawingml/2006/main">
               <a:ext uri="{FF2B5EF4-FFF2-40B4-BE49-F238E27FC236}">
-                <a16:creationId xmlns:a16="http://schemas.microsoft.com/office/drawing/2014/main" id="{1F430A71-17D4-432D-A9C3-0DC15384D758}"/>
+                <a16:creationId xmlns:a16="http://schemas.microsoft.com/office/drawing/2014/main" id="{7ACA1852-1825-4EAD-A923-DB7C64839D04}"/>
               </a:ext>
             </a:extLst>
           </p:cNvPr>
@@ -1192,7 +1192,7 @@
           <p:cNvPr id="3" name="Right column">
             <a:extLst xmlns:a="http://schemas.openxmlformats.org/drawingml/2006/main">
               <a:ext uri="{FF2B5EF4-FFF2-40B4-BE49-F238E27FC236}">
-                <a16:creationId xmlns:a16="http://schemas.microsoft.com/office/drawing/2014/main" id="{616FBEFD-4607-40A0-8E59-0A441528D7DF}"/>
+                <a16:creationId xmlns:a16="http://schemas.microsoft.com/office/drawing/2014/main" id="{AD35BF9A-28DE-4236-8CA3-93264C11503D}"/>
               </a:ext>
             </a:extLst>
           </p:cNvPr>
@@ -1366,7 +1366,7 @@
           <p:cNvPr id="3" name="Title">
             <a:extLst xmlns:a="http://schemas.openxmlformats.org/drawingml/2006/main">
               <a:ext uri="{FF2B5EF4-FFF2-40B4-BE49-F238E27FC236}">
-                <a16:creationId xmlns:a16="http://schemas.microsoft.com/office/drawing/2014/main" id="{D6703742-EAB9-4FD3-8C6B-3FBF20FA0FED}"/>
+                <a16:creationId xmlns:a16="http://schemas.microsoft.com/office/drawing/2014/main" id="{CDD3A59E-861D-4B0B-AFD3-8CB4B0FA7E43}"/>
               </a:ext>
             </a:extLst>
           </p:cNvPr>
@@ -1523,7 +1523,7 @@
           <p:cNvPr id="2" name="Left column">
             <a:extLst xmlns:a="http://schemas.openxmlformats.org/drawingml/2006/main">
               <a:ext uri="{FF2B5EF4-FFF2-40B4-BE49-F238E27FC236}">
-                <a16:creationId xmlns:a16="http://schemas.microsoft.com/office/drawing/2014/main" id="{F9BB1E81-54D0-445B-849E-D74390FE2F20}"/>
+                <a16:creationId xmlns:a16="http://schemas.microsoft.com/office/drawing/2014/main" id="{84F15B2D-5CA2-4EE5-8187-126A7AED8AFD}"/>
               </a:ext>
             </a:extLst>
           </p:cNvPr>
@@ -1718,12 +1718,12 @@
   </p:cSld>
   <p:clrMap bg1="lt1" tx1="dk1" bg2="lt2" tx2="dk2" accent1="accent1" accent2="accent2" accent3="accent3" accent4="accent4" accent5="accent5" accent6="accent6" hlink="hlink" folHlink="folHlink"/>
   <p:sldLayoutIdLst>
-    <p:sldLayoutId xmlns:r="http://schemas.openxmlformats.org/officeDocument/2006/relationships" id="2147483649" r:id="R7b6f726bf93e46dd"/>
-    <p:sldLayoutId xmlns:r="http://schemas.openxmlformats.org/officeDocument/2006/relationships" id="2147483650" r:id="Ra90b673b78814c4b"/>
-    <p:sldLayoutId xmlns:r="http://schemas.openxmlformats.org/officeDocument/2006/relationships" id="2147483651" r:id="R8ca8491e8a8b455d"/>
-    <p:sldLayoutId xmlns:r="http://schemas.openxmlformats.org/officeDocument/2006/relationships" id="2147483652" r:id="Rc209707b73ed400a"/>
-    <p:sldLayoutId xmlns:r="http://schemas.openxmlformats.org/officeDocument/2006/relationships" id="2147483653" r:id="Rbd342144186949c4"/>
-    <p:sldLayoutId xmlns:r="http://schemas.openxmlformats.org/officeDocument/2006/relationships" id="2147483654" r:id="R167d6f7b7090427d"/>
+    <p:sldLayoutId xmlns:r="http://schemas.openxmlformats.org/officeDocument/2006/relationships" id="2147483649" r:id="R22ee472a6a444921"/>
+    <p:sldLayoutId xmlns:r="http://schemas.openxmlformats.org/officeDocument/2006/relationships" id="2147483650" r:id="R3f95fb4aede944bb"/>
+    <p:sldLayoutId xmlns:r="http://schemas.openxmlformats.org/officeDocument/2006/relationships" id="2147483651" r:id="R8957c6f09f854f2c"/>
+    <p:sldLayoutId xmlns:r="http://schemas.openxmlformats.org/officeDocument/2006/relationships" id="2147483652" r:id="R8732e13e98f54239"/>
+    <p:sldLayoutId xmlns:r="http://schemas.openxmlformats.org/officeDocument/2006/relationships" id="2147483653" r:id="R9aa8ff9fdcbc4f92"/>
+    <p:sldLayoutId xmlns:r="http://schemas.openxmlformats.org/officeDocument/2006/relationships" id="2147483654" r:id="R396093caa96f4f70"/>
   </p:sldLayoutIdLst>
   <p:txStyles>
     <p:titleStyle>
@@ -2274,7 +2274,7 @@
           <p:cNvPr id="7" name="">
             <a:extLst xmlns:a="http://schemas.openxmlformats.org/drawingml/2006/main">
               <a:ext uri="{FF2B5EF4-FFF2-40B4-BE49-F238E27FC236}">
-                <a16:creationId xmlns:a16="http://schemas.microsoft.com/office/drawing/2014/main" id="{1794F021-1B96-43D1-ACEF-888205919E03}"/>
+                <a16:creationId xmlns:a16="http://schemas.microsoft.com/office/drawing/2014/main" id="{E975F674-863A-4ADC-B3B9-D10470505B54}"/>
               </a:ext>
             </a:extLst>
           </p:cNvPr>
@@ -2342,7 +2342,7 @@
           <p:cNvPr id="2" name="">
             <a:extLst xmlns:a="http://schemas.openxmlformats.org/drawingml/2006/main">
               <a:ext uri="{FF2B5EF4-FFF2-40B4-BE49-F238E27FC236}">
-                <a16:creationId xmlns:a16="http://schemas.microsoft.com/office/drawing/2014/main" id="{B52C234D-636E-46CA-A3CF-C5301CEC290B}"/>
+                <a16:creationId xmlns:a16="http://schemas.microsoft.com/office/drawing/2014/main" id="{97141D00-373E-4DFD-93D8-E4A2D851DA3F}"/>
               </a:ext>
             </a:extLst>
           </p:cNvPr>
@@ -2410,7 +2410,7 @@
           <p:cNvPr id="3" name="">
             <a:extLst xmlns:a="http://schemas.openxmlformats.org/drawingml/2006/main">
               <a:ext uri="{FF2B5EF4-FFF2-40B4-BE49-F238E27FC236}">
-                <a16:creationId xmlns:a16="http://schemas.microsoft.com/office/drawing/2014/main" id="{A4F8EB4E-8D10-4858-B468-A3F854F392FA}"/>
+                <a16:creationId xmlns:a16="http://schemas.microsoft.com/office/drawing/2014/main" id="{46399771-2193-4FB6-A137-DFB41E6DC70A}"/>
               </a:ext>
             </a:extLst>
           </p:cNvPr>
@@ -2420,7 +2420,7 @@
           <p:nvPr/>
         </p:nvPicPr>
         <p:blipFill>
-          <a:blip xmlns:r="http://schemas.openxmlformats.org/officeDocument/2006/relationships" xmlns:a="http://schemas.openxmlformats.org/drawingml/2006/main" r:embed="Rf1de8a28ab07412a"/>
+          <a:blip xmlns:r="http://schemas.openxmlformats.org/officeDocument/2006/relationships" xmlns:a="http://schemas.openxmlformats.org/drawingml/2006/main" r:embed="Ra05b0ddd9d24481f"/>
           <a:stretch xmlns:a="http://schemas.openxmlformats.org/drawingml/2006/main"/>
         </p:blipFill>
         <p:spPr>
@@ -2438,7 +2438,7 @@
           <p:cNvPr id="4" name="">
             <a:extLst xmlns:a="http://schemas.openxmlformats.org/drawingml/2006/main">
               <a:ext uri="{FF2B5EF4-FFF2-40B4-BE49-F238E27FC236}">
-                <a16:creationId xmlns:a16="http://schemas.microsoft.com/office/drawing/2014/main" id="{531F3A39-D41C-4330-9E17-7E57D76956C7}"/>
+                <a16:creationId xmlns:a16="http://schemas.microsoft.com/office/drawing/2014/main" id="{6A3943D8-5C36-4137-9C18-97C5612AE158}"/>
               </a:ext>
             </a:extLst>
           </p:cNvPr>
@@ -2506,7 +2506,7 @@
           <p:cNvPr id="5" name="">
             <a:extLst xmlns:a="http://schemas.openxmlformats.org/drawingml/2006/main">
               <a:ext uri="{FF2B5EF4-FFF2-40B4-BE49-F238E27FC236}">
-                <a16:creationId xmlns:a16="http://schemas.microsoft.com/office/drawing/2014/main" id="{3933FE87-0511-4E3F-A254-9C6B933D80D9}"/>
+                <a16:creationId xmlns:a16="http://schemas.microsoft.com/office/drawing/2014/main" id="{5B5B7260-0CA1-4ECC-9EB2-31413163A0CD}"/>
               </a:ext>
             </a:extLst>
           </p:cNvPr>
@@ -2602,7 +2602,7 @@
           <p:cNvPr id="6" name="">
             <a:extLst xmlns:a="http://schemas.openxmlformats.org/drawingml/2006/main">
               <a:ext uri="{FF2B5EF4-FFF2-40B4-BE49-F238E27FC236}">
-                <a16:creationId xmlns:a16="http://schemas.microsoft.com/office/drawing/2014/main" id="{5369DC9D-2763-499C-B45D-E56E8BDC901D}"/>
+                <a16:creationId xmlns:a16="http://schemas.microsoft.com/office/drawing/2014/main" id="{3B85A23A-51B7-47CF-AE2B-75C76FCC14BF}"/>
               </a:ext>
             </a:extLst>
           </p:cNvPr>
@@ -2668,7 +2668,7 @@
     </p:spTree>
     <p:extLst>
       <p:ext uri="{BB962C8B-B14F-4D97-AF65-F5344CB8AC3E}">
-        <p14:creationId xmlns:p14="http://schemas.microsoft.com/office/powerpoint/2010/main" val="1656946579"/>
+        <p14:creationId xmlns:p14="http://schemas.microsoft.com/office/powerpoint/2010/main" val="1352027828"/>
       </p:ext>
     </p:extLst>
   </p:cSld>
@@ -2699,7 +2699,7 @@
           <p:cNvPr id="5" name="">
             <a:extLst xmlns:a="http://schemas.openxmlformats.org/drawingml/2006/main">
               <a:ext uri="{FF2B5EF4-FFF2-40B4-BE49-F238E27FC236}">
-                <a16:creationId xmlns:a16="http://schemas.microsoft.com/office/drawing/2014/main" id="{91E0E2FD-F101-4EE5-B1A0-C08BB686CD14}"/>
+                <a16:creationId xmlns:a16="http://schemas.microsoft.com/office/drawing/2014/main" id="{7E46146F-C8D2-4928-A47F-C33013BF079A}"/>
               </a:ext>
             </a:extLst>
           </p:cNvPr>
@@ -2757,7 +2757,7 @@
                 <a:ea typeface="Arial"/>
                 <a:cs typeface="Arial"/>
               </a:rPr>
-              <a:t>55–70 MIN · PROVAT</a:t>
+              <a:t>50–60 MIN · PROVAT</a:t>
             </a:r>
           </a:p>
         </p:txBody>
@@ -2767,7 +2767,7 @@
           <p:cNvPr id="2" name="">
             <a:extLst xmlns:a="http://schemas.openxmlformats.org/drawingml/2006/main">
               <a:ext uri="{FF2B5EF4-FFF2-40B4-BE49-F238E27FC236}">
-                <a16:creationId xmlns:a16="http://schemas.microsoft.com/office/drawing/2014/main" id="{C4F6E657-7CDF-48D0-8D69-62306C04925E}"/>
+                <a16:creationId xmlns:a16="http://schemas.microsoft.com/office/drawing/2014/main" id="{6748698E-AF8E-493C-9734-2A47A3BEF135}"/>
               </a:ext>
             </a:extLst>
           </p:cNvPr>
@@ -2835,7 +2835,7 @@
           <p:cNvPr id="3" name="">
             <a:extLst xmlns:a="http://schemas.openxmlformats.org/drawingml/2006/main">
               <a:ext uri="{FF2B5EF4-FFF2-40B4-BE49-F238E27FC236}">
-                <a16:creationId xmlns:a16="http://schemas.microsoft.com/office/drawing/2014/main" id="{A90468E2-0989-4762-A845-1DBAF92E38ED}"/>
+                <a16:creationId xmlns:a16="http://schemas.microsoft.com/office/drawing/2014/main" id="{42B497A8-1379-419F-B0D3-FFFE1268826A}"/>
               </a:ext>
             </a:extLst>
           </p:cNvPr>
@@ -2903,7 +2903,7 @@
           <p:cNvPr id="4" name="">
             <a:extLst xmlns:a="http://schemas.openxmlformats.org/drawingml/2006/main">
               <a:ext uri="{FF2B5EF4-FFF2-40B4-BE49-F238E27FC236}">
-                <a16:creationId xmlns:a16="http://schemas.microsoft.com/office/drawing/2014/main" id="{A826F17D-C0D0-480F-9202-B84A46D8FFDF}"/>
+                <a16:creationId xmlns:a16="http://schemas.microsoft.com/office/drawing/2014/main" id="{3F8DDDBA-E13C-4F9E-BF66-F7E87722AB11}"/>
               </a:ext>
             </a:extLst>
           </p:cNvPr>
@@ -2989,7 +2989,7 @@
                 <a:ea typeface="Arial"/>
                 <a:cs typeface="Arial"/>
               </a:rPr>
-              <a:t>Hape panelin edhe në një skedë tjetër. Dil në të parën.</a:t>
+              <a:t>Kliko Dil: paneli duhet të kërkojë hyrje përsëri.</a:t>
             </a:r>
           </a:p>
           <a:p xmlns:a="http://schemas.openxmlformats.org/drawingml/2006/main">
@@ -3017,7 +3017,7 @@
                 <a:ea typeface="Arial"/>
                 <a:cs typeface="Arial"/>
               </a:rPr>
-              <a:t>Rifresko të dytën: duhet të kërkojë hyrje. Shkruaj rezultatin në raport.</a:t>
+              <a:t>Shkruaj rezultatin në raport; hyr sërish për provën 2.</a:t>
             </a:r>
           </a:p>
         </p:txBody>
@@ -3025,7 +3025,7 @@
     </p:spTree>
     <p:extLst>
       <p:ext uri="{BB962C8B-B14F-4D97-AF65-F5344CB8AC3E}">
-        <p14:creationId xmlns:p14="http://schemas.microsoft.com/office/powerpoint/2010/main" val="1770433437"/>
+        <p14:creationId xmlns:p14="http://schemas.microsoft.com/office/powerpoint/2010/main" val="479922124"/>
       </p:ext>
     </p:extLst>
   </p:cSld>
@@ -3056,7 +3056,7 @@
           <p:cNvPr id="12" name="">
             <a:extLst xmlns:a="http://schemas.openxmlformats.org/drawingml/2006/main">
               <a:ext uri="{FF2B5EF4-FFF2-40B4-BE49-F238E27FC236}">
-                <a16:creationId xmlns:a16="http://schemas.microsoft.com/office/drawing/2014/main" id="{7A499BF1-E453-43CA-A697-FC3122CE6975}"/>
+                <a16:creationId xmlns:a16="http://schemas.microsoft.com/office/drawing/2014/main" id="{992BC35D-23BE-4429-8E5E-C1EF9F17BE56}"/>
               </a:ext>
             </a:extLst>
           </p:cNvPr>
@@ -3114,7 +3114,7 @@
                 <a:ea typeface="Arial"/>
                 <a:cs typeface="Arial"/>
               </a:rPr>
-              <a:t>55–70 MIN · PROVAT</a:t>
+              <a:t>50–60 MIN · PROVAT</a:t>
             </a:r>
           </a:p>
         </p:txBody>
@@ -3124,7 +3124,7 @@
           <p:cNvPr id="2" name="">
             <a:extLst xmlns:a="http://schemas.openxmlformats.org/drawingml/2006/main">
               <a:ext uri="{FF2B5EF4-FFF2-40B4-BE49-F238E27FC236}">
-                <a16:creationId xmlns:a16="http://schemas.microsoft.com/office/drawing/2014/main" id="{DC0FAC7E-AFA9-4E38-90FB-8EF2D7E2C8B8}"/>
+                <a16:creationId xmlns:a16="http://schemas.microsoft.com/office/drawing/2014/main" id="{D2D2D82B-7365-4735-BB70-C2EE47FA2059}"/>
               </a:ext>
             </a:extLst>
           </p:cNvPr>
@@ -3192,7 +3192,7 @@
           <p:cNvPr id="3" name="">
             <a:extLst xmlns:a="http://schemas.openxmlformats.org/drawingml/2006/main">
               <a:ext uri="{FF2B5EF4-FFF2-40B4-BE49-F238E27FC236}">
-                <a16:creationId xmlns:a16="http://schemas.microsoft.com/office/drawing/2014/main" id="{E3DDF96C-A81D-4E34-ADDA-D663DA59F1AC}"/>
+                <a16:creationId xmlns:a16="http://schemas.microsoft.com/office/drawing/2014/main" id="{C1ED102E-3DBD-4E62-B367-E96092A714F8}"/>
               </a:ext>
             </a:extLst>
           </p:cNvPr>
@@ -3260,7 +3260,7 @@
           <p:cNvPr id="4" name="">
             <a:extLst xmlns:a="http://schemas.openxmlformats.org/drawingml/2006/main">
               <a:ext uri="{FF2B5EF4-FFF2-40B4-BE49-F238E27FC236}">
-                <a16:creationId xmlns:a16="http://schemas.microsoft.com/office/drawing/2014/main" id="{CE880724-3684-4844-AE85-E5824C84810C}"/>
+                <a16:creationId xmlns:a16="http://schemas.microsoft.com/office/drawing/2014/main" id="{BA179827-C7F6-44A3-85F7-E739E281FD96}"/>
               </a:ext>
             </a:extLst>
           </p:cNvPr>
@@ -3384,7 +3384,7 @@
           <p:cNvPr id="5" name="">
             <a:extLst xmlns:a="http://schemas.openxmlformats.org/drawingml/2006/main">
               <a:ext uri="{FF2B5EF4-FFF2-40B4-BE49-F238E27FC236}">
-                <a16:creationId xmlns:a16="http://schemas.microsoft.com/office/drawing/2014/main" id="{8B2A0407-0170-4915-A7D8-5117C50D708E}"/>
+                <a16:creationId xmlns:a16="http://schemas.microsoft.com/office/drawing/2014/main" id="{954F3599-CDAE-403A-9A3D-821AA39637D3}"/>
               </a:ext>
             </a:extLst>
           </p:cNvPr>
@@ -3452,7 +3452,7 @@
           <p:cNvPr id="6" name="">
             <a:extLst xmlns:a="http://schemas.openxmlformats.org/drawingml/2006/main">
               <a:ext uri="{FF2B5EF4-FFF2-40B4-BE49-F238E27FC236}">
-                <a16:creationId xmlns:a16="http://schemas.microsoft.com/office/drawing/2014/main" id="{000CDF12-A036-4E49-A30B-0EB65D021C3F}"/>
+                <a16:creationId xmlns:a16="http://schemas.microsoft.com/office/drawing/2014/main" id="{E9BDD7DC-4756-4E24-AC83-2019FC9DBD22}"/>
               </a:ext>
             </a:extLst>
           </p:cNvPr>
@@ -3520,7 +3520,7 @@
           <p:cNvPr id="7" name="">
             <a:extLst xmlns:a="http://schemas.openxmlformats.org/drawingml/2006/main">
               <a:ext uri="{FF2B5EF4-FFF2-40B4-BE49-F238E27FC236}">
-                <a16:creationId xmlns:a16="http://schemas.microsoft.com/office/drawing/2014/main" id="{544D50B3-5D05-44D3-A1EA-0A4385236279}"/>
+                <a16:creationId xmlns:a16="http://schemas.microsoft.com/office/drawing/2014/main" id="{D1F018EA-BD9B-4BF5-9DF9-CB92752C1675}"/>
               </a:ext>
             </a:extLst>
           </p:cNvPr>
@@ -3588,7 +3588,7 @@
           <p:cNvPr id="8" name="">
             <a:extLst xmlns:a="http://schemas.openxmlformats.org/drawingml/2006/main">
               <a:ext uri="{FF2B5EF4-FFF2-40B4-BE49-F238E27FC236}">
-                <a16:creationId xmlns:a16="http://schemas.microsoft.com/office/drawing/2014/main" id="{84938F93-4EA0-4274-A4E4-5D2381FD6E19}"/>
+                <a16:creationId xmlns:a16="http://schemas.microsoft.com/office/drawing/2014/main" id="{6F362C1B-A880-42EA-B8DC-9B3EDEE612B3}"/>
               </a:ext>
             </a:extLst>
           </p:cNvPr>
@@ -3656,7 +3656,7 @@
           <p:cNvPr id="9" name="">
             <a:extLst xmlns:a="http://schemas.openxmlformats.org/drawingml/2006/main">
               <a:ext uri="{FF2B5EF4-FFF2-40B4-BE49-F238E27FC236}">
-                <a16:creationId xmlns:a16="http://schemas.microsoft.com/office/drawing/2014/main" id="{79F8F21C-667B-4B51-A35C-E8B37C17B16E}"/>
+                <a16:creationId xmlns:a16="http://schemas.microsoft.com/office/drawing/2014/main" id="{EC5EECDC-A9A7-4456-B592-9E32C24982DC}"/>
               </a:ext>
             </a:extLst>
           </p:cNvPr>
@@ -3724,7 +3724,7 @@
           <p:cNvPr id="10" name="">
             <a:extLst xmlns:a="http://schemas.openxmlformats.org/drawingml/2006/main">
               <a:ext uri="{FF2B5EF4-FFF2-40B4-BE49-F238E27FC236}">
-                <a16:creationId xmlns:a16="http://schemas.microsoft.com/office/drawing/2014/main" id="{FD283B51-607D-4902-9E6F-AAC7DBC5CCF2}"/>
+                <a16:creationId xmlns:a16="http://schemas.microsoft.com/office/drawing/2014/main" id="{10D06E0A-E0E3-4397-8A5A-4E4263B4DF03}"/>
               </a:ext>
             </a:extLst>
           </p:cNvPr>
@@ -3792,7 +3792,7 @@
           <p:cNvPr id="11" name="">
             <a:extLst xmlns:a="http://schemas.openxmlformats.org/drawingml/2006/main">
               <a:ext uri="{FF2B5EF4-FFF2-40B4-BE49-F238E27FC236}">
-                <a16:creationId xmlns:a16="http://schemas.microsoft.com/office/drawing/2014/main" id="{87329553-DEC9-432F-B0F3-ECD535727139}"/>
+                <a16:creationId xmlns:a16="http://schemas.microsoft.com/office/drawing/2014/main" id="{3ED0A7E3-FD00-4194-B1E9-8617580106AE}"/>
               </a:ext>
             </a:extLst>
           </p:cNvPr>
@@ -3858,7 +3858,7 @@
     </p:spTree>
     <p:extLst>
       <p:ext uri="{BB962C8B-B14F-4D97-AF65-F5344CB8AC3E}">
-        <p14:creationId xmlns:p14="http://schemas.microsoft.com/office/powerpoint/2010/main" val="1498309100"/>
+        <p14:creationId xmlns:p14="http://schemas.microsoft.com/office/powerpoint/2010/main" val="77860732"/>
       </p:ext>
     </p:extLst>
   </p:cSld>
@@ -3889,7 +3889,7 @@
           <p:cNvPr id="8" name="">
             <a:extLst xmlns:a="http://schemas.openxmlformats.org/drawingml/2006/main">
               <a:ext uri="{FF2B5EF4-FFF2-40B4-BE49-F238E27FC236}">
-                <a16:creationId xmlns:a16="http://schemas.microsoft.com/office/drawing/2014/main" id="{D98A7E68-ABB5-420B-ADAE-ACB761194C7D}"/>
+                <a16:creationId xmlns:a16="http://schemas.microsoft.com/office/drawing/2014/main" id="{DB91A58E-AC39-49FC-BBFD-9CAFE1D2C6AF}"/>
               </a:ext>
             </a:extLst>
           </p:cNvPr>
@@ -3947,7 +3947,7 @@
                 <a:ea typeface="Arial"/>
                 <a:cs typeface="Arial"/>
               </a:rPr>
-              <a:t>55–70 MIN · PROVAT</a:t>
+              <a:t>50–60 MIN · PROVAT</a:t>
             </a:r>
           </a:p>
         </p:txBody>
@@ -3957,7 +3957,7 @@
           <p:cNvPr id="2" name="">
             <a:extLst xmlns:a="http://schemas.openxmlformats.org/drawingml/2006/main">
               <a:ext uri="{FF2B5EF4-FFF2-40B4-BE49-F238E27FC236}">
-                <a16:creationId xmlns:a16="http://schemas.microsoft.com/office/drawing/2014/main" id="{96201A4F-08CB-40DD-A6F8-9489F2467ABE}"/>
+                <a16:creationId xmlns:a16="http://schemas.microsoft.com/office/drawing/2014/main" id="{F7F52031-0944-4E01-BD69-272771C96981}"/>
               </a:ext>
             </a:extLst>
           </p:cNvPr>
@@ -4025,7 +4025,7 @@
           <p:cNvPr id="3" name="">
             <a:extLst xmlns:a="http://schemas.openxmlformats.org/drawingml/2006/main">
               <a:ext uri="{FF2B5EF4-FFF2-40B4-BE49-F238E27FC236}">
-                <a16:creationId xmlns:a16="http://schemas.microsoft.com/office/drawing/2014/main" id="{E505B000-1839-41DD-ACE6-C484545218EF}"/>
+                <a16:creationId xmlns:a16="http://schemas.microsoft.com/office/drawing/2014/main" id="{1CDCCD6B-2A0D-45A5-B326-5C4095342632}"/>
               </a:ext>
             </a:extLst>
           </p:cNvPr>
@@ -4093,7 +4093,7 @@
           <p:cNvPr id="4" name="">
             <a:extLst xmlns:a="http://schemas.openxmlformats.org/drawingml/2006/main">
               <a:ext uri="{FF2B5EF4-FFF2-40B4-BE49-F238E27FC236}">
-                <a16:creationId xmlns:a16="http://schemas.microsoft.com/office/drawing/2014/main" id="{1CA45031-12B0-419B-B221-F82FE2AFCC73}"/>
+                <a16:creationId xmlns:a16="http://schemas.microsoft.com/office/drawing/2014/main" id="{1476FA92-DE2F-4237-9BC6-6470AD1886CA}"/>
               </a:ext>
             </a:extLst>
           </p:cNvPr>
@@ -4207,7 +4207,7 @@
                 <a:ea typeface="Arial"/>
                 <a:cs typeface="Arial"/>
               </a:rPr>
-              <a:t>Provo edhe formularin e hapur para heqjes së rolit ose para daljes.</a:t>
+              <a:t>Shëno refuzimin në raport. Sfidat me heqje roli/formular të vjetër janë pas dorëzimit.</a:t>
             </a:r>
           </a:p>
         </p:txBody>
@@ -4217,7 +4217,7 @@
           <p:cNvPr id="5" name="">
             <a:extLst xmlns:a="http://schemas.openxmlformats.org/drawingml/2006/main">
               <a:ext uri="{FF2B5EF4-FFF2-40B4-BE49-F238E27FC236}">
-                <a16:creationId xmlns:a16="http://schemas.microsoft.com/office/drawing/2014/main" id="{2401226D-1B70-459C-AD8C-F507153F1EB3}"/>
+                <a16:creationId xmlns:a16="http://schemas.microsoft.com/office/drawing/2014/main" id="{4353D6DA-F862-4AC7-AF34-1F3129244259}"/>
               </a:ext>
             </a:extLst>
           </p:cNvPr>
@@ -4275,7 +4275,7 @@
                 <a:ea typeface="Arial"/>
                 <a:cs typeface="Arial"/>
               </a:rPr>
-              <a:t>Pse serveri duhet ta kontrollojë sërish edhe formularin e vjetër?</a:t>
+              <a:t>Pse refuzohet ID 1 edhe nëse e ndryshojmë formularin?</a:t>
             </a:r>
           </a:p>
         </p:txBody>
@@ -4285,7 +4285,7 @@
           <p:cNvPr id="6" name="">
             <a:extLst xmlns:a="http://schemas.openxmlformats.org/drawingml/2006/main">
               <a:ext uri="{FF2B5EF4-FFF2-40B4-BE49-F238E27FC236}">
-                <a16:creationId xmlns:a16="http://schemas.microsoft.com/office/drawing/2014/main" id="{E325513E-7D6C-414F-836C-0E342CD3D1F3}"/>
+                <a16:creationId xmlns:a16="http://schemas.microsoft.com/office/drawing/2014/main" id="{DC7242D4-45A2-46F9-B775-E69419A1997A}"/>
               </a:ext>
             </a:extLst>
           </p:cNvPr>
@@ -4343,7 +4343,7 @@
                 <a:ea typeface="Arial"/>
                 <a:cs typeface="Arial"/>
               </a:rPr>
-              <a:t>Përgjigjja: Edhe formulari i vjetër kalon në server. Sesioni, roli dhe pronari kontrollohen sërish.</a:t>
+              <a:t>Përgjigjja: Serveri lexon identitetin dhe pronarin nga të dhënat e verifikuara. ID 1 nuk i përket këtij shoferi, prandaj ora mbetet 08:00.</a:t>
             </a:r>
           </a:p>
         </p:txBody>
@@ -4353,7 +4353,7 @@
           <p:cNvPr id="7" name="">
             <a:extLst xmlns:a="http://schemas.openxmlformats.org/drawingml/2006/main">
               <a:ext uri="{FF2B5EF4-FFF2-40B4-BE49-F238E27FC236}">
-                <a16:creationId xmlns:a16="http://schemas.microsoft.com/office/drawing/2014/main" id="{DCFB11AB-AFE4-49BB-BCD0-DE5AE4EBD613}"/>
+                <a16:creationId xmlns:a16="http://schemas.microsoft.com/office/drawing/2014/main" id="{60944171-5CD5-4ABA-B35E-D4881ED92B2C}"/>
               </a:ext>
             </a:extLst>
           </p:cNvPr>
@@ -4419,7 +4419,7 @@
     </p:spTree>
     <p:extLst>
       <p:ext uri="{BB962C8B-B14F-4D97-AF65-F5344CB8AC3E}">
-        <p14:creationId xmlns:p14="http://schemas.microsoft.com/office/powerpoint/2010/main" val="597046566"/>
+        <p14:creationId xmlns:p14="http://schemas.microsoft.com/office/powerpoint/2010/main" val="1867935725"/>
       </p:ext>
     </p:extLst>
   </p:cSld>
@@ -4450,7 +4450,7 @@
           <p:cNvPr id="6" name="">
             <a:extLst xmlns:a="http://schemas.openxmlformats.org/drawingml/2006/main">
               <a:ext uri="{FF2B5EF4-FFF2-40B4-BE49-F238E27FC236}">
-                <a16:creationId xmlns:a16="http://schemas.microsoft.com/office/drawing/2014/main" id="{BACF3F09-159F-4FA2-8B67-0C98E3972B32}"/>
+                <a16:creationId xmlns:a16="http://schemas.microsoft.com/office/drawing/2014/main" id="{A7157092-F887-426F-B7CE-659F9689946C}"/>
               </a:ext>
             </a:extLst>
           </p:cNvPr>
@@ -4508,7 +4508,7 @@
                 <a:ea typeface="Arial"/>
                 <a:cs typeface="Arial"/>
               </a:rPr>
-              <a:t>70–90 MIN</a:t>
+              <a:t>65–90 MIN</a:t>
             </a:r>
           </a:p>
         </p:txBody>
@@ -4518,7 +4518,7 @@
           <p:cNvPr id="2" name="">
             <a:extLst xmlns:a="http://schemas.openxmlformats.org/drawingml/2006/main">
               <a:ext uri="{FF2B5EF4-FFF2-40B4-BE49-F238E27FC236}">
-                <a16:creationId xmlns:a16="http://schemas.microsoft.com/office/drawing/2014/main" id="{AB197A31-D3FD-49DC-B92A-083BB9A3ECB3}"/>
+                <a16:creationId xmlns:a16="http://schemas.microsoft.com/office/drawing/2014/main" id="{4B1EB9A8-0B04-4A44-B9FF-A4E2DAF697E0}"/>
               </a:ext>
             </a:extLst>
           </p:cNvPr>
@@ -4586,7 +4586,7 @@
           <p:cNvPr id="3" name="">
             <a:extLst xmlns:a="http://schemas.openxmlformats.org/drawingml/2006/main">
               <a:ext uri="{FF2B5EF4-FFF2-40B4-BE49-F238E27FC236}">
-                <a16:creationId xmlns:a16="http://schemas.microsoft.com/office/drawing/2014/main" id="{85DB3FB7-3951-484E-8328-B46DD509AAA8}"/>
+                <a16:creationId xmlns:a16="http://schemas.microsoft.com/office/drawing/2014/main" id="{58B7EA23-F813-48E8-A005-C1275A074A35}"/>
               </a:ext>
             </a:extLst>
           </p:cNvPr>
@@ -4654,7 +4654,7 @@
           <p:cNvPr id="4" name="">
             <a:extLst xmlns:a="http://schemas.openxmlformats.org/drawingml/2006/main">
               <a:ext uri="{FF2B5EF4-FFF2-40B4-BE49-F238E27FC236}">
-                <a16:creationId xmlns:a16="http://schemas.microsoft.com/office/drawing/2014/main" id="{6D42AA4D-2081-4C0F-9FFB-98C810B2093B}"/>
+                <a16:creationId xmlns:a16="http://schemas.microsoft.com/office/drawing/2014/main" id="{977BEC51-AF1D-4F30-99AF-F7534F34D999}"/>
               </a:ext>
             </a:extLst>
           </p:cNvPr>
@@ -4712,7 +4712,7 @@
                 <a:ea typeface="Arial"/>
                 <a:cs typeface="Arial"/>
               </a:rPr>
-              <a:t>GitHub Desktop → Commit → Push origin. .env.local nuk shfaqet te ndryshimet.</a:t>
+              <a:t>60–65: plotëso java-05.md, pastaj Commit → Push origin.</a:t>
             </a:r>
           </a:p>
           <a:p xmlns:a="http://schemas.openxmlformats.org/drawingml/2006/main">
@@ -4740,7 +4740,7 @@
                 <a:ea typeface="Arial"/>
                 <a:cs typeface="Arial"/>
               </a:rPr>
-              <a:t>Dorëzo Java 5 me linkun e të njëjtit repository publik.</a:t>
+              <a:t>65–70: dorëzo Java 5; mbaje Issue-në hapur për komentin e GitHub.</a:t>
             </a:r>
           </a:p>
           <a:p xmlns:a="http://schemas.openxmlformats.org/drawingml/2006/main">
@@ -4768,7 +4768,7 @@
                 <a:ea typeface="Arial"/>
                 <a:cs typeface="Arial"/>
               </a:rPr>
-              <a:t>Lexo 5 kontrollet teknike. Pas korrigjimit komento rikontrollo te i njëjti Issue.</a:t>
+              <a:t>70–90: lexo 5 kontrollet. Korrigjo → Commit → Push → komento rikontrollo te e njëjta Issue.</a:t>
             </a:r>
           </a:p>
         </p:txBody>
@@ -4778,7 +4778,7 @@
           <p:cNvPr id="5" name="">
             <a:extLst xmlns:a="http://schemas.openxmlformats.org/drawingml/2006/main">
               <a:ext uri="{FF2B5EF4-FFF2-40B4-BE49-F238E27FC236}">
-                <a16:creationId xmlns:a16="http://schemas.microsoft.com/office/drawing/2014/main" id="{8F7870A6-AF12-44DC-9282-968BFAB80E8C}"/>
+                <a16:creationId xmlns:a16="http://schemas.microsoft.com/office/drawing/2014/main" id="{4DD90EBF-AFE4-4453-8593-D1B36B9E7963}"/>
               </a:ext>
             </a:extLst>
           </p:cNvPr>
@@ -4844,7 +4844,7 @@
     </p:spTree>
     <p:extLst>
       <p:ext uri="{BB962C8B-B14F-4D97-AF65-F5344CB8AC3E}">
-        <p14:creationId xmlns:p14="http://schemas.microsoft.com/office/powerpoint/2010/main" val="1527759682"/>
+        <p14:creationId xmlns:p14="http://schemas.microsoft.com/office/powerpoint/2010/main" val="449578722"/>
       </p:ext>
     </p:extLst>
   </p:cSld>
@@ -4875,7 +4875,7 @@
           <p:cNvPr id="5" name="">
             <a:extLst xmlns:a="http://schemas.openxmlformats.org/drawingml/2006/main">
               <a:ext uri="{FF2B5EF4-FFF2-40B4-BE49-F238E27FC236}">
-                <a16:creationId xmlns:a16="http://schemas.microsoft.com/office/drawing/2014/main" id="{55AF5203-A38B-4091-9F29-447E3B79A00C}"/>
+                <a16:creationId xmlns:a16="http://schemas.microsoft.com/office/drawing/2014/main" id="{E2D3DB50-F3FF-430C-8996-243435C868F3}"/>
               </a:ext>
             </a:extLst>
           </p:cNvPr>
@@ -4943,7 +4943,7 @@
           <p:cNvPr id="2" name="">
             <a:extLst xmlns:a="http://schemas.openxmlformats.org/drawingml/2006/main">
               <a:ext uri="{FF2B5EF4-FFF2-40B4-BE49-F238E27FC236}">
-                <a16:creationId xmlns:a16="http://schemas.microsoft.com/office/drawing/2014/main" id="{9C610351-03A3-4A3A-A73C-49E4300F7FE1}"/>
+                <a16:creationId xmlns:a16="http://schemas.microsoft.com/office/drawing/2014/main" id="{F8239F6D-9C92-4D88-AE62-A9CB09E05168}"/>
               </a:ext>
             </a:extLst>
           </p:cNvPr>
@@ -5011,7 +5011,7 @@
           <p:cNvPr id="3" name="">
             <a:extLst xmlns:a="http://schemas.openxmlformats.org/drawingml/2006/main">
               <a:ext uri="{FF2B5EF4-FFF2-40B4-BE49-F238E27FC236}">
-                <a16:creationId xmlns:a16="http://schemas.microsoft.com/office/drawing/2014/main" id="{67E2EA0B-7A8D-45A8-A8C1-3A81AC891E88}"/>
+                <a16:creationId xmlns:a16="http://schemas.microsoft.com/office/drawing/2014/main" id="{63A5940B-BD3C-4188-B568-84CD310698E5}"/>
               </a:ext>
             </a:extLst>
           </p:cNvPr>
@@ -5079,7 +5079,7 @@
           <p:cNvPr id="4" name="">
             <a:extLst xmlns:a="http://schemas.openxmlformats.org/drawingml/2006/main">
               <a:ext uri="{FF2B5EF4-FFF2-40B4-BE49-F238E27FC236}">
-                <a16:creationId xmlns:a16="http://schemas.microsoft.com/office/drawing/2014/main" id="{9AEB98A7-DC6E-4429-98E2-2762F0E193AA}"/>
+                <a16:creationId xmlns:a16="http://schemas.microsoft.com/office/drawing/2014/main" id="{7D7EA747-1F4C-468D-8DA5-932DEF56C470}"/>
               </a:ext>
             </a:extLst>
           </p:cNvPr>
@@ -5201,7 +5201,7 @@
     </p:spTree>
     <p:extLst>
       <p:ext uri="{BB962C8B-B14F-4D97-AF65-F5344CB8AC3E}">
-        <p14:creationId xmlns:p14="http://schemas.microsoft.com/office/powerpoint/2010/main" val="1344983120"/>
+        <p14:creationId xmlns:p14="http://schemas.microsoft.com/office/powerpoint/2010/main" val="2000034308"/>
       </p:ext>
     </p:extLst>
   </p:cSld>
@@ -5232,7 +5232,7 @@
           <p:cNvPr id="6" name="">
             <a:extLst xmlns:a="http://schemas.openxmlformats.org/drawingml/2006/main">
               <a:ext uri="{FF2B5EF4-FFF2-40B4-BE49-F238E27FC236}">
-                <a16:creationId xmlns:a16="http://schemas.microsoft.com/office/drawing/2014/main" id="{FE693EB4-F3F5-4921-B795-B16503D28317}"/>
+                <a16:creationId xmlns:a16="http://schemas.microsoft.com/office/drawing/2014/main" id="{F4A6FDC5-5D1E-456A-AA2F-A817A9DF91ED}"/>
               </a:ext>
             </a:extLst>
           </p:cNvPr>
@@ -5290,7 +5290,7 @@
                 <a:ea typeface="Arial"/>
                 <a:cs typeface="Arial"/>
               </a:rPr>
-              <a:t>0–10 MIN</a:t>
+              <a:t>0–8 MIN</a:t>
             </a:r>
           </a:p>
         </p:txBody>
@@ -5300,7 +5300,7 @@
           <p:cNvPr id="2" name="">
             <a:extLst xmlns:a="http://schemas.openxmlformats.org/drawingml/2006/main">
               <a:ext uri="{FF2B5EF4-FFF2-40B4-BE49-F238E27FC236}">
-                <a16:creationId xmlns:a16="http://schemas.microsoft.com/office/drawing/2014/main" id="{5F0EC4F4-0141-4821-AE8F-40912684439C}"/>
+                <a16:creationId xmlns:a16="http://schemas.microsoft.com/office/drawing/2014/main" id="{B1C84469-1260-4701-A7E4-CB059C0FAE4F}"/>
               </a:ext>
             </a:extLst>
           </p:cNvPr>
@@ -5368,7 +5368,7 @@
           <p:cNvPr id="3" name="">
             <a:extLst xmlns:a="http://schemas.openxmlformats.org/drawingml/2006/main">
               <a:ext uri="{FF2B5EF4-FFF2-40B4-BE49-F238E27FC236}">
-                <a16:creationId xmlns:a16="http://schemas.microsoft.com/office/drawing/2014/main" id="{B9AEA9E5-64CD-4EF4-BE23-ED6D24AB62A0}"/>
+                <a16:creationId xmlns:a16="http://schemas.microsoft.com/office/drawing/2014/main" id="{55120409-02C7-443E-9F2C-663C6FAEE3E5}"/>
               </a:ext>
             </a:extLst>
           </p:cNvPr>
@@ -5436,7 +5436,7 @@
           <p:cNvPr id="4" name="">
             <a:extLst xmlns:a="http://schemas.openxmlformats.org/drawingml/2006/main">
               <a:ext uri="{FF2B5EF4-FFF2-40B4-BE49-F238E27FC236}">
-                <a16:creationId xmlns:a16="http://schemas.microsoft.com/office/drawing/2014/main" id="{D22701C1-F351-4F43-A594-31D65DC25921}"/>
+                <a16:creationId xmlns:a16="http://schemas.microsoft.com/office/drawing/2014/main" id="{9AEF260E-902E-4A6F-B17F-79154B4D8F92}"/>
               </a:ext>
             </a:extLst>
           </p:cNvPr>
@@ -5560,7 +5560,7 @@
           <p:cNvPr id="5" name="">
             <a:extLst xmlns:a="http://schemas.openxmlformats.org/drawingml/2006/main">
               <a:ext uri="{FF2B5EF4-FFF2-40B4-BE49-F238E27FC236}">
-                <a16:creationId xmlns:a16="http://schemas.microsoft.com/office/drawing/2014/main" id="{7DC255CA-9C3D-41A0-9164-DEF510FBBB59}"/>
+                <a16:creationId xmlns:a16="http://schemas.microsoft.com/office/drawing/2014/main" id="{9B874AA3-CB71-479A-899E-0F5024894744}"/>
               </a:ext>
             </a:extLst>
           </p:cNvPr>
@@ -5682,7 +5682,7 @@
     </p:spTree>
     <p:extLst>
       <p:ext uri="{BB962C8B-B14F-4D97-AF65-F5344CB8AC3E}">
-        <p14:creationId xmlns:p14="http://schemas.microsoft.com/office/powerpoint/2010/main" val="1031085638"/>
+        <p14:creationId xmlns:p14="http://schemas.microsoft.com/office/powerpoint/2010/main" val="1550689980"/>
       </p:ext>
     </p:extLst>
   </p:cSld>
@@ -5713,7 +5713,7 @@
           <p:cNvPr id="6" name="">
             <a:extLst xmlns:a="http://schemas.openxmlformats.org/drawingml/2006/main">
               <a:ext uri="{FF2B5EF4-FFF2-40B4-BE49-F238E27FC236}">
-                <a16:creationId xmlns:a16="http://schemas.microsoft.com/office/drawing/2014/main" id="{B089D998-60AA-418E-A6E8-78D52E4F5270}"/>
+                <a16:creationId xmlns:a16="http://schemas.microsoft.com/office/drawing/2014/main" id="{ABFFB97D-1A2E-42A2-B01F-6A0D15901E8C}"/>
               </a:ext>
             </a:extLst>
           </p:cNvPr>
@@ -5781,7 +5781,7 @@
           <p:cNvPr id="2" name="">
             <a:extLst xmlns:a="http://schemas.openxmlformats.org/drawingml/2006/main">
               <a:ext uri="{FF2B5EF4-FFF2-40B4-BE49-F238E27FC236}">
-                <a16:creationId xmlns:a16="http://schemas.microsoft.com/office/drawing/2014/main" id="{EE43CD95-1449-4BD9-8D26-09891FF54BBB}"/>
+                <a16:creationId xmlns:a16="http://schemas.microsoft.com/office/drawing/2014/main" id="{701CAE55-337F-4346-A25A-6249BB44E4B2}"/>
               </a:ext>
             </a:extLst>
           </p:cNvPr>
@@ -5849,7 +5849,7 @@
           <p:cNvPr id="3" name="">
             <a:extLst xmlns:a="http://schemas.openxmlformats.org/drawingml/2006/main">
               <a:ext uri="{FF2B5EF4-FFF2-40B4-BE49-F238E27FC236}">
-                <a16:creationId xmlns:a16="http://schemas.microsoft.com/office/drawing/2014/main" id="{8118BD41-131E-4B3C-878F-1632A444C22F}"/>
+                <a16:creationId xmlns:a16="http://schemas.microsoft.com/office/drawing/2014/main" id="{ABC31ADB-D1E5-4EA1-9CF3-26F129F5A7C5}"/>
               </a:ext>
             </a:extLst>
           </p:cNvPr>
@@ -5917,7 +5917,7 @@
           <p:cNvPr id="4" name="">
             <a:extLst xmlns:a="http://schemas.openxmlformats.org/drawingml/2006/main">
               <a:ext uri="{FF2B5EF4-FFF2-40B4-BE49-F238E27FC236}">
-                <a16:creationId xmlns:a16="http://schemas.microsoft.com/office/drawing/2014/main" id="{4651F743-14C7-4460-A810-B679F8775250}"/>
+                <a16:creationId xmlns:a16="http://schemas.microsoft.com/office/drawing/2014/main" id="{2168C396-0B20-4862-9937-5B00AFC60770}"/>
               </a:ext>
             </a:extLst>
           </p:cNvPr>
@@ -5927,7 +5927,7 @@
           <p:nvPr/>
         </p:nvPicPr>
         <p:blipFill>
-          <a:blip xmlns:r="http://schemas.openxmlformats.org/officeDocument/2006/relationships" xmlns:a="http://schemas.openxmlformats.org/drawingml/2006/main" r:embed="R1044a7571956446b"/>
+          <a:blip xmlns:r="http://schemas.openxmlformats.org/officeDocument/2006/relationships" xmlns:a="http://schemas.openxmlformats.org/drawingml/2006/main" r:embed="R9d23f08320094bb8"/>
           <a:stretch xmlns:a="http://schemas.openxmlformats.org/drawingml/2006/main"/>
         </p:blipFill>
         <p:spPr>
@@ -5945,7 +5945,7 @@
           <p:cNvPr id="5" name="">
             <a:extLst xmlns:a="http://schemas.openxmlformats.org/drawingml/2006/main">
               <a:ext uri="{FF2B5EF4-FFF2-40B4-BE49-F238E27FC236}">
-                <a16:creationId xmlns:a16="http://schemas.microsoft.com/office/drawing/2014/main" id="{A5C5B0A6-49FC-4C4F-8BF2-FC91F8C04AD6}"/>
+                <a16:creationId xmlns:a16="http://schemas.microsoft.com/office/drawing/2014/main" id="{23983AFB-06E4-4CAA-9D0B-B1AFD92A6686}"/>
               </a:ext>
             </a:extLst>
           </p:cNvPr>
@@ -6039,7 +6039,7 @@
     </p:spTree>
     <p:extLst>
       <p:ext uri="{BB962C8B-B14F-4D97-AF65-F5344CB8AC3E}">
-        <p14:creationId xmlns:p14="http://schemas.microsoft.com/office/powerpoint/2010/main" val="2053387850"/>
+        <p14:creationId xmlns:p14="http://schemas.microsoft.com/office/powerpoint/2010/main" val="1618874328"/>
       </p:ext>
     </p:extLst>
   </p:cSld>
@@ -6070,7 +6070,7 @@
           <p:cNvPr id="12" name="">
             <a:extLst xmlns:a="http://schemas.openxmlformats.org/drawingml/2006/main">
               <a:ext uri="{FF2B5EF4-FFF2-40B4-BE49-F238E27FC236}">
-                <a16:creationId xmlns:a16="http://schemas.microsoft.com/office/drawing/2014/main" id="{35F72E11-ED0B-4B61-BB10-1ACC7F9FDEB0}"/>
+                <a16:creationId xmlns:a16="http://schemas.microsoft.com/office/drawing/2014/main" id="{90982D68-8A1A-4AC1-898E-63413FE277CB}"/>
               </a:ext>
             </a:extLst>
           </p:cNvPr>
@@ -6138,7 +6138,7 @@
           <p:cNvPr id="2" name="">
             <a:extLst xmlns:a="http://schemas.openxmlformats.org/drawingml/2006/main">
               <a:ext uri="{FF2B5EF4-FFF2-40B4-BE49-F238E27FC236}">
-                <a16:creationId xmlns:a16="http://schemas.microsoft.com/office/drawing/2014/main" id="{63348F9D-1BB7-4266-98C5-6156F6FB8593}"/>
+                <a16:creationId xmlns:a16="http://schemas.microsoft.com/office/drawing/2014/main" id="{5E3C86C0-2F6D-4B3B-AB53-96F4BDD0E94F}"/>
               </a:ext>
             </a:extLst>
           </p:cNvPr>
@@ -6206,7 +6206,7 @@
           <p:cNvPr id="3" name="">
             <a:extLst xmlns:a="http://schemas.openxmlformats.org/drawingml/2006/main">
               <a:ext uri="{FF2B5EF4-FFF2-40B4-BE49-F238E27FC236}">
-                <a16:creationId xmlns:a16="http://schemas.microsoft.com/office/drawing/2014/main" id="{DCC12AAD-C033-4F2F-B6DF-F8253EC81C4F}"/>
+                <a16:creationId xmlns:a16="http://schemas.microsoft.com/office/drawing/2014/main" id="{06F264B2-A6AB-41C5-B159-DE76359A251D}"/>
               </a:ext>
             </a:extLst>
           </p:cNvPr>
@@ -6274,7 +6274,7 @@
           <p:cNvPr id="4" name="">
             <a:extLst xmlns:a="http://schemas.openxmlformats.org/drawingml/2006/main">
               <a:ext uri="{FF2B5EF4-FFF2-40B4-BE49-F238E27FC236}">
-                <a16:creationId xmlns:a16="http://schemas.microsoft.com/office/drawing/2014/main" id="{9B84B66A-5B6D-4C35-9D3C-26D62C7E22D3}"/>
+                <a16:creationId xmlns:a16="http://schemas.microsoft.com/office/drawing/2014/main" id="{E3C29F4F-EA59-4CBD-8CF2-B3A83DA05DA5}"/>
               </a:ext>
             </a:extLst>
           </p:cNvPr>
@@ -6332,7 +6332,7 @@
                 <a:ea typeface="Arial"/>
                 <a:cs typeface="Arial"/>
               </a:rPr>
-              <a:t>0–10: kontrolli. 10–25: OAuth App dhe variablat lokale.</a:t>
+              <a:t>0–8: kontrolli. 8–20: OAuth App dhe variablat lokale.</a:t>
             </a:r>
           </a:p>
           <a:p xmlns:a="http://schemas.openxmlformats.org/drawingml/2006/main">
@@ -6360,7 +6360,7 @@
                 <a:ea typeface="Arial"/>
                 <a:cs typeface="Arial"/>
               </a:rPr>
-              <a:t>25–45: SQL dhe kodi. 45–55: hyrja dhe caktimi i rolit.</a:t>
+              <a:t>20–40: SQL dhe kodi. 40–50: hyrja dhe pronari.</a:t>
             </a:r>
           </a:p>
           <a:p xmlns:a="http://schemas.openxmlformats.org/drawingml/2006/main">
@@ -6388,7 +6388,7 @@
                 <a:ea typeface="Arial"/>
                 <a:cs typeface="Arial"/>
               </a:rPr>
-              <a:t>55–70: provat + Push. 70–90: dorëzim dhe përgjigjja.</a:t>
+              <a:t>50–60: tri prova. 60–65: raporti + Push. 65–90: dorëzim, përgjigjja dhe korrigjimet.</a:t>
             </a:r>
           </a:p>
         </p:txBody>
@@ -6398,7 +6398,7 @@
           <p:cNvPr id="5" name="">
             <a:extLst xmlns:a="http://schemas.openxmlformats.org/drawingml/2006/main">
               <a:ext uri="{FF2B5EF4-FFF2-40B4-BE49-F238E27FC236}">
-                <a16:creationId xmlns:a16="http://schemas.microsoft.com/office/drawing/2014/main" id="{8D197FF6-F655-4AC2-A264-EA60E4A7EA4F}"/>
+                <a16:creationId xmlns:a16="http://schemas.microsoft.com/office/drawing/2014/main" id="{7F921F78-7EEE-4DC9-B48E-C2CF61C878B4}"/>
               </a:ext>
             </a:extLst>
           </p:cNvPr>
@@ -6466,7 +6466,7 @@
           <p:cNvPr id="6" name="">
             <a:extLst xmlns:a="http://schemas.openxmlformats.org/drawingml/2006/main">
               <a:ext uri="{FF2B5EF4-FFF2-40B4-BE49-F238E27FC236}">
-                <a16:creationId xmlns:a16="http://schemas.microsoft.com/office/drawing/2014/main" id="{A9484AC4-F56B-4F60-B50E-294D968F9B56}"/>
+                <a16:creationId xmlns:a16="http://schemas.microsoft.com/office/drawing/2014/main" id="{13813D84-E450-41F1-A09B-8C76E37D0E96}"/>
               </a:ext>
             </a:extLst>
           </p:cNvPr>
@@ -6534,7 +6534,7 @@
           <p:cNvPr id="7" name="">
             <a:extLst xmlns:a="http://schemas.openxmlformats.org/drawingml/2006/main">
               <a:ext uri="{FF2B5EF4-FFF2-40B4-BE49-F238E27FC236}">
-                <a16:creationId xmlns:a16="http://schemas.microsoft.com/office/drawing/2014/main" id="{FFF1E302-3F3F-4463-9CD5-2CC9A0E06531}"/>
+                <a16:creationId xmlns:a16="http://schemas.microsoft.com/office/drawing/2014/main" id="{1045B4D2-4E25-4DE8-ADEC-9A724CDAE092}"/>
               </a:ext>
             </a:extLst>
           </p:cNvPr>
@@ -6602,7 +6602,7 @@
           <p:cNvPr id="8" name="">
             <a:extLst xmlns:a="http://schemas.openxmlformats.org/drawingml/2006/main">
               <a:ext uri="{FF2B5EF4-FFF2-40B4-BE49-F238E27FC236}">
-                <a16:creationId xmlns:a16="http://schemas.microsoft.com/office/drawing/2014/main" id="{553444B8-73BB-42A7-BF62-BD7B43BA329A}"/>
+                <a16:creationId xmlns:a16="http://schemas.microsoft.com/office/drawing/2014/main" id="{DA40C26B-8323-409D-B6C1-C38D23826085}"/>
               </a:ext>
             </a:extLst>
           </p:cNvPr>
@@ -6670,7 +6670,7 @@
           <p:cNvPr id="9" name="">
             <a:extLst xmlns:a="http://schemas.openxmlformats.org/drawingml/2006/main">
               <a:ext uri="{FF2B5EF4-FFF2-40B4-BE49-F238E27FC236}">
-                <a16:creationId xmlns:a16="http://schemas.microsoft.com/office/drawing/2014/main" id="{18D04CAD-1756-406C-9A65-0E966F16D963}"/>
+                <a16:creationId xmlns:a16="http://schemas.microsoft.com/office/drawing/2014/main" id="{42666C36-7971-491F-AE56-2ABAB9131550}"/>
               </a:ext>
             </a:extLst>
           </p:cNvPr>
@@ -6738,7 +6738,7 @@
           <p:cNvPr id="10" name="">
             <a:extLst xmlns:a="http://schemas.openxmlformats.org/drawingml/2006/main">
               <a:ext uri="{FF2B5EF4-FFF2-40B4-BE49-F238E27FC236}">
-                <a16:creationId xmlns:a16="http://schemas.microsoft.com/office/drawing/2014/main" id="{F049F9BE-6B5E-4B1E-9521-A31136697D64}"/>
+                <a16:creationId xmlns:a16="http://schemas.microsoft.com/office/drawing/2014/main" id="{C65DCDF5-7CF9-4B42-B9F9-7234A5AAB30D}"/>
               </a:ext>
             </a:extLst>
           </p:cNvPr>
@@ -6806,7 +6806,7 @@
           <p:cNvPr id="11" name="">
             <a:extLst xmlns:a="http://schemas.openxmlformats.org/drawingml/2006/main">
               <a:ext uri="{FF2B5EF4-FFF2-40B4-BE49-F238E27FC236}">
-                <a16:creationId xmlns:a16="http://schemas.microsoft.com/office/drawing/2014/main" id="{F02E074E-8A8C-470D-AB85-5609F84A58C8}"/>
+                <a16:creationId xmlns:a16="http://schemas.microsoft.com/office/drawing/2014/main" id="{A3CD5154-A20B-497C-B186-13AAB184172B}"/>
               </a:ext>
             </a:extLst>
           </p:cNvPr>
@@ -6872,7 +6872,7 @@
     </p:spTree>
     <p:extLst>
       <p:ext uri="{BB962C8B-B14F-4D97-AF65-F5344CB8AC3E}">
-        <p14:creationId xmlns:p14="http://schemas.microsoft.com/office/powerpoint/2010/main" val="1576359989"/>
+        <p14:creationId xmlns:p14="http://schemas.microsoft.com/office/powerpoint/2010/main" val="1849732515"/>
       </p:ext>
     </p:extLst>
   </p:cSld>
@@ -6903,7 +6903,7 @@
           <p:cNvPr id="6" name="">
             <a:extLst xmlns:a="http://schemas.openxmlformats.org/drawingml/2006/main">
               <a:ext uri="{FF2B5EF4-FFF2-40B4-BE49-F238E27FC236}">
-                <a16:creationId xmlns:a16="http://schemas.microsoft.com/office/drawing/2014/main" id="{97AAF91E-295F-4742-B889-9E779A98D51D}"/>
+                <a16:creationId xmlns:a16="http://schemas.microsoft.com/office/drawing/2014/main" id="{BD6E50B4-FF31-44FD-95AE-B12E94F74F6E}"/>
               </a:ext>
             </a:extLst>
           </p:cNvPr>
@@ -6961,7 +6961,7 @@
                 <a:ea typeface="Arial"/>
                 <a:cs typeface="Arial"/>
               </a:rPr>
-              <a:t>10–25 MIN · KONFIGURIMI</a:t>
+              <a:t>8–20 MIN · KONFIGURIMI</a:t>
             </a:r>
           </a:p>
         </p:txBody>
@@ -6971,7 +6971,7 @@
           <p:cNvPr id="2" name="">
             <a:extLst xmlns:a="http://schemas.openxmlformats.org/drawingml/2006/main">
               <a:ext uri="{FF2B5EF4-FFF2-40B4-BE49-F238E27FC236}">
-                <a16:creationId xmlns:a16="http://schemas.microsoft.com/office/drawing/2014/main" id="{38080C2D-9C1D-46FE-BE9C-73C59092DF83}"/>
+                <a16:creationId xmlns:a16="http://schemas.microsoft.com/office/drawing/2014/main" id="{B51D01CD-9AD7-46A3-9D30-208B6B8F7334}"/>
               </a:ext>
             </a:extLst>
           </p:cNvPr>
@@ -7039,7 +7039,7 @@
           <p:cNvPr id="3" name="">
             <a:extLst xmlns:a="http://schemas.openxmlformats.org/drawingml/2006/main">
               <a:ext uri="{FF2B5EF4-FFF2-40B4-BE49-F238E27FC236}">
-                <a16:creationId xmlns:a16="http://schemas.microsoft.com/office/drawing/2014/main" id="{8BE92026-999D-432D-99C7-9F0B3DF3D888}"/>
+                <a16:creationId xmlns:a16="http://schemas.microsoft.com/office/drawing/2014/main" id="{F1DA7478-4BD9-4061-AFDF-AD85E17C10C9}"/>
               </a:ext>
             </a:extLst>
           </p:cNvPr>
@@ -7107,7 +7107,7 @@
           <p:cNvPr id="4" name="">
             <a:extLst xmlns:a="http://schemas.openxmlformats.org/drawingml/2006/main">
               <a:ext uri="{FF2B5EF4-FFF2-40B4-BE49-F238E27FC236}">
-                <a16:creationId xmlns:a16="http://schemas.microsoft.com/office/drawing/2014/main" id="{6FFA111D-E7F5-4B2D-BD24-836DEE6951D4}"/>
+                <a16:creationId xmlns:a16="http://schemas.microsoft.com/office/drawing/2014/main" id="{5415C03F-4B85-4117-AB1F-5209745086DC}"/>
               </a:ext>
             </a:extLst>
           </p:cNvPr>
@@ -7259,7 +7259,7 @@
           <p:cNvPr id="5" name="">
             <a:extLst xmlns:a="http://schemas.openxmlformats.org/drawingml/2006/main">
               <a:ext uri="{FF2B5EF4-FFF2-40B4-BE49-F238E27FC236}">
-                <a16:creationId xmlns:a16="http://schemas.microsoft.com/office/drawing/2014/main" id="{ADF84C29-D2EC-4E32-A29C-610955F60334}"/>
+                <a16:creationId xmlns:a16="http://schemas.microsoft.com/office/drawing/2014/main" id="{FB1B067F-829F-4AD5-BDF1-32A6AA8717BA}"/>
               </a:ext>
             </a:extLst>
           </p:cNvPr>
@@ -7325,7 +7325,7 @@
     </p:spTree>
     <p:extLst>
       <p:ext uri="{BB962C8B-B14F-4D97-AF65-F5344CB8AC3E}">
-        <p14:creationId xmlns:p14="http://schemas.microsoft.com/office/powerpoint/2010/main" val="807417135"/>
+        <p14:creationId xmlns:p14="http://schemas.microsoft.com/office/powerpoint/2010/main" val="1891366396"/>
       </p:ext>
     </p:extLst>
   </p:cSld>
@@ -7356,7 +7356,7 @@
           <p:cNvPr id="6" name="">
             <a:extLst xmlns:a="http://schemas.openxmlformats.org/drawingml/2006/main">
               <a:ext uri="{FF2B5EF4-FFF2-40B4-BE49-F238E27FC236}">
-                <a16:creationId xmlns:a16="http://schemas.microsoft.com/office/drawing/2014/main" id="{12B2E142-17A6-4C05-BB41-002D4AF52DB3}"/>
+                <a16:creationId xmlns:a16="http://schemas.microsoft.com/office/drawing/2014/main" id="{2851842A-27A0-4540-94FD-378712CACB95}"/>
               </a:ext>
             </a:extLst>
           </p:cNvPr>
@@ -7414,7 +7414,7 @@
                 <a:ea typeface="Arial"/>
                 <a:cs typeface="Arial"/>
               </a:rPr>
-              <a:t>BRENDA 10–25 MIN</a:t>
+              <a:t>BRENDA 8–20 MIN</a:t>
             </a:r>
           </a:p>
         </p:txBody>
@@ -7424,7 +7424,7 @@
           <p:cNvPr id="2" name="">
             <a:extLst xmlns:a="http://schemas.openxmlformats.org/drawingml/2006/main">
               <a:ext uri="{FF2B5EF4-FFF2-40B4-BE49-F238E27FC236}">
-                <a16:creationId xmlns:a16="http://schemas.microsoft.com/office/drawing/2014/main" id="{FA095E35-BA99-4903-A790-EF407A33EDDB}"/>
+                <a16:creationId xmlns:a16="http://schemas.microsoft.com/office/drawing/2014/main" id="{0B492D02-79CB-4236-BF0D-56A0DBA6B22C}"/>
               </a:ext>
             </a:extLst>
           </p:cNvPr>
@@ -7492,7 +7492,7 @@
           <p:cNvPr id="3" name="">
             <a:extLst xmlns:a="http://schemas.openxmlformats.org/drawingml/2006/main">
               <a:ext uri="{FF2B5EF4-FFF2-40B4-BE49-F238E27FC236}">
-                <a16:creationId xmlns:a16="http://schemas.microsoft.com/office/drawing/2014/main" id="{51D14C8F-C40F-4D82-B890-8952DA6E3D29}"/>
+                <a16:creationId xmlns:a16="http://schemas.microsoft.com/office/drawing/2014/main" id="{507D0288-5A2B-41CB-B198-FF87AC7356C2}"/>
               </a:ext>
             </a:extLst>
           </p:cNvPr>
@@ -7560,7 +7560,7 @@
           <p:cNvPr id="4" name="">
             <a:extLst xmlns:a="http://schemas.openxmlformats.org/drawingml/2006/main">
               <a:ext uri="{FF2B5EF4-FFF2-40B4-BE49-F238E27FC236}">
-                <a16:creationId xmlns:a16="http://schemas.microsoft.com/office/drawing/2014/main" id="{18E1DA8E-B517-4106-9517-F0211C885424}"/>
+                <a16:creationId xmlns:a16="http://schemas.microsoft.com/office/drawing/2014/main" id="{B30B58D4-7D68-453B-884A-28B6F69F485D}"/>
               </a:ext>
             </a:extLst>
           </p:cNvPr>
@@ -7684,7 +7684,7 @@
           <p:cNvPr id="5" name="">
             <a:extLst xmlns:a="http://schemas.openxmlformats.org/drawingml/2006/main">
               <a:ext uri="{FF2B5EF4-FFF2-40B4-BE49-F238E27FC236}">
-                <a16:creationId xmlns:a16="http://schemas.microsoft.com/office/drawing/2014/main" id="{547EFB9F-0870-4BF9-9E0E-A29ACE81B532}"/>
+                <a16:creationId xmlns:a16="http://schemas.microsoft.com/office/drawing/2014/main" id="{AB508B42-40A1-4812-A921-A7CAEB383B15}"/>
               </a:ext>
             </a:extLst>
           </p:cNvPr>
@@ -7750,7 +7750,7 @@
     </p:spTree>
     <p:extLst>
       <p:ext uri="{BB962C8B-B14F-4D97-AF65-F5344CB8AC3E}">
-        <p14:creationId xmlns:p14="http://schemas.microsoft.com/office/powerpoint/2010/main" val="1343199611"/>
+        <p14:creationId xmlns:p14="http://schemas.microsoft.com/office/powerpoint/2010/main" val="1920953816"/>
       </p:ext>
     </p:extLst>
   </p:cSld>
@@ -7781,7 +7781,7 @@
           <p:cNvPr id="6" name="">
             <a:extLst xmlns:a="http://schemas.openxmlformats.org/drawingml/2006/main">
               <a:ext uri="{FF2B5EF4-FFF2-40B4-BE49-F238E27FC236}">
-                <a16:creationId xmlns:a16="http://schemas.microsoft.com/office/drawing/2014/main" id="{4E92E36D-67B4-4902-8371-B563AA19A15F}"/>
+                <a16:creationId xmlns:a16="http://schemas.microsoft.com/office/drawing/2014/main" id="{E44D2C2E-CC55-4962-9BDC-99E5CE14ABF0}"/>
               </a:ext>
             </a:extLst>
           </p:cNvPr>
@@ -7839,7 +7839,7 @@
                 <a:ea typeface="Arial"/>
                 <a:cs typeface="Arial"/>
               </a:rPr>
-              <a:t>25–45 MIN</a:t>
+              <a:t>20–40 MIN</a:t>
             </a:r>
           </a:p>
         </p:txBody>
@@ -7849,7 +7849,7 @@
           <p:cNvPr id="2" name="">
             <a:extLst xmlns:a="http://schemas.openxmlformats.org/drawingml/2006/main">
               <a:ext uri="{FF2B5EF4-FFF2-40B4-BE49-F238E27FC236}">
-                <a16:creationId xmlns:a16="http://schemas.microsoft.com/office/drawing/2014/main" id="{EA69DA12-4DCD-4894-8267-D68368F4B974}"/>
+                <a16:creationId xmlns:a16="http://schemas.microsoft.com/office/drawing/2014/main" id="{898B9DD5-CC98-4A66-88C7-D5DBBB0659F6}"/>
               </a:ext>
             </a:extLst>
           </p:cNvPr>
@@ -7917,7 +7917,7 @@
           <p:cNvPr id="3" name="">
             <a:extLst xmlns:a="http://schemas.openxmlformats.org/drawingml/2006/main">
               <a:ext uri="{FF2B5EF4-FFF2-40B4-BE49-F238E27FC236}">
-                <a16:creationId xmlns:a16="http://schemas.microsoft.com/office/drawing/2014/main" id="{BA2C6184-6A82-4F8B-9B1F-521A5BAA7744}"/>
+                <a16:creationId xmlns:a16="http://schemas.microsoft.com/office/drawing/2014/main" id="{807AC9E4-4DA4-427E-983C-F8BB7FE81871}"/>
               </a:ext>
             </a:extLst>
           </p:cNvPr>
@@ -7985,7 +7985,7 @@
           <p:cNvPr id="4" name="">
             <a:extLst xmlns:a="http://schemas.openxmlformats.org/drawingml/2006/main">
               <a:ext uri="{FF2B5EF4-FFF2-40B4-BE49-F238E27FC236}">
-                <a16:creationId xmlns:a16="http://schemas.microsoft.com/office/drawing/2014/main" id="{2A25F01C-0379-4701-A222-05260D949AB4}"/>
+                <a16:creationId xmlns:a16="http://schemas.microsoft.com/office/drawing/2014/main" id="{357F3CA9-3DA4-41AB-98D7-4A4FC668FA27}"/>
               </a:ext>
             </a:extLst>
           </p:cNvPr>
@@ -8109,7 +8109,7 @@
           <p:cNvPr id="5" name="">
             <a:extLst xmlns:a="http://schemas.openxmlformats.org/drawingml/2006/main">
               <a:ext uri="{FF2B5EF4-FFF2-40B4-BE49-F238E27FC236}">
-                <a16:creationId xmlns:a16="http://schemas.microsoft.com/office/drawing/2014/main" id="{71C16E4D-DD5D-44CA-BBAC-64A9E1076433}"/>
+                <a16:creationId xmlns:a16="http://schemas.microsoft.com/office/drawing/2014/main" id="{0F94E03A-EF53-4744-9CFC-6AF71435A1B6}"/>
               </a:ext>
             </a:extLst>
           </p:cNvPr>
@@ -8175,7 +8175,7 @@
     </p:spTree>
     <p:extLst>
       <p:ext uri="{BB962C8B-B14F-4D97-AF65-F5344CB8AC3E}">
-        <p14:creationId xmlns:p14="http://schemas.microsoft.com/office/powerpoint/2010/main" val="1006145719"/>
+        <p14:creationId xmlns:p14="http://schemas.microsoft.com/office/powerpoint/2010/main" val="447391792"/>
       </p:ext>
     </p:extLst>
   </p:cSld>
@@ -8206,7 +8206,7 @@
           <p:cNvPr id="7" name="">
             <a:extLst xmlns:a="http://schemas.openxmlformats.org/drawingml/2006/main">
               <a:ext uri="{FF2B5EF4-FFF2-40B4-BE49-F238E27FC236}">
-                <a16:creationId xmlns:a16="http://schemas.microsoft.com/office/drawing/2014/main" id="{0D3122E3-80F2-44DF-B917-889B5C4E408A}"/>
+                <a16:creationId xmlns:a16="http://schemas.microsoft.com/office/drawing/2014/main" id="{04F5ED85-B4D0-433B-A2D7-4E84022449B5}"/>
               </a:ext>
             </a:extLst>
           </p:cNvPr>
@@ -8264,7 +8264,7 @@
                 <a:ea typeface="Arial"/>
                 <a:cs typeface="Arial"/>
               </a:rPr>
-              <a:t>45–50 MIN</a:t>
+              <a:t>40–45 MIN</a:t>
             </a:r>
           </a:p>
         </p:txBody>
@@ -8274,7 +8274,7 @@
           <p:cNvPr id="2" name="">
             <a:extLst xmlns:a="http://schemas.openxmlformats.org/drawingml/2006/main">
               <a:ext uri="{FF2B5EF4-FFF2-40B4-BE49-F238E27FC236}">
-                <a16:creationId xmlns:a16="http://schemas.microsoft.com/office/drawing/2014/main" id="{F26E51E8-0EAC-434A-AAE2-35B59D213DE9}"/>
+                <a16:creationId xmlns:a16="http://schemas.microsoft.com/office/drawing/2014/main" id="{AB1BB486-0118-46DF-9814-1869847E1A2A}"/>
               </a:ext>
             </a:extLst>
           </p:cNvPr>
@@ -8342,7 +8342,7 @@
           <p:cNvPr id="3" name="">
             <a:extLst xmlns:a="http://schemas.openxmlformats.org/drawingml/2006/main">
               <a:ext uri="{FF2B5EF4-FFF2-40B4-BE49-F238E27FC236}">
-                <a16:creationId xmlns:a16="http://schemas.microsoft.com/office/drawing/2014/main" id="{1C2FDB2E-64EC-4C01-BE7A-3107AD522541}"/>
+                <a16:creationId xmlns:a16="http://schemas.microsoft.com/office/drawing/2014/main" id="{0E2F9C5D-FFDF-4070-99ED-399B1C83C62B}"/>
               </a:ext>
             </a:extLst>
           </p:cNvPr>
@@ -8410,7 +8410,7 @@
           <p:cNvPr id="4" name="">
             <a:extLst xmlns:a="http://schemas.openxmlformats.org/drawingml/2006/main">
               <a:ext uri="{FF2B5EF4-FFF2-40B4-BE49-F238E27FC236}">
-                <a16:creationId xmlns:a16="http://schemas.microsoft.com/office/drawing/2014/main" id="{CAAB5CB1-ECA7-4158-BB69-807ADE0B3659}"/>
+                <a16:creationId xmlns:a16="http://schemas.microsoft.com/office/drawing/2014/main" id="{243B2FD6-BDE3-4E23-9B79-54CD4494735F}"/>
               </a:ext>
             </a:extLst>
           </p:cNvPr>
@@ -8534,7 +8534,7 @@
           <p:cNvPr id="5" name="">
             <a:extLst xmlns:a="http://schemas.openxmlformats.org/drawingml/2006/main">
               <a:ext uri="{FF2B5EF4-FFF2-40B4-BE49-F238E27FC236}">
-                <a16:creationId xmlns:a16="http://schemas.microsoft.com/office/drawing/2014/main" id="{84A9FF52-2F40-4C8F-8B67-72B757D2D73D}"/>
+                <a16:creationId xmlns:a16="http://schemas.microsoft.com/office/drawing/2014/main" id="{B1508C65-6724-4171-A23E-27826E7E0DC5}"/>
               </a:ext>
             </a:extLst>
           </p:cNvPr>
@@ -8602,7 +8602,7 @@
           <p:cNvPr id="6" name="">
             <a:extLst xmlns:a="http://schemas.openxmlformats.org/drawingml/2006/main">
               <a:ext uri="{FF2B5EF4-FFF2-40B4-BE49-F238E27FC236}">
-                <a16:creationId xmlns:a16="http://schemas.microsoft.com/office/drawing/2014/main" id="{AC25C2E4-A71D-4C4F-92CF-E81E9CF953FD}"/>
+                <a16:creationId xmlns:a16="http://schemas.microsoft.com/office/drawing/2014/main" id="{0EA15195-3615-474B-9F24-2F5C042B63B0}"/>
               </a:ext>
             </a:extLst>
           </p:cNvPr>
@@ -8668,7 +8668,7 @@
     </p:spTree>
     <p:extLst>
       <p:ext uri="{BB962C8B-B14F-4D97-AF65-F5344CB8AC3E}">
-        <p14:creationId xmlns:p14="http://schemas.microsoft.com/office/powerpoint/2010/main" val="1623445013"/>
+        <p14:creationId xmlns:p14="http://schemas.microsoft.com/office/powerpoint/2010/main" val="1547882088"/>
       </p:ext>
     </p:extLst>
   </p:cSld>
@@ -8699,7 +8699,7 @@
           <p:cNvPr id="6" name="">
             <a:extLst xmlns:a="http://schemas.openxmlformats.org/drawingml/2006/main">
               <a:ext uri="{FF2B5EF4-FFF2-40B4-BE49-F238E27FC236}">
-                <a16:creationId xmlns:a16="http://schemas.microsoft.com/office/drawing/2014/main" id="{6EAACF28-D1B2-4F6F-8B1C-2A0C1B70A3D4}"/>
+                <a16:creationId xmlns:a16="http://schemas.microsoft.com/office/drawing/2014/main" id="{99BC17F2-287A-4BA3-9E65-4F87CC407112}"/>
               </a:ext>
             </a:extLst>
           </p:cNvPr>
@@ -8757,7 +8757,7 @@
                 <a:ea typeface="Arial"/>
                 <a:cs typeface="Arial"/>
               </a:rPr>
-              <a:t>50–55 MIN</a:t>
+              <a:t>45–50 MIN</a:t>
             </a:r>
           </a:p>
         </p:txBody>
@@ -8767,7 +8767,7 @@
           <p:cNvPr id="2" name="">
             <a:extLst xmlns:a="http://schemas.openxmlformats.org/drawingml/2006/main">
               <a:ext uri="{FF2B5EF4-FFF2-40B4-BE49-F238E27FC236}">
-                <a16:creationId xmlns:a16="http://schemas.microsoft.com/office/drawing/2014/main" id="{ADFB48AB-5ACD-4803-8D2A-0FC3759468A5}"/>
+                <a16:creationId xmlns:a16="http://schemas.microsoft.com/office/drawing/2014/main" id="{807E809A-5065-420F-8A80-82B53C7EEF7F}"/>
               </a:ext>
             </a:extLst>
           </p:cNvPr>
@@ -8835,7 +8835,7 @@
           <p:cNvPr id="3" name="">
             <a:extLst xmlns:a="http://schemas.openxmlformats.org/drawingml/2006/main">
               <a:ext uri="{FF2B5EF4-FFF2-40B4-BE49-F238E27FC236}">
-                <a16:creationId xmlns:a16="http://schemas.microsoft.com/office/drawing/2014/main" id="{6DA3E4A2-7F87-482F-9624-48EC79B4553C}"/>
+                <a16:creationId xmlns:a16="http://schemas.microsoft.com/office/drawing/2014/main" id="{8F3077AC-7D8B-4EAF-B4FA-038B69F65521}"/>
               </a:ext>
             </a:extLst>
           </p:cNvPr>
@@ -8903,7 +8903,7 @@
           <p:cNvPr id="4" name="">
             <a:extLst xmlns:a="http://schemas.openxmlformats.org/drawingml/2006/main">
               <a:ext uri="{FF2B5EF4-FFF2-40B4-BE49-F238E27FC236}">
-                <a16:creationId xmlns:a16="http://schemas.microsoft.com/office/drawing/2014/main" id="{65FE4E03-4983-4526-9238-94168557A13F}"/>
+                <a16:creationId xmlns:a16="http://schemas.microsoft.com/office/drawing/2014/main" id="{9A2B8C52-E954-4964-8945-5BED87AFD573}"/>
               </a:ext>
             </a:extLst>
           </p:cNvPr>
@@ -9027,7 +9027,7 @@
           <p:cNvPr id="5" name="">
             <a:extLst xmlns:a="http://schemas.openxmlformats.org/drawingml/2006/main">
               <a:ext uri="{FF2B5EF4-FFF2-40B4-BE49-F238E27FC236}">
-                <a16:creationId xmlns:a16="http://schemas.microsoft.com/office/drawing/2014/main" id="{2631ECBE-2A70-4C9F-ABAE-1AB87F405388}"/>
+                <a16:creationId xmlns:a16="http://schemas.microsoft.com/office/drawing/2014/main" id="{25156EA3-7CFF-400B-A7D0-860DACDA93B5}"/>
               </a:ext>
             </a:extLst>
           </p:cNvPr>
@@ -9093,7 +9093,7 @@
     </p:spTree>
     <p:extLst>
       <p:ext uri="{BB962C8B-B14F-4D97-AF65-F5344CB8AC3E}">
-        <p14:creationId xmlns:p14="http://schemas.microsoft.com/office/powerpoint/2010/main" val="1182432569"/>
+        <p14:creationId xmlns:p14="http://schemas.microsoft.com/office/powerpoint/2010/main" val="642661569"/>
       </p:ext>
     </p:extLst>
   </p:cSld>
